--- a/slides/1st_stage/E_business_law.pptx
+++ b/slides/1st_stage/E_business_law.pptx
@@ -13391,13 +13391,76 @@
       </p:sp>
       <p:sp>
         <p:nvSpPr>
-          <p:cNvPr id="18" name="Shape 16"/>
+          <p:cNvPr id="18" name="Text 16"/>
+          <p:cNvSpPr txBox="1"/>
+          <p:nvPr/>
+        </p:nvSpPr>
+        <p:spPr>
+          <a:xfrm>
+            <a:off x="502920" y="3392424"/>
+            <a:ext cx="11201400" cy="640080"/>
+          </a:xfrm>
+          <a:prstGeom prst="rect">
+            <a:avLst/>
+          </a:prstGeom>
+          <a:noFill/>
+          <a:ln/>
+        </p:spPr>
+        <p:txBody>
+          <a:bodyPr wrap="square" lIns="0" tIns="0" rIns="0" bIns="0" rtlCol="0" anchor="ctr"/>
+          <a:lstStyle/>
+          <a:p>
+            <a:pPr indent="0" marL="0">
+              <a:lnSpc>
+                <a:spcPct val="120000"/>
+              </a:lnSpc>
+              <a:buNone/>
+            </a:pPr>
+            <a:r>
+              <a:rPr lang="en-US" sz="850" b="1" dirty="0">
+                <a:solidFill>
+                  <a:srgbClr val="8A8A8A"/>
+                </a:solidFill>
+                <a:latin typeface="Consolas" pitchFamily="34" charset="0"/>
+                <a:ea typeface="Consolas" pitchFamily="34" charset="-122"/>
+                <a:cs typeface="Consolas" pitchFamily="34" charset="-120"/>
+              </a:rPr>
+              <a:t>具体例
+</a:t>
+            </a:r>
+            <a:endParaRPr lang="en-US" sz="850" dirty="0"/>
+          </a:p>
+          <a:p>
+            <a:pPr indent="0" marL="0">
+              <a:lnSpc>
+                <a:spcPct val="120000"/>
+              </a:lnSpc>
+              <a:buNone/>
+            </a:pPr>
+            <a:r>
+              <a:rPr lang="en-US" sz="950" dirty="0">
+                <a:solidFill>
+                  <a:srgbClr val="171717"/>
+                </a:solidFill>
+                <a:latin typeface="Yu Gothic" pitchFamily="34" charset="0"/>
+                <a:ea typeface="Yu Gothic" pitchFamily="34" charset="-122"/>
+                <a:cs typeface="Yu Gothic" pitchFamily="34" charset="-120"/>
+              </a:rPr>
+              <a:t>ソフトウェア会社A社の社員が、会社の指示で業務時間中に業務用プログラムを作成した場合、就業規則に特段の定めがなければそのプログラムの著作者はA社自身になる（職務著作）。一方、その社員が休日に趣味で書いた小説の著作者は、あくまで社員個人である。</a:t>
+            </a:r>
+            <a:endParaRPr lang="en-US" sz="850" dirty="0"/>
+          </a:p>
+        </p:txBody>
+      </p:sp>
+      <p:sp>
+        <p:nvSpPr>
+          <p:cNvPr id="19" name="Shape 17"/>
           <p:cNvSpPr/>
           <p:nvPr/>
         </p:nvSpPr>
         <p:spPr>
           <a:xfrm>
-            <a:off x="502920" y="3410712"/>
+            <a:off x="502920" y="4078224"/>
             <a:ext cx="11201400" cy="0"/>
           </a:xfrm>
           <a:prstGeom prst="line">
@@ -13414,13 +13477,13 @@
       </p:sp>
       <p:sp>
         <p:nvSpPr>
-          <p:cNvPr id="19" name="Text 17"/>
-          <p:cNvSpPr txBox="1"/>
-          <p:nvPr/>
-        </p:nvSpPr>
-        <p:spPr>
-          <a:xfrm>
-            <a:off x="502920" y="3483864"/>
+          <p:cNvPr id="20" name="Text 18"/>
+          <p:cNvSpPr txBox="1"/>
+          <p:nvPr/>
+        </p:nvSpPr>
+        <p:spPr>
+          <a:xfrm>
+            <a:off x="502920" y="4151376"/>
             <a:ext cx="11201400" cy="457200"/>
           </a:xfrm>
           <a:prstGeom prst="rect">
@@ -13473,7 +13536,7 @@
       </p:sp>
       <p:sp>
         <p:nvSpPr>
-          <p:cNvPr id="20" name="Shape 18"/>
+          <p:cNvPr id="21" name="Shape 19"/>
           <p:cNvSpPr/>
           <p:nvPr/>
         </p:nvSpPr>
@@ -13496,7 +13559,7 @@
       </p:sp>
       <p:sp>
         <p:nvSpPr>
-          <p:cNvPr id="21" name="Shape 19"/>
+          <p:cNvPr id="22" name="Shape 20"/>
           <p:cNvSpPr/>
           <p:nvPr/>
         </p:nvSpPr>
@@ -13516,7 +13579,7 @@
       </p:sp>
       <p:sp>
         <p:nvSpPr>
-          <p:cNvPr id="22" name="Text 20"/>
+          <p:cNvPr id="23" name="Text 21"/>
           <p:cNvSpPr txBox="1"/>
           <p:nvPr/>
         </p:nvSpPr>
@@ -13555,7 +13618,7 @@
       </p:sp>
       <p:sp>
         <p:nvSpPr>
-          <p:cNvPr id="23" name="Text 21"/>
+          <p:cNvPr id="24" name="Text 22"/>
           <p:cNvSpPr txBox="1"/>
           <p:nvPr/>
         </p:nvSpPr>
@@ -13594,7 +13657,7 @@
       </p:sp>
       <p:sp>
         <p:nvSpPr>
-          <p:cNvPr id="24" name="Shape 22"/>
+          <p:cNvPr id="25" name="Shape 23"/>
           <p:cNvSpPr/>
           <p:nvPr/>
         </p:nvSpPr>
@@ -13617,7 +13680,7 @@
       </p:sp>
       <p:sp>
         <p:nvSpPr>
-          <p:cNvPr id="25" name="Text 23"/>
+          <p:cNvPr id="26" name="Text 24"/>
           <p:cNvSpPr txBox="1"/>
           <p:nvPr/>
         </p:nvSpPr>
@@ -13656,7 +13719,7 @@
       </p:sp>
       <p:sp>
         <p:nvSpPr>
-          <p:cNvPr id="26" name="Text 24"/>
+          <p:cNvPr id="27" name="Text 25"/>
           <p:cNvSpPr txBox="1"/>
           <p:nvPr/>
         </p:nvSpPr>
@@ -13695,7 +13758,7 @@
       </p:sp>
       <p:sp>
         <p:nvSpPr>
-          <p:cNvPr id="27" name="Shape 25"/>
+          <p:cNvPr id="28" name="Shape 26"/>
           <p:cNvSpPr/>
           <p:nvPr/>
         </p:nvSpPr>
@@ -13720,7 +13783,7 @@
       </p:sp>
       <p:sp>
         <p:nvSpPr>
-          <p:cNvPr id="28" name="Text 26"/>
+          <p:cNvPr id="29" name="Text 27"/>
           <p:cNvSpPr txBox="1"/>
           <p:nvPr/>
         </p:nvSpPr>
@@ -13759,7 +13822,7 @@
       </p:sp>
       <p:sp>
         <p:nvSpPr>
-          <p:cNvPr id="29" name="Shape 27"/>
+          <p:cNvPr id="30" name="Shape 28"/>
           <p:cNvSpPr/>
           <p:nvPr/>
         </p:nvSpPr>
@@ -13784,7 +13847,7 @@
       </p:sp>
       <p:sp>
         <p:nvSpPr>
-          <p:cNvPr id="30" name="Text 28"/>
+          <p:cNvPr id="31" name="Text 29"/>
           <p:cNvSpPr txBox="1"/>
           <p:nvPr/>
         </p:nvSpPr>
@@ -13823,7 +13886,7 @@
       </p:sp>
       <p:sp>
         <p:nvSpPr>
-          <p:cNvPr id="31" name="Shape 29"/>
+          <p:cNvPr id="32" name="Shape 30"/>
           <p:cNvSpPr/>
           <p:nvPr/>
         </p:nvSpPr>
@@ -13848,7 +13911,7 @@
       </p:sp>
       <p:sp>
         <p:nvSpPr>
-          <p:cNvPr id="32" name="Text 30"/>
+          <p:cNvPr id="33" name="Text 31"/>
           <p:cNvSpPr txBox="1"/>
           <p:nvPr/>
         </p:nvSpPr>
@@ -13887,7 +13950,7 @@
       </p:sp>
       <p:sp>
         <p:nvSpPr>
-          <p:cNvPr id="33" name="Shape 31"/>
+          <p:cNvPr id="34" name="Shape 32"/>
           <p:cNvSpPr/>
           <p:nvPr/>
         </p:nvSpPr>
@@ -13912,7 +13975,7 @@
       </p:sp>
       <p:sp>
         <p:nvSpPr>
-          <p:cNvPr id="34" name="Text 32"/>
+          <p:cNvPr id="35" name="Text 33"/>
           <p:cNvSpPr txBox="1"/>
           <p:nvPr/>
         </p:nvSpPr>
@@ -13951,7 +14014,7 @@
       </p:sp>
       <p:sp>
         <p:nvSpPr>
-          <p:cNvPr id="35" name="Shape 33"/>
+          <p:cNvPr id="36" name="Shape 34"/>
           <p:cNvSpPr/>
           <p:nvPr/>
         </p:nvSpPr>
@@ -13976,7 +14039,7 @@
       </p:sp>
       <p:sp>
         <p:nvSpPr>
-          <p:cNvPr id="36" name="Text 34"/>
+          <p:cNvPr id="37" name="Text 35"/>
           <p:cNvSpPr txBox="1"/>
           <p:nvPr/>
         </p:nvSpPr>
@@ -14015,7 +14078,7 @@
       </p:sp>
       <p:sp>
         <p:nvSpPr>
-          <p:cNvPr id="37" name="Shape 35"/>
+          <p:cNvPr id="38" name="Shape 36"/>
           <p:cNvSpPr/>
           <p:nvPr/>
         </p:nvSpPr>
@@ -14040,7 +14103,7 @@
       </p:sp>
       <p:sp>
         <p:nvSpPr>
-          <p:cNvPr id="38" name="Text 36"/>
+          <p:cNvPr id="39" name="Text 37"/>
           <p:cNvSpPr txBox="1"/>
           <p:nvPr/>
         </p:nvSpPr>
@@ -14079,7 +14142,7 @@
       </p:sp>
       <p:sp>
         <p:nvSpPr>
-          <p:cNvPr id="39" name="Shape 37"/>
+          <p:cNvPr id="40" name="Shape 38"/>
           <p:cNvSpPr/>
           <p:nvPr/>
         </p:nvSpPr>
@@ -14104,7 +14167,7 @@
       </p:sp>
       <p:sp>
         <p:nvSpPr>
-          <p:cNvPr id="40" name="Text 38"/>
+          <p:cNvPr id="41" name="Text 39"/>
           <p:cNvSpPr txBox="1"/>
           <p:nvPr/>
         </p:nvSpPr>
@@ -14143,7 +14206,7 @@
       </p:sp>
       <p:sp>
         <p:nvSpPr>
-          <p:cNvPr id="41" name="Shape 39"/>
+          <p:cNvPr id="42" name="Shape 40"/>
           <p:cNvSpPr/>
           <p:nvPr/>
         </p:nvSpPr>
@@ -14168,7 +14231,7 @@
       </p:sp>
       <p:sp>
         <p:nvSpPr>
-          <p:cNvPr id="42" name="Text 40"/>
+          <p:cNvPr id="43" name="Text 41"/>
           <p:cNvSpPr txBox="1"/>
           <p:nvPr/>
         </p:nvSpPr>
@@ -14207,7 +14270,7 @@
       </p:sp>
       <p:sp>
         <p:nvSpPr>
-          <p:cNvPr id="43" name="Shape 41"/>
+          <p:cNvPr id="44" name="Shape 42"/>
           <p:cNvSpPr/>
           <p:nvPr/>
         </p:nvSpPr>
@@ -14232,7 +14295,7 @@
       </p:sp>
       <p:sp>
         <p:nvSpPr>
-          <p:cNvPr id="44" name="Text 42"/>
+          <p:cNvPr id="45" name="Text 43"/>
           <p:cNvSpPr txBox="1"/>
           <p:nvPr/>
         </p:nvSpPr>
@@ -14271,7 +14334,7 @@
       </p:sp>
       <p:sp>
         <p:nvSpPr>
-          <p:cNvPr id="45" name="Shape 43"/>
+          <p:cNvPr id="46" name="Shape 44"/>
           <p:cNvSpPr/>
           <p:nvPr/>
         </p:nvSpPr>
@@ -14296,7 +14359,7 @@
       </p:sp>
       <p:sp>
         <p:nvSpPr>
-          <p:cNvPr id="46" name="Text 44"/>
+          <p:cNvPr id="47" name="Text 45"/>
           <p:cNvSpPr txBox="1"/>
           <p:nvPr/>
         </p:nvSpPr>
@@ -15400,13 +15463,76 @@
       </p:sp>
       <p:sp>
         <p:nvSpPr>
-          <p:cNvPr id="21" name="Shape 19"/>
+          <p:cNvPr id="21" name="Text 19"/>
+          <p:cNvSpPr txBox="1"/>
+          <p:nvPr/>
+        </p:nvSpPr>
+        <p:spPr>
+          <a:xfrm>
+            <a:off x="502920" y="3593592"/>
+            <a:ext cx="11201400" cy="594360"/>
+          </a:xfrm>
+          <a:prstGeom prst="rect">
+            <a:avLst/>
+          </a:prstGeom>
+          <a:noFill/>
+          <a:ln/>
+        </p:spPr>
+        <p:txBody>
+          <a:bodyPr wrap="square" lIns="0" tIns="0" rIns="0" bIns="0" rtlCol="0" anchor="ctr"/>
+          <a:lstStyle/>
+          <a:p>
+            <a:pPr indent="0" marL="0">
+              <a:lnSpc>
+                <a:spcPct val="115000"/>
+              </a:lnSpc>
+              <a:buNone/>
+            </a:pPr>
+            <a:r>
+              <a:rPr lang="en-US" sz="850" b="1" dirty="0">
+                <a:solidFill>
+                  <a:srgbClr val="8A8A8A"/>
+                </a:solidFill>
+                <a:latin typeface="Consolas" pitchFamily="34" charset="0"/>
+                <a:ea typeface="Consolas" pitchFamily="34" charset="-122"/>
+                <a:cs typeface="Consolas" pitchFamily="34" charset="-120"/>
+              </a:rPr>
+              <a:t>具体例
+</a:t>
+            </a:r>
+            <a:endParaRPr lang="en-US" sz="850" dirty="0"/>
+          </a:p>
+          <a:p>
+            <a:pPr indent="0" marL="0">
+              <a:lnSpc>
+                <a:spcPct val="115000"/>
+              </a:lnSpc>
+              <a:buNone/>
+            </a:pPr>
+            <a:r>
+              <a:rPr lang="en-US" sz="900" dirty="0">
+                <a:solidFill>
+                  <a:srgbClr val="171717"/>
+                </a:solidFill>
+                <a:latin typeface="Yu Gothic" pitchFamily="34" charset="0"/>
+                <a:ea typeface="Yu Gothic" pitchFamily="34" charset="-122"/>
+                <a:cs typeface="Yu Gothic" pitchFamily="34" charset="-120"/>
+              </a:rPr>
+              <a:t>ある作家が2020年に死亡した場合、その作品の著作権は原則として死後70年、つまり2090年まで保護される。一方、企業A社が組織として発表した広報用パンフレットの文章（法人名義の著作物）は、公表から70年間保護される。</a:t>
+            </a:r>
+            <a:endParaRPr lang="en-US" sz="850" dirty="0"/>
+          </a:p>
+        </p:txBody>
+      </p:sp>
+      <p:sp>
+        <p:nvSpPr>
+          <p:cNvPr id="22" name="Shape 20"/>
           <p:cNvSpPr/>
           <p:nvPr/>
         </p:nvSpPr>
         <p:spPr>
           <a:xfrm>
-            <a:off x="502920" y="3611880"/>
+            <a:off x="502920" y="4233672"/>
             <a:ext cx="11201400" cy="0"/>
           </a:xfrm>
           <a:prstGeom prst="line">
@@ -15423,13 +15549,13 @@
       </p:sp>
       <p:sp>
         <p:nvSpPr>
-          <p:cNvPr id="22" name="Text 20"/>
-          <p:cNvSpPr txBox="1"/>
-          <p:nvPr/>
-        </p:nvSpPr>
-        <p:spPr>
-          <a:xfrm>
-            <a:off x="502920" y="3685032"/>
+          <p:cNvPr id="23" name="Text 21"/>
+          <p:cNvSpPr txBox="1"/>
+          <p:nvPr/>
+        </p:nvSpPr>
+        <p:spPr>
+          <a:xfrm>
+            <a:off x="502920" y="4306824"/>
             <a:ext cx="11201400" cy="457200"/>
           </a:xfrm>
           <a:prstGeom prst="rect">
@@ -15482,7 +15608,7 @@
       </p:sp>
       <p:sp>
         <p:nvSpPr>
-          <p:cNvPr id="23" name="Shape 21"/>
+          <p:cNvPr id="24" name="Shape 22"/>
           <p:cNvSpPr/>
           <p:nvPr/>
         </p:nvSpPr>
@@ -15505,7 +15631,7 @@
       </p:sp>
       <p:sp>
         <p:nvSpPr>
-          <p:cNvPr id="24" name="Shape 22"/>
+          <p:cNvPr id="25" name="Shape 23"/>
           <p:cNvSpPr/>
           <p:nvPr/>
         </p:nvSpPr>
@@ -15525,7 +15651,7 @@
       </p:sp>
       <p:sp>
         <p:nvSpPr>
-          <p:cNvPr id="25" name="Text 23"/>
+          <p:cNvPr id="26" name="Text 24"/>
           <p:cNvSpPr txBox="1"/>
           <p:nvPr/>
         </p:nvSpPr>
@@ -15564,7 +15690,7 @@
       </p:sp>
       <p:sp>
         <p:nvSpPr>
-          <p:cNvPr id="26" name="Text 24"/>
+          <p:cNvPr id="27" name="Text 25"/>
           <p:cNvSpPr txBox="1"/>
           <p:nvPr/>
         </p:nvSpPr>
@@ -15603,7 +15729,7 @@
       </p:sp>
       <p:sp>
         <p:nvSpPr>
-          <p:cNvPr id="27" name="Shape 25"/>
+          <p:cNvPr id="28" name="Shape 26"/>
           <p:cNvSpPr/>
           <p:nvPr/>
         </p:nvSpPr>
@@ -15626,7 +15752,7 @@
       </p:sp>
       <p:sp>
         <p:nvSpPr>
-          <p:cNvPr id="28" name="Text 26"/>
+          <p:cNvPr id="29" name="Text 27"/>
           <p:cNvSpPr txBox="1"/>
           <p:nvPr/>
         </p:nvSpPr>
@@ -15665,7 +15791,7 @@
       </p:sp>
       <p:sp>
         <p:nvSpPr>
-          <p:cNvPr id="29" name="Text 27"/>
+          <p:cNvPr id="30" name="Text 28"/>
           <p:cNvSpPr txBox="1"/>
           <p:nvPr/>
         </p:nvSpPr>
@@ -15704,7 +15830,7 @@
       </p:sp>
       <p:sp>
         <p:nvSpPr>
-          <p:cNvPr id="30" name="Shape 28"/>
+          <p:cNvPr id="31" name="Shape 29"/>
           <p:cNvSpPr/>
           <p:nvPr/>
         </p:nvSpPr>
@@ -15729,7 +15855,7 @@
       </p:sp>
       <p:sp>
         <p:nvSpPr>
-          <p:cNvPr id="31" name="Text 29"/>
+          <p:cNvPr id="32" name="Text 30"/>
           <p:cNvSpPr txBox="1"/>
           <p:nvPr/>
         </p:nvSpPr>
@@ -15768,7 +15894,7 @@
       </p:sp>
       <p:sp>
         <p:nvSpPr>
-          <p:cNvPr id="32" name="Shape 30"/>
+          <p:cNvPr id="33" name="Shape 31"/>
           <p:cNvSpPr/>
           <p:nvPr/>
         </p:nvSpPr>
@@ -15793,7 +15919,7 @@
       </p:sp>
       <p:sp>
         <p:nvSpPr>
-          <p:cNvPr id="33" name="Text 31"/>
+          <p:cNvPr id="34" name="Text 32"/>
           <p:cNvSpPr txBox="1"/>
           <p:nvPr/>
         </p:nvSpPr>
@@ -15832,7 +15958,7 @@
       </p:sp>
       <p:sp>
         <p:nvSpPr>
-          <p:cNvPr id="34" name="Shape 32"/>
+          <p:cNvPr id="35" name="Shape 33"/>
           <p:cNvSpPr/>
           <p:nvPr/>
         </p:nvSpPr>
@@ -15857,7 +15983,7 @@
       </p:sp>
       <p:sp>
         <p:nvSpPr>
-          <p:cNvPr id="35" name="Text 33"/>
+          <p:cNvPr id="36" name="Text 34"/>
           <p:cNvSpPr txBox="1"/>
           <p:nvPr/>
         </p:nvSpPr>
@@ -15896,7 +16022,7 @@
       </p:sp>
       <p:sp>
         <p:nvSpPr>
-          <p:cNvPr id="36" name="Shape 34"/>
+          <p:cNvPr id="37" name="Shape 35"/>
           <p:cNvSpPr/>
           <p:nvPr/>
         </p:nvSpPr>
@@ -15921,7 +16047,7 @@
       </p:sp>
       <p:sp>
         <p:nvSpPr>
-          <p:cNvPr id="37" name="Text 35"/>
+          <p:cNvPr id="38" name="Text 36"/>
           <p:cNvSpPr txBox="1"/>
           <p:nvPr/>
         </p:nvSpPr>
@@ -15960,7 +16086,7 @@
       </p:sp>
       <p:sp>
         <p:nvSpPr>
-          <p:cNvPr id="38" name="Shape 36"/>
+          <p:cNvPr id="39" name="Shape 37"/>
           <p:cNvSpPr/>
           <p:nvPr/>
         </p:nvSpPr>
@@ -15985,7 +16111,7 @@
       </p:sp>
       <p:sp>
         <p:nvSpPr>
-          <p:cNvPr id="39" name="Text 37"/>
+          <p:cNvPr id="40" name="Text 38"/>
           <p:cNvSpPr txBox="1"/>
           <p:nvPr/>
         </p:nvSpPr>
@@ -16024,7 +16150,7 @@
       </p:sp>
       <p:sp>
         <p:nvSpPr>
-          <p:cNvPr id="40" name="Shape 38"/>
+          <p:cNvPr id="41" name="Shape 39"/>
           <p:cNvSpPr/>
           <p:nvPr/>
         </p:nvSpPr>
@@ -16049,7 +16175,7 @@
       </p:sp>
       <p:sp>
         <p:nvSpPr>
-          <p:cNvPr id="41" name="Text 39"/>
+          <p:cNvPr id="42" name="Text 40"/>
           <p:cNvSpPr txBox="1"/>
           <p:nvPr/>
         </p:nvSpPr>
@@ -16088,7 +16214,7 @@
       </p:sp>
       <p:sp>
         <p:nvSpPr>
-          <p:cNvPr id="42" name="Shape 40"/>
+          <p:cNvPr id="43" name="Shape 41"/>
           <p:cNvSpPr/>
           <p:nvPr/>
         </p:nvSpPr>
@@ -16113,7 +16239,7 @@
       </p:sp>
       <p:sp>
         <p:nvSpPr>
-          <p:cNvPr id="43" name="Text 41"/>
+          <p:cNvPr id="44" name="Text 42"/>
           <p:cNvSpPr txBox="1"/>
           <p:nvPr/>
         </p:nvSpPr>
@@ -16152,7 +16278,7 @@
       </p:sp>
       <p:sp>
         <p:nvSpPr>
-          <p:cNvPr id="44" name="Shape 42"/>
+          <p:cNvPr id="45" name="Shape 43"/>
           <p:cNvSpPr/>
           <p:nvPr/>
         </p:nvSpPr>
@@ -16177,7 +16303,7 @@
       </p:sp>
       <p:sp>
         <p:nvSpPr>
-          <p:cNvPr id="45" name="Text 43"/>
+          <p:cNvPr id="46" name="Text 44"/>
           <p:cNvSpPr txBox="1"/>
           <p:nvPr/>
         </p:nvSpPr>
@@ -16216,7 +16342,7 @@
       </p:sp>
       <p:sp>
         <p:nvSpPr>
-          <p:cNvPr id="46" name="Shape 44"/>
+          <p:cNvPr id="47" name="Shape 45"/>
           <p:cNvSpPr/>
           <p:nvPr/>
         </p:nvSpPr>
@@ -16241,7 +16367,7 @@
       </p:sp>
       <p:sp>
         <p:nvSpPr>
-          <p:cNvPr id="47" name="Text 45"/>
+          <p:cNvPr id="48" name="Text 46"/>
           <p:cNvSpPr txBox="1"/>
           <p:nvPr/>
         </p:nvSpPr>
@@ -16280,7 +16406,7 @@
       </p:sp>
       <p:sp>
         <p:nvSpPr>
-          <p:cNvPr id="48" name="Shape 46"/>
+          <p:cNvPr id="49" name="Shape 47"/>
           <p:cNvSpPr/>
           <p:nvPr/>
         </p:nvSpPr>
@@ -16305,7 +16431,7 @@
       </p:sp>
       <p:sp>
         <p:nvSpPr>
-          <p:cNvPr id="49" name="Text 47"/>
+          <p:cNvPr id="50" name="Text 48"/>
           <p:cNvSpPr txBox="1"/>
           <p:nvPr/>
         </p:nvSpPr>
@@ -17051,7 +17177,7 @@
         <p:spPr>
           <a:xfrm>
             <a:off x="2423160" y="2267712"/>
-            <a:ext cx="9281160" cy="941832"/>
+            <a:ext cx="9281160" cy="667512"/>
           </a:xfrm>
           <a:prstGeom prst="rect">
             <a:avLst/>
@@ -17092,7 +17218,7 @@
         </p:nvSpPr>
         <p:spPr>
           <a:xfrm>
-            <a:off x="502920" y="3291840"/>
+            <a:off x="502920" y="3017520"/>
             <a:ext cx="11201400" cy="0"/>
           </a:xfrm>
           <a:prstGeom prst="line">
@@ -17115,7 +17241,7 @@
         </p:nvSpPr>
         <p:spPr>
           <a:xfrm>
-            <a:off x="502920" y="3401568"/>
+            <a:off x="502920" y="3127248"/>
             <a:ext cx="1828800" cy="320040"/>
           </a:xfrm>
           <a:prstGeom prst="rect">
@@ -17154,7 +17280,7 @@
         </p:nvSpPr>
         <p:spPr>
           <a:xfrm>
-            <a:off x="2423160" y="3419856"/>
+            <a:off x="2423160" y="3145536"/>
             <a:ext cx="2011680" cy="274320"/>
           </a:xfrm>
           <a:prstGeom prst="rect">
@@ -17193,8 +17319,8 @@
         </p:nvSpPr>
         <p:spPr>
           <a:xfrm>
-            <a:off x="4526280" y="3364992"/>
-            <a:ext cx="7178040" cy="941832"/>
+            <a:off x="4526280" y="3090672"/>
+            <a:ext cx="7178040" cy="667512"/>
           </a:xfrm>
           <a:prstGeom prst="rect">
             <a:avLst/>
@@ -17235,7 +17361,7 @@
         </p:nvSpPr>
         <p:spPr>
           <a:xfrm>
-            <a:off x="502920" y="4389120"/>
+            <a:off x="502920" y="3840480"/>
             <a:ext cx="11201400" cy="0"/>
           </a:xfrm>
           <a:prstGeom prst="line">
@@ -17258,7 +17384,7 @@
         </p:nvSpPr>
         <p:spPr>
           <a:xfrm>
-            <a:off x="502920" y="4498848"/>
+            <a:off x="502920" y="3950208"/>
             <a:ext cx="1828800" cy="320040"/>
           </a:xfrm>
           <a:prstGeom prst="rect">
@@ -17297,7 +17423,7 @@
         </p:nvSpPr>
         <p:spPr>
           <a:xfrm>
-            <a:off x="2423160" y="4517136"/>
+            <a:off x="2423160" y="3968496"/>
             <a:ext cx="2011680" cy="274320"/>
           </a:xfrm>
           <a:prstGeom prst="rect">
@@ -17336,8 +17462,8 @@
         </p:nvSpPr>
         <p:spPr>
           <a:xfrm>
-            <a:off x="4526280" y="4462272"/>
-            <a:ext cx="7178040" cy="941832"/>
+            <a:off x="4526280" y="3913632"/>
+            <a:ext cx="7178040" cy="667512"/>
           </a:xfrm>
           <a:prstGeom prst="rect">
             <a:avLst/>
@@ -17372,7 +17498,70 @@
       </p:sp>
       <p:sp>
         <p:nvSpPr>
-          <p:cNvPr id="19" name="Shape 17"/>
+          <p:cNvPr id="19" name="Text 17"/>
+          <p:cNvSpPr txBox="1"/>
+          <p:nvPr/>
+        </p:nvSpPr>
+        <p:spPr>
+          <a:xfrm>
+            <a:off x="502920" y="4709160"/>
+            <a:ext cx="11201400" cy="640080"/>
+          </a:xfrm>
+          <a:prstGeom prst="rect">
+            <a:avLst/>
+          </a:prstGeom>
+          <a:noFill/>
+          <a:ln/>
+        </p:spPr>
+        <p:txBody>
+          <a:bodyPr wrap="square" lIns="0" tIns="0" rIns="0" bIns="0" rtlCol="0" anchor="ctr"/>
+          <a:lstStyle/>
+          <a:p>
+            <a:pPr indent="0" marL="0">
+              <a:lnSpc>
+                <a:spcPct val="115000"/>
+              </a:lnSpc>
+              <a:buNone/>
+            </a:pPr>
+            <a:r>
+              <a:rPr lang="en-US" sz="850" b="1" dirty="0">
+                <a:solidFill>
+                  <a:srgbClr val="8A8A8A"/>
+                </a:solidFill>
+                <a:latin typeface="Consolas" pitchFamily="34" charset="0"/>
+                <a:ea typeface="Consolas" pitchFamily="34" charset="-122"/>
+                <a:cs typeface="Consolas" pitchFamily="34" charset="-120"/>
+              </a:rPr>
+              <a:t>具体例
+</a:t>
+            </a:r>
+            <a:endParaRPr lang="en-US" sz="850" dirty="0"/>
+          </a:p>
+          <a:p>
+            <a:pPr indent="0" marL="0">
+              <a:lnSpc>
+                <a:spcPct val="115000"/>
+              </a:lnSpc>
+              <a:buNone/>
+            </a:pPr>
+            <a:r>
+              <a:rPr lang="en-US" sz="950" dirty="0">
+                <a:solidFill>
+                  <a:srgbClr val="171717"/>
+                </a:solidFill>
+                <a:latin typeface="Yu Gothic" pitchFamily="34" charset="0"/>
+                <a:ea typeface="Yu Gothic" pitchFamily="34" charset="-122"/>
+                <a:cs typeface="Yu Gothic" pitchFamily="34" charset="-120"/>
+              </a:rPr>
+              <a:t>特許技術を保有する製造業A社が特定の取引先にのみ独占的に実施させたい場合は専用実施権を設定する（特許庁への登録が必要）。複数の企業に同時にライセンスして幅広くロイヤリティ収入を得たい場合は、登録不要で効力が生じる通常実施権を許諾する形が適している。</a:t>
+            </a:r>
+            <a:endParaRPr lang="en-US" sz="850" dirty="0"/>
+          </a:p>
+        </p:txBody>
+      </p:sp>
+      <p:sp>
+        <p:nvSpPr>
+          <p:cNvPr id="20" name="Shape 18"/>
           <p:cNvSpPr/>
           <p:nvPr/>
         </p:nvSpPr>
@@ -17395,7 +17584,7 @@
       </p:sp>
       <p:sp>
         <p:nvSpPr>
-          <p:cNvPr id="20" name="Shape 18"/>
+          <p:cNvPr id="21" name="Shape 19"/>
           <p:cNvSpPr/>
           <p:nvPr/>
         </p:nvSpPr>
@@ -17415,7 +17604,7 @@
       </p:sp>
       <p:sp>
         <p:nvSpPr>
-          <p:cNvPr id="21" name="Text 19"/>
+          <p:cNvPr id="22" name="Text 20"/>
           <p:cNvSpPr txBox="1"/>
           <p:nvPr/>
         </p:nvSpPr>
@@ -17454,7 +17643,7 @@
       </p:sp>
       <p:sp>
         <p:nvSpPr>
-          <p:cNvPr id="22" name="Text 20"/>
+          <p:cNvPr id="23" name="Text 21"/>
           <p:cNvSpPr txBox="1"/>
           <p:nvPr/>
         </p:nvSpPr>
@@ -17493,7 +17682,7 @@
       </p:sp>
       <p:sp>
         <p:nvSpPr>
-          <p:cNvPr id="23" name="Shape 21"/>
+          <p:cNvPr id="24" name="Shape 22"/>
           <p:cNvSpPr/>
           <p:nvPr/>
         </p:nvSpPr>
@@ -17516,7 +17705,7 @@
       </p:sp>
       <p:sp>
         <p:nvSpPr>
-          <p:cNvPr id="24" name="Text 22"/>
+          <p:cNvPr id="25" name="Text 23"/>
           <p:cNvSpPr txBox="1"/>
           <p:nvPr/>
         </p:nvSpPr>
@@ -17555,7 +17744,7 @@
       </p:sp>
       <p:sp>
         <p:nvSpPr>
-          <p:cNvPr id="25" name="Text 23"/>
+          <p:cNvPr id="26" name="Text 24"/>
           <p:cNvSpPr txBox="1"/>
           <p:nvPr/>
         </p:nvSpPr>
@@ -17594,7 +17783,7 @@
       </p:sp>
       <p:sp>
         <p:nvSpPr>
-          <p:cNvPr id="26" name="Shape 24"/>
+          <p:cNvPr id="27" name="Shape 25"/>
           <p:cNvSpPr/>
           <p:nvPr/>
         </p:nvSpPr>
@@ -17619,7 +17808,7 @@
       </p:sp>
       <p:sp>
         <p:nvSpPr>
-          <p:cNvPr id="27" name="Text 25"/>
+          <p:cNvPr id="28" name="Text 26"/>
           <p:cNvSpPr txBox="1"/>
           <p:nvPr/>
         </p:nvSpPr>
@@ -17658,7 +17847,7 @@
       </p:sp>
       <p:sp>
         <p:nvSpPr>
-          <p:cNvPr id="28" name="Shape 26"/>
+          <p:cNvPr id="29" name="Shape 27"/>
           <p:cNvSpPr/>
           <p:nvPr/>
         </p:nvSpPr>
@@ -17683,7 +17872,7 @@
       </p:sp>
       <p:sp>
         <p:nvSpPr>
-          <p:cNvPr id="29" name="Text 27"/>
+          <p:cNvPr id="30" name="Text 28"/>
           <p:cNvSpPr txBox="1"/>
           <p:nvPr/>
         </p:nvSpPr>
@@ -17722,7 +17911,7 @@
       </p:sp>
       <p:sp>
         <p:nvSpPr>
-          <p:cNvPr id="30" name="Shape 28"/>
+          <p:cNvPr id="31" name="Shape 29"/>
           <p:cNvSpPr/>
           <p:nvPr/>
         </p:nvSpPr>
@@ -17747,7 +17936,7 @@
       </p:sp>
       <p:sp>
         <p:nvSpPr>
-          <p:cNvPr id="31" name="Text 29"/>
+          <p:cNvPr id="32" name="Text 30"/>
           <p:cNvSpPr txBox="1"/>
           <p:nvPr/>
         </p:nvSpPr>
@@ -17786,7 +17975,7 @@
       </p:sp>
       <p:sp>
         <p:nvSpPr>
-          <p:cNvPr id="32" name="Shape 30"/>
+          <p:cNvPr id="33" name="Shape 31"/>
           <p:cNvSpPr/>
           <p:nvPr/>
         </p:nvSpPr>
@@ -17811,7 +18000,7 @@
       </p:sp>
       <p:sp>
         <p:nvSpPr>
-          <p:cNvPr id="33" name="Text 31"/>
+          <p:cNvPr id="34" name="Text 32"/>
           <p:cNvSpPr txBox="1"/>
           <p:nvPr/>
         </p:nvSpPr>
@@ -17850,7 +18039,7 @@
       </p:sp>
       <p:sp>
         <p:nvSpPr>
-          <p:cNvPr id="34" name="Shape 32"/>
+          <p:cNvPr id="35" name="Shape 33"/>
           <p:cNvSpPr/>
           <p:nvPr/>
         </p:nvSpPr>
@@ -17875,7 +18064,7 @@
       </p:sp>
       <p:sp>
         <p:nvSpPr>
-          <p:cNvPr id="35" name="Text 33"/>
+          <p:cNvPr id="36" name="Text 34"/>
           <p:cNvSpPr txBox="1"/>
           <p:nvPr/>
         </p:nvSpPr>
@@ -17914,7 +18103,7 @@
       </p:sp>
       <p:sp>
         <p:nvSpPr>
-          <p:cNvPr id="36" name="Shape 34"/>
+          <p:cNvPr id="37" name="Shape 35"/>
           <p:cNvSpPr/>
           <p:nvPr/>
         </p:nvSpPr>
@@ -17939,7 +18128,7 @@
       </p:sp>
       <p:sp>
         <p:nvSpPr>
-          <p:cNvPr id="37" name="Text 35"/>
+          <p:cNvPr id="38" name="Text 36"/>
           <p:cNvSpPr txBox="1"/>
           <p:nvPr/>
         </p:nvSpPr>
@@ -17978,7 +18167,7 @@
       </p:sp>
       <p:sp>
         <p:nvSpPr>
-          <p:cNvPr id="38" name="Shape 36"/>
+          <p:cNvPr id="39" name="Shape 37"/>
           <p:cNvSpPr/>
           <p:nvPr/>
         </p:nvSpPr>
@@ -18003,7 +18192,7 @@
       </p:sp>
       <p:sp>
         <p:nvSpPr>
-          <p:cNvPr id="39" name="Text 37"/>
+          <p:cNvPr id="40" name="Text 38"/>
           <p:cNvSpPr txBox="1"/>
           <p:nvPr/>
         </p:nvSpPr>
@@ -18042,7 +18231,7 @@
       </p:sp>
       <p:sp>
         <p:nvSpPr>
-          <p:cNvPr id="40" name="Shape 38"/>
+          <p:cNvPr id="41" name="Shape 39"/>
           <p:cNvSpPr/>
           <p:nvPr/>
         </p:nvSpPr>
@@ -18067,7 +18256,7 @@
       </p:sp>
       <p:sp>
         <p:nvSpPr>
-          <p:cNvPr id="41" name="Text 39"/>
+          <p:cNvPr id="42" name="Text 40"/>
           <p:cNvSpPr txBox="1"/>
           <p:nvPr/>
         </p:nvSpPr>
@@ -18106,7 +18295,7 @@
       </p:sp>
       <p:sp>
         <p:nvSpPr>
-          <p:cNvPr id="42" name="Shape 40"/>
+          <p:cNvPr id="43" name="Shape 41"/>
           <p:cNvSpPr/>
           <p:nvPr/>
         </p:nvSpPr>
@@ -18131,7 +18320,7 @@
       </p:sp>
       <p:sp>
         <p:nvSpPr>
-          <p:cNvPr id="43" name="Text 41"/>
+          <p:cNvPr id="44" name="Text 42"/>
           <p:cNvSpPr txBox="1"/>
           <p:nvPr/>
         </p:nvSpPr>
@@ -18170,7 +18359,7 @@
       </p:sp>
       <p:sp>
         <p:nvSpPr>
-          <p:cNvPr id="44" name="Shape 42"/>
+          <p:cNvPr id="45" name="Shape 43"/>
           <p:cNvSpPr/>
           <p:nvPr/>
         </p:nvSpPr>
@@ -18195,7 +18384,7 @@
       </p:sp>
       <p:sp>
         <p:nvSpPr>
-          <p:cNvPr id="45" name="Text 43"/>
+          <p:cNvPr id="46" name="Text 44"/>
           <p:cNvSpPr txBox="1"/>
           <p:nvPr/>
         </p:nvSpPr>
@@ -18911,13 +19100,76 @@
       </p:sp>
       <p:sp>
         <p:nvSpPr>
-          <p:cNvPr id="21" name="Shape 19"/>
+          <p:cNvPr id="21" name="Text 19"/>
+          <p:cNvSpPr txBox="1"/>
+          <p:nvPr/>
+        </p:nvSpPr>
+        <p:spPr>
+          <a:xfrm>
+            <a:off x="502920" y="3401568"/>
+            <a:ext cx="11201400" cy="594360"/>
+          </a:xfrm>
+          <a:prstGeom prst="rect">
+            <a:avLst/>
+          </a:prstGeom>
+          <a:noFill/>
+          <a:ln/>
+        </p:spPr>
+        <p:txBody>
+          <a:bodyPr wrap="square" lIns="0" tIns="0" rIns="0" bIns="0" rtlCol="0" anchor="ctr"/>
+          <a:lstStyle/>
+          <a:p>
+            <a:pPr indent="0" marL="0">
+              <a:lnSpc>
+                <a:spcPct val="110000"/>
+              </a:lnSpc>
+              <a:buNone/>
+            </a:pPr>
+            <a:r>
+              <a:rPr lang="en-US" sz="850" b="1" dirty="0">
+                <a:solidFill>
+                  <a:srgbClr val="8A8A8A"/>
+                </a:solidFill>
+                <a:latin typeface="Consolas" pitchFamily="34" charset="0"/>
+                <a:ea typeface="Consolas" pitchFamily="34" charset="-122"/>
+                <a:cs typeface="Consolas" pitchFamily="34" charset="-120"/>
+              </a:rPr>
+              <a:t>具体例
+</a:t>
+            </a:r>
+            <a:endParaRPr lang="en-US" sz="850" dirty="0"/>
+          </a:p>
+          <a:p>
+            <a:pPr indent="0" marL="0">
+              <a:lnSpc>
+                <a:spcPct val="110000"/>
+              </a:lnSpc>
+              <a:buNone/>
+            </a:pPr>
+            <a:r>
+              <a:rPr lang="en-US" sz="900" dirty="0">
+                <a:solidFill>
+                  <a:srgbClr val="171717"/>
+                </a:solidFill>
+                <a:latin typeface="Yu Gothic" pitchFamily="34" charset="0"/>
+                <a:ea typeface="Yu Gothic" pitchFamily="34" charset="-122"/>
+                <a:cs typeface="Yu Gothic" pitchFamily="34" charset="-120"/>
+              </a:rPr>
+              <a:t>食品メーカーA社が独自に開発した調味料の配合レシピは、特許出願すると内容が公開されてしまうため、あえて出願せず社内で厳重にアクセス制限をかけて管理する（営業秘密として保護する）選択がよく取られる。退職した従業員がレシピを持ち出し競合他社で使用した場合、3要件を満たしていれば差止請求・損害賠償請求が可能。</a:t>
+            </a:r>
+            <a:endParaRPr lang="en-US" sz="850" dirty="0"/>
+          </a:p>
+        </p:txBody>
+      </p:sp>
+      <p:sp>
+        <p:nvSpPr>
+          <p:cNvPr id="22" name="Shape 20"/>
           <p:cNvSpPr/>
           <p:nvPr/>
         </p:nvSpPr>
         <p:spPr>
           <a:xfrm>
-            <a:off x="502920" y="3419856"/>
+            <a:off x="502920" y="4041648"/>
             <a:ext cx="11201400" cy="0"/>
           </a:xfrm>
           <a:prstGeom prst="line">
@@ -18934,13 +19186,13 @@
       </p:sp>
       <p:sp>
         <p:nvSpPr>
-          <p:cNvPr id="22" name="Text 20"/>
-          <p:cNvSpPr txBox="1"/>
-          <p:nvPr/>
-        </p:nvSpPr>
-        <p:spPr>
-          <a:xfrm>
-            <a:off x="502920" y="3493008"/>
+          <p:cNvPr id="23" name="Text 21"/>
+          <p:cNvSpPr txBox="1"/>
+          <p:nvPr/>
+        </p:nvSpPr>
+        <p:spPr>
+          <a:xfrm>
+            <a:off x="502920" y="4114800"/>
             <a:ext cx="11201400" cy="457200"/>
           </a:xfrm>
           <a:prstGeom prst="rect">
@@ -18993,7 +19245,7 @@
       </p:sp>
       <p:sp>
         <p:nvSpPr>
-          <p:cNvPr id="23" name="Shape 21"/>
+          <p:cNvPr id="24" name="Shape 22"/>
           <p:cNvSpPr/>
           <p:nvPr/>
         </p:nvSpPr>
@@ -19016,7 +19268,7 @@
       </p:sp>
       <p:sp>
         <p:nvSpPr>
-          <p:cNvPr id="24" name="Shape 22"/>
+          <p:cNvPr id="25" name="Shape 23"/>
           <p:cNvSpPr/>
           <p:nvPr/>
         </p:nvSpPr>
@@ -19036,7 +19288,7 @@
       </p:sp>
       <p:sp>
         <p:nvSpPr>
-          <p:cNvPr id="25" name="Text 23"/>
+          <p:cNvPr id="26" name="Text 24"/>
           <p:cNvSpPr txBox="1"/>
           <p:nvPr/>
         </p:nvSpPr>
@@ -19075,7 +19327,7 @@
       </p:sp>
       <p:sp>
         <p:nvSpPr>
-          <p:cNvPr id="26" name="Text 24"/>
+          <p:cNvPr id="27" name="Text 25"/>
           <p:cNvSpPr txBox="1"/>
           <p:nvPr/>
         </p:nvSpPr>
@@ -19114,7 +19366,7 @@
       </p:sp>
       <p:sp>
         <p:nvSpPr>
-          <p:cNvPr id="27" name="Shape 25"/>
+          <p:cNvPr id="28" name="Shape 26"/>
           <p:cNvSpPr/>
           <p:nvPr/>
         </p:nvSpPr>
@@ -19137,7 +19389,7 @@
       </p:sp>
       <p:sp>
         <p:nvSpPr>
-          <p:cNvPr id="28" name="Text 26"/>
+          <p:cNvPr id="29" name="Text 27"/>
           <p:cNvSpPr txBox="1"/>
           <p:nvPr/>
         </p:nvSpPr>
@@ -19176,7 +19428,7 @@
       </p:sp>
       <p:sp>
         <p:nvSpPr>
-          <p:cNvPr id="29" name="Text 27"/>
+          <p:cNvPr id="30" name="Text 28"/>
           <p:cNvSpPr txBox="1"/>
           <p:nvPr/>
         </p:nvSpPr>
@@ -19215,7 +19467,7 @@
       </p:sp>
       <p:sp>
         <p:nvSpPr>
-          <p:cNvPr id="30" name="Shape 28"/>
+          <p:cNvPr id="31" name="Shape 29"/>
           <p:cNvSpPr/>
           <p:nvPr/>
         </p:nvSpPr>
@@ -19240,7 +19492,7 @@
       </p:sp>
       <p:sp>
         <p:nvSpPr>
-          <p:cNvPr id="31" name="Text 29"/>
+          <p:cNvPr id="32" name="Text 30"/>
           <p:cNvSpPr txBox="1"/>
           <p:nvPr/>
         </p:nvSpPr>
@@ -19279,7 +19531,7 @@
       </p:sp>
       <p:sp>
         <p:nvSpPr>
-          <p:cNvPr id="32" name="Shape 30"/>
+          <p:cNvPr id="33" name="Shape 31"/>
           <p:cNvSpPr/>
           <p:nvPr/>
         </p:nvSpPr>
@@ -19304,7 +19556,7 @@
       </p:sp>
       <p:sp>
         <p:nvSpPr>
-          <p:cNvPr id="33" name="Text 31"/>
+          <p:cNvPr id="34" name="Text 32"/>
           <p:cNvSpPr txBox="1"/>
           <p:nvPr/>
         </p:nvSpPr>
@@ -19343,7 +19595,7 @@
       </p:sp>
       <p:sp>
         <p:nvSpPr>
-          <p:cNvPr id="34" name="Shape 32"/>
+          <p:cNvPr id="35" name="Shape 33"/>
           <p:cNvSpPr/>
           <p:nvPr/>
         </p:nvSpPr>
@@ -19368,7 +19620,7 @@
       </p:sp>
       <p:sp>
         <p:nvSpPr>
-          <p:cNvPr id="35" name="Text 33"/>
+          <p:cNvPr id="36" name="Text 34"/>
           <p:cNvSpPr txBox="1"/>
           <p:nvPr/>
         </p:nvSpPr>
@@ -19407,7 +19659,7 @@
       </p:sp>
       <p:sp>
         <p:nvSpPr>
-          <p:cNvPr id="36" name="Shape 34"/>
+          <p:cNvPr id="37" name="Shape 35"/>
           <p:cNvSpPr/>
           <p:nvPr/>
         </p:nvSpPr>
@@ -19432,7 +19684,7 @@
       </p:sp>
       <p:sp>
         <p:nvSpPr>
-          <p:cNvPr id="37" name="Text 35"/>
+          <p:cNvPr id="38" name="Text 36"/>
           <p:cNvSpPr txBox="1"/>
           <p:nvPr/>
         </p:nvSpPr>
@@ -19471,7 +19723,7 @@
       </p:sp>
       <p:sp>
         <p:nvSpPr>
-          <p:cNvPr id="38" name="Shape 36"/>
+          <p:cNvPr id="39" name="Shape 37"/>
           <p:cNvSpPr/>
           <p:nvPr/>
         </p:nvSpPr>
@@ -19496,7 +19748,7 @@
       </p:sp>
       <p:sp>
         <p:nvSpPr>
-          <p:cNvPr id="39" name="Text 37"/>
+          <p:cNvPr id="40" name="Text 38"/>
           <p:cNvSpPr txBox="1"/>
           <p:nvPr/>
         </p:nvSpPr>
@@ -19535,7 +19787,7 @@
       </p:sp>
       <p:sp>
         <p:nvSpPr>
-          <p:cNvPr id="40" name="Shape 38"/>
+          <p:cNvPr id="41" name="Shape 39"/>
           <p:cNvSpPr/>
           <p:nvPr/>
         </p:nvSpPr>
@@ -19560,7 +19812,7 @@
       </p:sp>
       <p:sp>
         <p:nvSpPr>
-          <p:cNvPr id="41" name="Text 39"/>
+          <p:cNvPr id="42" name="Text 40"/>
           <p:cNvSpPr txBox="1"/>
           <p:nvPr/>
         </p:nvSpPr>
@@ -19599,7 +19851,7 @@
       </p:sp>
       <p:sp>
         <p:nvSpPr>
-          <p:cNvPr id="42" name="Shape 40"/>
+          <p:cNvPr id="43" name="Shape 41"/>
           <p:cNvSpPr/>
           <p:nvPr/>
         </p:nvSpPr>
@@ -19624,7 +19876,7 @@
       </p:sp>
       <p:sp>
         <p:nvSpPr>
-          <p:cNvPr id="43" name="Text 41"/>
+          <p:cNvPr id="44" name="Text 42"/>
           <p:cNvSpPr txBox="1"/>
           <p:nvPr/>
         </p:nvSpPr>
@@ -19663,7 +19915,7 @@
       </p:sp>
       <p:sp>
         <p:nvSpPr>
-          <p:cNvPr id="44" name="Shape 42"/>
+          <p:cNvPr id="45" name="Shape 43"/>
           <p:cNvSpPr/>
           <p:nvPr/>
         </p:nvSpPr>
@@ -19688,7 +19940,7 @@
       </p:sp>
       <p:sp>
         <p:nvSpPr>
-          <p:cNvPr id="45" name="Text 43"/>
+          <p:cNvPr id="46" name="Text 44"/>
           <p:cNvSpPr txBox="1"/>
           <p:nvPr/>
         </p:nvSpPr>
@@ -19727,7 +19979,7 @@
       </p:sp>
       <p:sp>
         <p:nvSpPr>
-          <p:cNvPr id="46" name="Shape 44"/>
+          <p:cNvPr id="47" name="Shape 45"/>
           <p:cNvSpPr/>
           <p:nvPr/>
         </p:nvSpPr>
@@ -19752,7 +20004,7 @@
       </p:sp>
       <p:sp>
         <p:nvSpPr>
-          <p:cNvPr id="47" name="Text 45"/>
+          <p:cNvPr id="48" name="Text 46"/>
           <p:cNvSpPr txBox="1"/>
           <p:nvPr/>
         </p:nvSpPr>
@@ -19791,7 +20043,7 @@
       </p:sp>
       <p:sp>
         <p:nvSpPr>
-          <p:cNvPr id="48" name="Shape 46"/>
+          <p:cNvPr id="49" name="Shape 47"/>
           <p:cNvSpPr/>
           <p:nvPr/>
         </p:nvSpPr>
@@ -19816,7 +20068,7 @@
       </p:sp>
       <p:sp>
         <p:nvSpPr>
-          <p:cNvPr id="49" name="Text 47"/>
+          <p:cNvPr id="50" name="Text 48"/>
           <p:cNvSpPr txBox="1"/>
           <p:nvPr/>
         </p:nvSpPr>
@@ -21733,7 +21985,7 @@
         <p:spPr>
           <a:xfrm>
             <a:off x="3794760" y="2267712"/>
-            <a:ext cx="7909560" cy="667512"/>
+            <a:ext cx="7909560" cy="502920"/>
           </a:xfrm>
           <a:prstGeom prst="rect">
             <a:avLst/>
@@ -21774,7 +22026,7 @@
         </p:nvSpPr>
         <p:spPr>
           <a:xfrm>
-            <a:off x="502920" y="3017520"/>
+            <a:off x="502920" y="2852928"/>
             <a:ext cx="11201400" cy="0"/>
           </a:xfrm>
           <a:prstGeom prst="line">
@@ -21797,7 +22049,7 @@
         </p:nvSpPr>
         <p:spPr>
           <a:xfrm>
-            <a:off x="502920" y="3127248"/>
+            <a:off x="502920" y="2962656"/>
             <a:ext cx="2011680" cy="320040"/>
           </a:xfrm>
           <a:prstGeom prst="rect">
@@ -21836,8 +22088,8 @@
         </p:nvSpPr>
         <p:spPr>
           <a:xfrm>
-            <a:off x="2606040" y="3090672"/>
-            <a:ext cx="9098280" cy="667512"/>
+            <a:off x="2606040" y="2926080"/>
+            <a:ext cx="9098280" cy="502920"/>
           </a:xfrm>
           <a:prstGeom prst="rect">
             <a:avLst/>
@@ -21878,7 +22130,7 @@
         </p:nvSpPr>
         <p:spPr>
           <a:xfrm>
-            <a:off x="502920" y="3840480"/>
+            <a:off x="502920" y="3511296"/>
             <a:ext cx="11201400" cy="0"/>
           </a:xfrm>
           <a:prstGeom prst="line">
@@ -21901,7 +22153,7 @@
         </p:nvSpPr>
         <p:spPr>
           <a:xfrm>
-            <a:off x="502920" y="3950208"/>
+            <a:off x="502920" y="3621024"/>
             <a:ext cx="2011680" cy="320040"/>
           </a:xfrm>
           <a:prstGeom prst="rect">
@@ -21940,8 +22192,8 @@
         </p:nvSpPr>
         <p:spPr>
           <a:xfrm>
-            <a:off x="2606040" y="3913632"/>
-            <a:ext cx="9098280" cy="667512"/>
+            <a:off x="2606040" y="3584448"/>
+            <a:ext cx="9098280" cy="502920"/>
           </a:xfrm>
           <a:prstGeom prst="rect">
             <a:avLst/>
@@ -21982,7 +22234,7 @@
         </p:nvSpPr>
         <p:spPr>
           <a:xfrm>
-            <a:off x="502920" y="4663440"/>
+            <a:off x="502920" y="4169664"/>
             <a:ext cx="11201400" cy="0"/>
           </a:xfrm>
           <a:prstGeom prst="line">
@@ -22005,7 +22257,7 @@
         </p:nvSpPr>
         <p:spPr>
           <a:xfrm>
-            <a:off x="502920" y="4773168"/>
+            <a:off x="502920" y="4279392"/>
             <a:ext cx="2011680" cy="320040"/>
           </a:xfrm>
           <a:prstGeom prst="rect">
@@ -22044,8 +22296,8 @@
         </p:nvSpPr>
         <p:spPr>
           <a:xfrm>
-            <a:off x="2606040" y="4736592"/>
-            <a:ext cx="9098280" cy="667512"/>
+            <a:off x="2606040" y="4242816"/>
+            <a:ext cx="9098280" cy="502920"/>
           </a:xfrm>
           <a:prstGeom prst="rect">
             <a:avLst/>
@@ -22080,7 +22332,70 @@
       </p:sp>
       <p:sp>
         <p:nvSpPr>
-          <p:cNvPr id="21" name="Shape 19"/>
+          <p:cNvPr id="21" name="Text 19"/>
+          <p:cNvSpPr txBox="1"/>
+          <p:nvPr/>
+        </p:nvSpPr>
+        <p:spPr>
+          <a:xfrm>
+            <a:off x="502920" y="4873752"/>
+            <a:ext cx="11201400" cy="502920"/>
+          </a:xfrm>
+          <a:prstGeom prst="rect">
+            <a:avLst/>
+          </a:prstGeom>
+          <a:noFill/>
+          <a:ln/>
+        </p:spPr>
+        <p:txBody>
+          <a:bodyPr wrap="square" lIns="0" tIns="0" rIns="0" bIns="0" rtlCol="0" anchor="ctr"/>
+          <a:lstStyle/>
+          <a:p>
+            <a:pPr indent="0" marL="0">
+              <a:lnSpc>
+                <a:spcPct val="115000"/>
+              </a:lnSpc>
+              <a:buNone/>
+            </a:pPr>
+            <a:r>
+              <a:rPr lang="en-US" sz="850" b="1" dirty="0">
+                <a:solidFill>
+                  <a:srgbClr val="8A8A8A"/>
+                </a:solidFill>
+                <a:latin typeface="Consolas" pitchFamily="34" charset="0"/>
+                <a:ea typeface="Consolas" pitchFamily="34" charset="-122"/>
+                <a:cs typeface="Consolas" pitchFamily="34" charset="-120"/>
+              </a:rPr>
+              <a:t>具体例
+</a:t>
+            </a:r>
+            <a:endParaRPr lang="en-US" sz="850" dirty="0"/>
+          </a:p>
+          <a:p>
+            <a:pPr indent="0" marL="0">
+              <a:lnSpc>
+                <a:spcPct val="115000"/>
+              </a:lnSpc>
+              <a:buNone/>
+            </a:pPr>
+            <a:r>
+              <a:rPr lang="en-US" sz="900" dirty="0">
+                <a:solidFill>
+                  <a:srgbClr val="171717"/>
+                </a:solidFill>
+                <a:latin typeface="Yu Gothic" pitchFamily="34" charset="0"/>
+                <a:ea typeface="Yu Gothic" pitchFamily="34" charset="-122"/>
+                <a:cs typeface="Yu Gothic" pitchFamily="34" charset="-120"/>
+              </a:rPr>
+              <a:t>地域のパン店A社が大手コンビニチェーンのフランチャイズに加盟する場合、本部の商標・ノウハウを使う許可を得る代わりに、毎月の売上に応じたロイヤリティを本部に支払う。契約前には、本部が加盟希望者に契約内容やロイヤリティの算定方法等を記載した書面（法定開示書面）を交付する義務がある。</a:t>
+            </a:r>
+            <a:endParaRPr lang="en-US" sz="850" dirty="0"/>
+          </a:p>
+        </p:txBody>
+      </p:sp>
+      <p:sp>
+        <p:nvSpPr>
+          <p:cNvPr id="22" name="Shape 20"/>
           <p:cNvSpPr/>
           <p:nvPr/>
         </p:nvSpPr>
@@ -22103,7 +22418,7 @@
       </p:sp>
       <p:sp>
         <p:nvSpPr>
-          <p:cNvPr id="22" name="Shape 20"/>
+          <p:cNvPr id="23" name="Shape 21"/>
           <p:cNvSpPr/>
           <p:nvPr/>
         </p:nvSpPr>
@@ -22123,7 +22438,7 @@
       </p:sp>
       <p:sp>
         <p:nvSpPr>
-          <p:cNvPr id="23" name="Text 21"/>
+          <p:cNvPr id="24" name="Text 22"/>
           <p:cNvSpPr txBox="1"/>
           <p:nvPr/>
         </p:nvSpPr>
@@ -22162,7 +22477,7 @@
       </p:sp>
       <p:sp>
         <p:nvSpPr>
-          <p:cNvPr id="24" name="Text 22"/>
+          <p:cNvPr id="25" name="Text 23"/>
           <p:cNvSpPr txBox="1"/>
           <p:nvPr/>
         </p:nvSpPr>
@@ -22201,7 +22516,7 @@
       </p:sp>
       <p:sp>
         <p:nvSpPr>
-          <p:cNvPr id="25" name="Shape 23"/>
+          <p:cNvPr id="26" name="Shape 24"/>
           <p:cNvSpPr/>
           <p:nvPr/>
         </p:nvSpPr>
@@ -22224,7 +22539,7 @@
       </p:sp>
       <p:sp>
         <p:nvSpPr>
-          <p:cNvPr id="26" name="Text 24"/>
+          <p:cNvPr id="27" name="Text 25"/>
           <p:cNvSpPr txBox="1"/>
           <p:nvPr/>
         </p:nvSpPr>
@@ -22263,7 +22578,7 @@
       </p:sp>
       <p:sp>
         <p:nvSpPr>
-          <p:cNvPr id="27" name="Text 25"/>
+          <p:cNvPr id="28" name="Text 26"/>
           <p:cNvSpPr txBox="1"/>
           <p:nvPr/>
         </p:nvSpPr>
@@ -22302,7 +22617,7 @@
       </p:sp>
       <p:sp>
         <p:nvSpPr>
-          <p:cNvPr id="28" name="Shape 26"/>
+          <p:cNvPr id="29" name="Shape 27"/>
           <p:cNvSpPr/>
           <p:nvPr/>
         </p:nvSpPr>
@@ -22327,7 +22642,7 @@
       </p:sp>
       <p:sp>
         <p:nvSpPr>
-          <p:cNvPr id="29" name="Text 27"/>
+          <p:cNvPr id="30" name="Text 28"/>
           <p:cNvSpPr txBox="1"/>
           <p:nvPr/>
         </p:nvSpPr>
@@ -22366,7 +22681,7 @@
       </p:sp>
       <p:sp>
         <p:nvSpPr>
-          <p:cNvPr id="30" name="Shape 28"/>
+          <p:cNvPr id="31" name="Shape 29"/>
           <p:cNvSpPr/>
           <p:nvPr/>
         </p:nvSpPr>
@@ -22391,7 +22706,7 @@
       </p:sp>
       <p:sp>
         <p:nvSpPr>
-          <p:cNvPr id="31" name="Text 29"/>
+          <p:cNvPr id="32" name="Text 30"/>
           <p:cNvSpPr txBox="1"/>
           <p:nvPr/>
         </p:nvSpPr>
@@ -22430,7 +22745,7 @@
       </p:sp>
       <p:sp>
         <p:nvSpPr>
-          <p:cNvPr id="32" name="Shape 30"/>
+          <p:cNvPr id="33" name="Shape 31"/>
           <p:cNvSpPr/>
           <p:nvPr/>
         </p:nvSpPr>
@@ -22455,7 +22770,7 @@
       </p:sp>
       <p:sp>
         <p:nvSpPr>
-          <p:cNvPr id="33" name="Text 31"/>
+          <p:cNvPr id="34" name="Text 32"/>
           <p:cNvSpPr txBox="1"/>
           <p:nvPr/>
         </p:nvSpPr>
@@ -22494,7 +22809,7 @@
       </p:sp>
       <p:sp>
         <p:nvSpPr>
-          <p:cNvPr id="34" name="Shape 32"/>
+          <p:cNvPr id="35" name="Shape 33"/>
           <p:cNvSpPr/>
           <p:nvPr/>
         </p:nvSpPr>
@@ -22519,7 +22834,7 @@
       </p:sp>
       <p:sp>
         <p:nvSpPr>
-          <p:cNvPr id="35" name="Text 33"/>
+          <p:cNvPr id="36" name="Text 34"/>
           <p:cNvSpPr txBox="1"/>
           <p:nvPr/>
         </p:nvSpPr>
@@ -22558,7 +22873,7 @@
       </p:sp>
       <p:sp>
         <p:nvSpPr>
-          <p:cNvPr id="36" name="Shape 34"/>
+          <p:cNvPr id="37" name="Shape 35"/>
           <p:cNvSpPr/>
           <p:nvPr/>
         </p:nvSpPr>
@@ -22583,7 +22898,7 @@
       </p:sp>
       <p:sp>
         <p:nvSpPr>
-          <p:cNvPr id="37" name="Text 35"/>
+          <p:cNvPr id="38" name="Text 36"/>
           <p:cNvSpPr txBox="1"/>
           <p:nvPr/>
         </p:nvSpPr>
@@ -22622,7 +22937,7 @@
       </p:sp>
       <p:sp>
         <p:nvSpPr>
-          <p:cNvPr id="38" name="Shape 36"/>
+          <p:cNvPr id="39" name="Shape 37"/>
           <p:cNvSpPr/>
           <p:nvPr/>
         </p:nvSpPr>
@@ -22647,7 +22962,7 @@
       </p:sp>
       <p:sp>
         <p:nvSpPr>
-          <p:cNvPr id="39" name="Text 37"/>
+          <p:cNvPr id="40" name="Text 38"/>
           <p:cNvSpPr txBox="1"/>
           <p:nvPr/>
         </p:nvSpPr>
@@ -22686,7 +23001,7 @@
       </p:sp>
       <p:sp>
         <p:nvSpPr>
-          <p:cNvPr id="40" name="Shape 38"/>
+          <p:cNvPr id="41" name="Shape 39"/>
           <p:cNvSpPr/>
           <p:nvPr/>
         </p:nvSpPr>
@@ -22711,7 +23026,7 @@
       </p:sp>
       <p:sp>
         <p:nvSpPr>
-          <p:cNvPr id="41" name="Text 39"/>
+          <p:cNvPr id="42" name="Text 40"/>
           <p:cNvSpPr txBox="1"/>
           <p:nvPr/>
         </p:nvSpPr>
@@ -22750,7 +23065,7 @@
       </p:sp>
       <p:sp>
         <p:nvSpPr>
-          <p:cNvPr id="42" name="Shape 40"/>
+          <p:cNvPr id="43" name="Shape 41"/>
           <p:cNvSpPr/>
           <p:nvPr/>
         </p:nvSpPr>
@@ -22775,7 +23090,7 @@
       </p:sp>
       <p:sp>
         <p:nvSpPr>
-          <p:cNvPr id="43" name="Text 41"/>
+          <p:cNvPr id="44" name="Text 42"/>
           <p:cNvSpPr txBox="1"/>
           <p:nvPr/>
         </p:nvSpPr>
@@ -22814,7 +23129,7 @@
       </p:sp>
       <p:sp>
         <p:nvSpPr>
-          <p:cNvPr id="44" name="Shape 42"/>
+          <p:cNvPr id="45" name="Shape 43"/>
           <p:cNvSpPr/>
           <p:nvPr/>
         </p:nvSpPr>
@@ -22839,7 +23154,7 @@
       </p:sp>
       <p:sp>
         <p:nvSpPr>
-          <p:cNvPr id="45" name="Text 43"/>
+          <p:cNvPr id="46" name="Text 44"/>
           <p:cNvSpPr txBox="1"/>
           <p:nvPr/>
         </p:nvSpPr>
@@ -22878,7 +23193,7 @@
       </p:sp>
       <p:sp>
         <p:nvSpPr>
-          <p:cNvPr id="46" name="Shape 44"/>
+          <p:cNvPr id="47" name="Shape 45"/>
           <p:cNvSpPr/>
           <p:nvPr/>
         </p:nvSpPr>
@@ -22903,7 +23218,7 @@
       </p:sp>
       <p:sp>
         <p:nvSpPr>
-          <p:cNvPr id="47" name="Text 45"/>
+          <p:cNvPr id="48" name="Text 46"/>
           <p:cNvSpPr txBox="1"/>
           <p:nvPr/>
         </p:nvSpPr>
@@ -23619,13 +23934,76 @@
       </p:sp>
       <p:sp>
         <p:nvSpPr>
-          <p:cNvPr id="21" name="Shape 19"/>
+          <p:cNvPr id="21" name="Text 19"/>
+          <p:cNvSpPr txBox="1"/>
+          <p:nvPr/>
+        </p:nvSpPr>
+        <p:spPr>
+          <a:xfrm>
+            <a:off x="502920" y="3401568"/>
+            <a:ext cx="11201400" cy="594360"/>
+          </a:xfrm>
+          <a:prstGeom prst="rect">
+            <a:avLst/>
+          </a:prstGeom>
+          <a:noFill/>
+          <a:ln/>
+        </p:spPr>
+        <p:txBody>
+          <a:bodyPr wrap="square" lIns="0" tIns="0" rIns="0" bIns="0" rtlCol="0" anchor="ctr"/>
+          <a:lstStyle/>
+          <a:p>
+            <a:pPr indent="0" marL="0">
+              <a:lnSpc>
+                <a:spcPct val="110000"/>
+              </a:lnSpc>
+              <a:buNone/>
+            </a:pPr>
+            <a:r>
+              <a:rPr lang="en-US" sz="850" b="1" dirty="0">
+                <a:solidFill>
+                  <a:srgbClr val="8A8A8A"/>
+                </a:solidFill>
+                <a:latin typeface="Consolas" pitchFamily="34" charset="0"/>
+                <a:ea typeface="Consolas" pitchFamily="34" charset="-122"/>
+                <a:cs typeface="Consolas" pitchFamily="34" charset="-120"/>
+              </a:rPr>
+              <a:t>具体例
+</a:t>
+            </a:r>
+            <a:endParaRPr lang="en-US" sz="850" dirty="0"/>
+          </a:p>
+          <a:p>
+            <a:pPr indent="0" marL="0">
+              <a:lnSpc>
+                <a:spcPct val="110000"/>
+              </a:lnSpc>
+              <a:buNone/>
+            </a:pPr>
+            <a:r>
+              <a:rPr lang="en-US" sz="900" dirty="0">
+                <a:solidFill>
+                  <a:srgbClr val="171717"/>
+                </a:solidFill>
+                <a:latin typeface="Yu Gothic" pitchFamily="34" charset="0"/>
+                <a:ea typeface="Yu Gothic" pitchFamily="34" charset="-122"/>
+                <a:cs typeface="Yu Gothic" pitchFamily="34" charset="-120"/>
+              </a:rPr>
+              <a:t>日本のメーカーA社が海外の卸売業者と継続的な取引基本契約を結ぶ際、「本契約に関する紛争は第三国における仲裁により最終的に解決する」という仲裁条項を入れておけば、トラブルが生じても両国の裁判所ではなく中立的な第三国での仲裁で解決を図ることができる。</a:t>
+            </a:r>
+            <a:endParaRPr lang="en-US" sz="850" dirty="0"/>
+          </a:p>
+        </p:txBody>
+      </p:sp>
+      <p:sp>
+        <p:nvSpPr>
+          <p:cNvPr id="22" name="Shape 20"/>
           <p:cNvSpPr/>
           <p:nvPr/>
         </p:nvSpPr>
         <p:spPr>
           <a:xfrm>
-            <a:off x="502920" y="3419856"/>
+            <a:off x="502920" y="4041648"/>
             <a:ext cx="11201400" cy="0"/>
           </a:xfrm>
           <a:prstGeom prst="line">
@@ -23642,13 +24020,13 @@
       </p:sp>
       <p:sp>
         <p:nvSpPr>
-          <p:cNvPr id="22" name="Text 20"/>
-          <p:cNvSpPr txBox="1"/>
-          <p:nvPr/>
-        </p:nvSpPr>
-        <p:spPr>
-          <a:xfrm>
-            <a:off x="502920" y="3493008"/>
+          <p:cNvPr id="23" name="Text 21"/>
+          <p:cNvSpPr txBox="1"/>
+          <p:nvPr/>
+        </p:nvSpPr>
+        <p:spPr>
+          <a:xfrm>
+            <a:off x="502920" y="4114800"/>
             <a:ext cx="11201400" cy="457200"/>
           </a:xfrm>
           <a:prstGeom prst="rect">
@@ -23701,7 +24079,7 @@
       </p:sp>
       <p:sp>
         <p:nvSpPr>
-          <p:cNvPr id="23" name="Shape 21"/>
+          <p:cNvPr id="24" name="Shape 22"/>
           <p:cNvSpPr/>
           <p:nvPr/>
         </p:nvSpPr>
@@ -23724,7 +24102,7 @@
       </p:sp>
       <p:sp>
         <p:nvSpPr>
-          <p:cNvPr id="24" name="Shape 22"/>
+          <p:cNvPr id="25" name="Shape 23"/>
           <p:cNvSpPr/>
           <p:nvPr/>
         </p:nvSpPr>
@@ -23744,7 +24122,7 @@
       </p:sp>
       <p:sp>
         <p:nvSpPr>
-          <p:cNvPr id="25" name="Text 23"/>
+          <p:cNvPr id="26" name="Text 24"/>
           <p:cNvSpPr txBox="1"/>
           <p:nvPr/>
         </p:nvSpPr>
@@ -23783,7 +24161,7 @@
       </p:sp>
       <p:sp>
         <p:nvSpPr>
-          <p:cNvPr id="26" name="Text 24"/>
+          <p:cNvPr id="27" name="Text 25"/>
           <p:cNvSpPr txBox="1"/>
           <p:nvPr/>
         </p:nvSpPr>
@@ -23822,7 +24200,7 @@
       </p:sp>
       <p:sp>
         <p:nvSpPr>
-          <p:cNvPr id="27" name="Shape 25"/>
+          <p:cNvPr id="28" name="Shape 26"/>
           <p:cNvSpPr/>
           <p:nvPr/>
         </p:nvSpPr>
@@ -23845,7 +24223,7 @@
       </p:sp>
       <p:sp>
         <p:nvSpPr>
-          <p:cNvPr id="28" name="Text 26"/>
+          <p:cNvPr id="29" name="Text 27"/>
           <p:cNvSpPr txBox="1"/>
           <p:nvPr/>
         </p:nvSpPr>
@@ -23884,7 +24262,7 @@
       </p:sp>
       <p:sp>
         <p:nvSpPr>
-          <p:cNvPr id="29" name="Text 27"/>
+          <p:cNvPr id="30" name="Text 28"/>
           <p:cNvSpPr txBox="1"/>
           <p:nvPr/>
         </p:nvSpPr>
@@ -23923,7 +24301,7 @@
       </p:sp>
       <p:sp>
         <p:nvSpPr>
-          <p:cNvPr id="30" name="Shape 28"/>
+          <p:cNvPr id="31" name="Shape 29"/>
           <p:cNvSpPr/>
           <p:nvPr/>
         </p:nvSpPr>
@@ -23948,7 +24326,7 @@
       </p:sp>
       <p:sp>
         <p:nvSpPr>
-          <p:cNvPr id="31" name="Text 29"/>
+          <p:cNvPr id="32" name="Text 30"/>
           <p:cNvSpPr txBox="1"/>
           <p:nvPr/>
         </p:nvSpPr>
@@ -23987,7 +24365,7 @@
       </p:sp>
       <p:sp>
         <p:nvSpPr>
-          <p:cNvPr id="32" name="Shape 30"/>
+          <p:cNvPr id="33" name="Shape 31"/>
           <p:cNvSpPr/>
           <p:nvPr/>
         </p:nvSpPr>
@@ -24012,7 +24390,7 @@
       </p:sp>
       <p:sp>
         <p:nvSpPr>
-          <p:cNvPr id="33" name="Text 31"/>
+          <p:cNvPr id="34" name="Text 32"/>
           <p:cNvSpPr txBox="1"/>
           <p:nvPr/>
         </p:nvSpPr>
@@ -24051,7 +24429,7 @@
       </p:sp>
       <p:sp>
         <p:nvSpPr>
-          <p:cNvPr id="34" name="Shape 32"/>
+          <p:cNvPr id="35" name="Shape 33"/>
           <p:cNvSpPr/>
           <p:nvPr/>
         </p:nvSpPr>
@@ -24076,7 +24454,7 @@
       </p:sp>
       <p:sp>
         <p:nvSpPr>
-          <p:cNvPr id="35" name="Text 33"/>
+          <p:cNvPr id="36" name="Text 34"/>
           <p:cNvSpPr txBox="1"/>
           <p:nvPr/>
         </p:nvSpPr>
@@ -24115,7 +24493,7 @@
       </p:sp>
       <p:sp>
         <p:nvSpPr>
-          <p:cNvPr id="36" name="Shape 34"/>
+          <p:cNvPr id="37" name="Shape 35"/>
           <p:cNvSpPr/>
           <p:nvPr/>
         </p:nvSpPr>
@@ -24140,7 +24518,7 @@
       </p:sp>
       <p:sp>
         <p:nvSpPr>
-          <p:cNvPr id="37" name="Text 35"/>
+          <p:cNvPr id="38" name="Text 36"/>
           <p:cNvSpPr txBox="1"/>
           <p:nvPr/>
         </p:nvSpPr>
@@ -24179,7 +24557,7 @@
       </p:sp>
       <p:sp>
         <p:nvSpPr>
-          <p:cNvPr id="38" name="Shape 36"/>
+          <p:cNvPr id="39" name="Shape 37"/>
           <p:cNvSpPr/>
           <p:nvPr/>
         </p:nvSpPr>
@@ -24204,7 +24582,7 @@
       </p:sp>
       <p:sp>
         <p:nvSpPr>
-          <p:cNvPr id="39" name="Text 37"/>
+          <p:cNvPr id="40" name="Text 38"/>
           <p:cNvSpPr txBox="1"/>
           <p:nvPr/>
         </p:nvSpPr>
@@ -24243,7 +24621,7 @@
       </p:sp>
       <p:sp>
         <p:nvSpPr>
-          <p:cNvPr id="40" name="Shape 38"/>
+          <p:cNvPr id="41" name="Shape 39"/>
           <p:cNvSpPr/>
           <p:nvPr/>
         </p:nvSpPr>
@@ -24268,7 +24646,7 @@
       </p:sp>
       <p:sp>
         <p:nvSpPr>
-          <p:cNvPr id="41" name="Text 39"/>
+          <p:cNvPr id="42" name="Text 40"/>
           <p:cNvSpPr txBox="1"/>
           <p:nvPr/>
         </p:nvSpPr>
@@ -24307,7 +24685,7 @@
       </p:sp>
       <p:sp>
         <p:nvSpPr>
-          <p:cNvPr id="42" name="Shape 40"/>
+          <p:cNvPr id="43" name="Shape 41"/>
           <p:cNvSpPr/>
           <p:nvPr/>
         </p:nvSpPr>
@@ -24332,7 +24710,7 @@
       </p:sp>
       <p:sp>
         <p:nvSpPr>
-          <p:cNvPr id="43" name="Text 41"/>
+          <p:cNvPr id="44" name="Text 42"/>
           <p:cNvSpPr txBox="1"/>
           <p:nvPr/>
         </p:nvSpPr>
@@ -24371,7 +24749,7 @@
       </p:sp>
       <p:sp>
         <p:nvSpPr>
-          <p:cNvPr id="44" name="Shape 42"/>
+          <p:cNvPr id="45" name="Shape 43"/>
           <p:cNvSpPr/>
           <p:nvPr/>
         </p:nvSpPr>
@@ -24396,7 +24774,7 @@
       </p:sp>
       <p:sp>
         <p:nvSpPr>
-          <p:cNvPr id="45" name="Text 43"/>
+          <p:cNvPr id="46" name="Text 44"/>
           <p:cNvSpPr txBox="1"/>
           <p:nvPr/>
         </p:nvSpPr>
@@ -24435,7 +24813,7 @@
       </p:sp>
       <p:sp>
         <p:nvSpPr>
-          <p:cNvPr id="46" name="Shape 44"/>
+          <p:cNvPr id="47" name="Shape 45"/>
           <p:cNvSpPr/>
           <p:nvPr/>
         </p:nvSpPr>
@@ -24460,7 +24838,7 @@
       </p:sp>
       <p:sp>
         <p:nvSpPr>
-          <p:cNvPr id="47" name="Text 45"/>
+          <p:cNvPr id="48" name="Text 46"/>
           <p:cNvSpPr txBox="1"/>
           <p:nvPr/>
         </p:nvSpPr>
@@ -24499,7 +24877,7 @@
       </p:sp>
       <p:sp>
         <p:nvSpPr>
-          <p:cNvPr id="48" name="Shape 46"/>
+          <p:cNvPr id="49" name="Shape 47"/>
           <p:cNvSpPr/>
           <p:nvPr/>
         </p:nvSpPr>
@@ -24524,7 +24902,7 @@
       </p:sp>
       <p:sp>
         <p:nvSpPr>
-          <p:cNvPr id="49" name="Text 47"/>
+          <p:cNvPr id="50" name="Text 48"/>
           <p:cNvSpPr txBox="1"/>
           <p:nvPr/>
         </p:nvSpPr>
@@ -24882,7 +25260,7 @@
         <p:spPr>
           <a:xfrm>
             <a:off x="2148840" y="2267712"/>
-            <a:ext cx="9555480" cy="667512"/>
+            <a:ext cx="9555480" cy="502920"/>
           </a:xfrm>
           <a:prstGeom prst="rect">
             <a:avLst/>
@@ -24923,7 +25301,7 @@
         </p:nvSpPr>
         <p:spPr>
           <a:xfrm>
-            <a:off x="502920" y="3017520"/>
+            <a:off x="502920" y="2852928"/>
             <a:ext cx="11201400" cy="0"/>
           </a:xfrm>
           <a:prstGeom prst="line">
@@ -24946,7 +25324,7 @@
         </p:nvSpPr>
         <p:spPr>
           <a:xfrm>
-            <a:off x="502920" y="3127248"/>
+            <a:off x="502920" y="2962656"/>
             <a:ext cx="1554480" cy="320040"/>
           </a:xfrm>
           <a:prstGeom prst="rect">
@@ -24985,7 +25363,7 @@
         </p:nvSpPr>
         <p:spPr>
           <a:xfrm>
-            <a:off x="2148840" y="3145536"/>
+            <a:off x="2148840" y="2980944"/>
             <a:ext cx="1463040" cy="274320"/>
           </a:xfrm>
           <a:prstGeom prst="rect">
@@ -25024,8 +25402,8 @@
         </p:nvSpPr>
         <p:spPr>
           <a:xfrm>
-            <a:off x="3703320" y="3090672"/>
-            <a:ext cx="8001000" cy="667512"/>
+            <a:off x="3703320" y="2926080"/>
+            <a:ext cx="8001000" cy="502920"/>
           </a:xfrm>
           <a:prstGeom prst="rect">
             <a:avLst/>
@@ -25066,7 +25444,7 @@
         </p:nvSpPr>
         <p:spPr>
           <a:xfrm>
-            <a:off x="502920" y="3840480"/>
+            <a:off x="502920" y="3511296"/>
             <a:ext cx="11201400" cy="0"/>
           </a:xfrm>
           <a:prstGeom prst="line">
@@ -25089,7 +25467,7 @@
         </p:nvSpPr>
         <p:spPr>
           <a:xfrm>
-            <a:off x="502920" y="3950208"/>
+            <a:off x="502920" y="3621024"/>
             <a:ext cx="1554480" cy="320040"/>
           </a:xfrm>
           <a:prstGeom prst="rect">
@@ -25128,8 +25506,8 @@
         </p:nvSpPr>
         <p:spPr>
           <a:xfrm>
-            <a:off x="2148840" y="3913632"/>
-            <a:ext cx="9555480" cy="667512"/>
+            <a:off x="2148840" y="3584448"/>
+            <a:ext cx="9555480" cy="502920"/>
           </a:xfrm>
           <a:prstGeom prst="rect">
             <a:avLst/>
@@ -25170,7 +25548,7 @@
         </p:nvSpPr>
         <p:spPr>
           <a:xfrm>
-            <a:off x="502920" y="4663440"/>
+            <a:off x="502920" y="4169664"/>
             <a:ext cx="11201400" cy="0"/>
           </a:xfrm>
           <a:prstGeom prst="line">
@@ -25193,7 +25571,7 @@
         </p:nvSpPr>
         <p:spPr>
           <a:xfrm>
-            <a:off x="502920" y="4773168"/>
+            <a:off x="502920" y="4279392"/>
             <a:ext cx="1554480" cy="320040"/>
           </a:xfrm>
           <a:prstGeom prst="rect">
@@ -25232,8 +25610,8 @@
         </p:nvSpPr>
         <p:spPr>
           <a:xfrm>
-            <a:off x="2148840" y="4736592"/>
-            <a:ext cx="9555480" cy="667512"/>
+            <a:off x="2148840" y="4242816"/>
+            <a:ext cx="9555480" cy="502920"/>
           </a:xfrm>
           <a:prstGeom prst="rect">
             <a:avLst/>
@@ -25268,7 +25646,70 @@
       </p:sp>
       <p:sp>
         <p:nvSpPr>
-          <p:cNvPr id="21" name="Shape 19"/>
+          <p:cNvPr id="21" name="Text 19"/>
+          <p:cNvSpPr txBox="1"/>
+          <p:nvPr/>
+        </p:nvSpPr>
+        <p:spPr>
+          <a:xfrm>
+            <a:off x="502920" y="4873752"/>
+            <a:ext cx="11201400" cy="594360"/>
+          </a:xfrm>
+          <a:prstGeom prst="rect">
+            <a:avLst/>
+          </a:prstGeom>
+          <a:noFill/>
+          <a:ln/>
+        </p:spPr>
+        <p:txBody>
+          <a:bodyPr wrap="square" lIns="0" tIns="0" rIns="0" bIns="0" rtlCol="0" anchor="ctr"/>
+          <a:lstStyle/>
+          <a:p>
+            <a:pPr indent="0" marL="0">
+              <a:lnSpc>
+                <a:spcPct val="115000"/>
+              </a:lnSpc>
+              <a:buNone/>
+            </a:pPr>
+            <a:r>
+              <a:rPr lang="en-US" sz="850" b="1" dirty="0">
+                <a:solidFill>
+                  <a:srgbClr val="8A8A8A"/>
+                </a:solidFill>
+                <a:latin typeface="Consolas" pitchFamily="34" charset="0"/>
+                <a:ea typeface="Consolas" pitchFamily="34" charset="-122"/>
+                <a:cs typeface="Consolas" pitchFamily="34" charset="-120"/>
+              </a:rPr>
+              <a:t>具体例
+</a:t>
+            </a:r>
+            <a:endParaRPr lang="en-US" sz="850" dirty="0"/>
+          </a:p>
+          <a:p>
+            <a:pPr indent="0" marL="0">
+              <a:lnSpc>
+                <a:spcPct val="115000"/>
+              </a:lnSpc>
+              <a:buNone/>
+            </a:pPr>
+            <a:r>
+              <a:rPr lang="en-US" sz="900" dirty="0">
+                <a:solidFill>
+                  <a:srgbClr val="171717"/>
+                </a:solidFill>
+                <a:latin typeface="Yu Gothic" pitchFamily="34" charset="0"/>
+                <a:ea typeface="Yu Gothic" pitchFamily="34" charset="-122"/>
+                <a:cs typeface="Yu Gothic" pitchFamily="34" charset="-120"/>
+              </a:rPr>
+              <a:t>取引先との間で30万円程度の未払い代金トラブルが生じたA社が、通常の訴訟よりも簡易・迅速に解決したい場合は、簡易裁判所の少額訴訟制度を利用する方法が考えられる。一方、当事者双方が対立を避けて柔軟な解決を望む場合には、民事調停の利用が向いている。</a:t>
+            </a:r>
+            <a:endParaRPr lang="en-US" sz="850" dirty="0"/>
+          </a:p>
+        </p:txBody>
+      </p:sp>
+      <p:sp>
+        <p:nvSpPr>
+          <p:cNvPr id="22" name="Shape 20"/>
           <p:cNvSpPr/>
           <p:nvPr/>
         </p:nvSpPr>
@@ -25291,7 +25732,7 @@
       </p:sp>
       <p:sp>
         <p:nvSpPr>
-          <p:cNvPr id="22" name="Shape 20"/>
+          <p:cNvPr id="23" name="Shape 21"/>
           <p:cNvSpPr/>
           <p:nvPr/>
         </p:nvSpPr>
@@ -25311,7 +25752,7 @@
       </p:sp>
       <p:sp>
         <p:nvSpPr>
-          <p:cNvPr id="23" name="Text 21"/>
+          <p:cNvPr id="24" name="Text 22"/>
           <p:cNvSpPr txBox="1"/>
           <p:nvPr/>
         </p:nvSpPr>
@@ -25350,7 +25791,7 @@
       </p:sp>
       <p:sp>
         <p:nvSpPr>
-          <p:cNvPr id="24" name="Text 22"/>
+          <p:cNvPr id="25" name="Text 23"/>
           <p:cNvSpPr txBox="1"/>
           <p:nvPr/>
         </p:nvSpPr>
@@ -25389,7 +25830,7 @@
       </p:sp>
       <p:sp>
         <p:nvSpPr>
-          <p:cNvPr id="25" name="Shape 23"/>
+          <p:cNvPr id="26" name="Shape 24"/>
           <p:cNvSpPr/>
           <p:nvPr/>
         </p:nvSpPr>
@@ -25412,7 +25853,7 @@
       </p:sp>
       <p:sp>
         <p:nvSpPr>
-          <p:cNvPr id="26" name="Text 24"/>
+          <p:cNvPr id="27" name="Text 25"/>
           <p:cNvSpPr txBox="1"/>
           <p:nvPr/>
         </p:nvSpPr>
@@ -25451,7 +25892,7 @@
       </p:sp>
       <p:sp>
         <p:nvSpPr>
-          <p:cNvPr id="27" name="Text 25"/>
+          <p:cNvPr id="28" name="Text 26"/>
           <p:cNvSpPr txBox="1"/>
           <p:nvPr/>
         </p:nvSpPr>
@@ -25490,7 +25931,7 @@
       </p:sp>
       <p:sp>
         <p:nvSpPr>
-          <p:cNvPr id="28" name="Shape 26"/>
+          <p:cNvPr id="29" name="Shape 27"/>
           <p:cNvSpPr/>
           <p:nvPr/>
         </p:nvSpPr>
@@ -25515,7 +25956,7 @@
       </p:sp>
       <p:sp>
         <p:nvSpPr>
-          <p:cNvPr id="29" name="Text 27"/>
+          <p:cNvPr id="30" name="Text 28"/>
           <p:cNvSpPr txBox="1"/>
           <p:nvPr/>
         </p:nvSpPr>
@@ -25554,7 +25995,7 @@
       </p:sp>
       <p:sp>
         <p:nvSpPr>
-          <p:cNvPr id="30" name="Shape 28"/>
+          <p:cNvPr id="31" name="Shape 29"/>
           <p:cNvSpPr/>
           <p:nvPr/>
         </p:nvSpPr>
@@ -25579,7 +26020,7 @@
       </p:sp>
       <p:sp>
         <p:nvSpPr>
-          <p:cNvPr id="31" name="Text 29"/>
+          <p:cNvPr id="32" name="Text 30"/>
           <p:cNvSpPr txBox="1"/>
           <p:nvPr/>
         </p:nvSpPr>
@@ -25618,7 +26059,7 @@
       </p:sp>
       <p:sp>
         <p:nvSpPr>
-          <p:cNvPr id="32" name="Shape 30"/>
+          <p:cNvPr id="33" name="Shape 31"/>
           <p:cNvSpPr/>
           <p:nvPr/>
         </p:nvSpPr>
@@ -25643,7 +26084,7 @@
       </p:sp>
       <p:sp>
         <p:nvSpPr>
-          <p:cNvPr id="33" name="Text 31"/>
+          <p:cNvPr id="34" name="Text 32"/>
           <p:cNvSpPr txBox="1"/>
           <p:nvPr/>
         </p:nvSpPr>
@@ -25682,7 +26123,7 @@
       </p:sp>
       <p:sp>
         <p:nvSpPr>
-          <p:cNvPr id="34" name="Shape 32"/>
+          <p:cNvPr id="35" name="Shape 33"/>
           <p:cNvSpPr/>
           <p:nvPr/>
         </p:nvSpPr>
@@ -25707,7 +26148,7 @@
       </p:sp>
       <p:sp>
         <p:nvSpPr>
-          <p:cNvPr id="35" name="Text 33"/>
+          <p:cNvPr id="36" name="Text 34"/>
           <p:cNvSpPr txBox="1"/>
           <p:nvPr/>
         </p:nvSpPr>
@@ -25746,7 +26187,7 @@
       </p:sp>
       <p:sp>
         <p:nvSpPr>
-          <p:cNvPr id="36" name="Shape 34"/>
+          <p:cNvPr id="37" name="Shape 35"/>
           <p:cNvSpPr/>
           <p:nvPr/>
         </p:nvSpPr>
@@ -25771,7 +26212,7 @@
       </p:sp>
       <p:sp>
         <p:nvSpPr>
-          <p:cNvPr id="37" name="Text 35"/>
+          <p:cNvPr id="38" name="Text 36"/>
           <p:cNvSpPr txBox="1"/>
           <p:nvPr/>
         </p:nvSpPr>
@@ -25810,7 +26251,7 @@
       </p:sp>
       <p:sp>
         <p:nvSpPr>
-          <p:cNvPr id="38" name="Shape 36"/>
+          <p:cNvPr id="39" name="Shape 37"/>
           <p:cNvSpPr/>
           <p:nvPr/>
         </p:nvSpPr>
@@ -25835,7 +26276,7 @@
       </p:sp>
       <p:sp>
         <p:nvSpPr>
-          <p:cNvPr id="39" name="Text 37"/>
+          <p:cNvPr id="40" name="Text 38"/>
           <p:cNvSpPr txBox="1"/>
           <p:nvPr/>
         </p:nvSpPr>
@@ -25874,7 +26315,7 @@
       </p:sp>
       <p:sp>
         <p:nvSpPr>
-          <p:cNvPr id="40" name="Shape 38"/>
+          <p:cNvPr id="41" name="Shape 39"/>
           <p:cNvSpPr/>
           <p:nvPr/>
         </p:nvSpPr>
@@ -25899,7 +26340,7 @@
       </p:sp>
       <p:sp>
         <p:nvSpPr>
-          <p:cNvPr id="41" name="Text 39"/>
+          <p:cNvPr id="42" name="Text 40"/>
           <p:cNvSpPr txBox="1"/>
           <p:nvPr/>
         </p:nvSpPr>
@@ -25938,7 +26379,7 @@
       </p:sp>
       <p:sp>
         <p:nvSpPr>
-          <p:cNvPr id="42" name="Shape 40"/>
+          <p:cNvPr id="43" name="Shape 41"/>
           <p:cNvSpPr/>
           <p:nvPr/>
         </p:nvSpPr>
@@ -25963,7 +26404,7 @@
       </p:sp>
       <p:sp>
         <p:nvSpPr>
-          <p:cNvPr id="43" name="Text 41"/>
+          <p:cNvPr id="44" name="Text 42"/>
           <p:cNvSpPr txBox="1"/>
           <p:nvPr/>
         </p:nvSpPr>
@@ -26002,7 +26443,7 @@
       </p:sp>
       <p:sp>
         <p:nvSpPr>
-          <p:cNvPr id="44" name="Shape 42"/>
+          <p:cNvPr id="45" name="Shape 43"/>
           <p:cNvSpPr/>
           <p:nvPr/>
         </p:nvSpPr>
@@ -26027,7 +26468,7 @@
       </p:sp>
       <p:sp>
         <p:nvSpPr>
-          <p:cNvPr id="45" name="Text 43"/>
+          <p:cNvPr id="46" name="Text 44"/>
           <p:cNvSpPr txBox="1"/>
           <p:nvPr/>
         </p:nvSpPr>
@@ -26066,7 +26507,7 @@
       </p:sp>
       <p:sp>
         <p:nvSpPr>
-          <p:cNvPr id="46" name="Shape 44"/>
+          <p:cNvPr id="47" name="Shape 45"/>
           <p:cNvSpPr/>
           <p:nvPr/>
         </p:nvSpPr>
@@ -26091,7 +26532,7 @@
       </p:sp>
       <p:sp>
         <p:nvSpPr>
-          <p:cNvPr id="47" name="Text 45"/>
+          <p:cNvPr id="48" name="Text 46"/>
           <p:cNvSpPr txBox="1"/>
           <p:nvPr/>
         </p:nvSpPr>
@@ -31077,7 +31518,7 @@
         <p:spPr>
           <a:xfrm>
             <a:off x="2423160" y="2267712"/>
-            <a:ext cx="9281160" cy="850392"/>
+            <a:ext cx="9281160" cy="713232"/>
           </a:xfrm>
           <a:prstGeom prst="rect">
             <a:avLst/>
@@ -31118,7 +31559,7 @@
         </p:nvSpPr>
         <p:spPr>
           <a:xfrm>
-            <a:off x="502920" y="3200400"/>
+            <a:off x="502920" y="3063240"/>
             <a:ext cx="11201400" cy="0"/>
           </a:xfrm>
           <a:prstGeom prst="line">
@@ -31141,7 +31582,7 @@
         </p:nvSpPr>
         <p:spPr>
           <a:xfrm>
-            <a:off x="502920" y="3310128"/>
+            <a:off x="502920" y="3172968"/>
             <a:ext cx="1828800" cy="320040"/>
           </a:xfrm>
           <a:prstGeom prst="rect">
@@ -31180,8 +31621,8 @@
         </p:nvSpPr>
         <p:spPr>
           <a:xfrm>
-            <a:off x="2423160" y="3273552"/>
-            <a:ext cx="9281160" cy="850392"/>
+            <a:off x="2423160" y="3136392"/>
+            <a:ext cx="9281160" cy="713232"/>
           </a:xfrm>
           <a:prstGeom prst="rect">
             <a:avLst/>
@@ -31222,7 +31663,7 @@
         </p:nvSpPr>
         <p:spPr>
           <a:xfrm>
-            <a:off x="502920" y="4206240"/>
+            <a:off x="502920" y="3931920"/>
             <a:ext cx="11201400" cy="0"/>
           </a:xfrm>
           <a:prstGeom prst="line">
@@ -31245,7 +31686,7 @@
         </p:nvSpPr>
         <p:spPr>
           <a:xfrm>
-            <a:off x="502920" y="4315968"/>
+            <a:off x="502920" y="4041648"/>
             <a:ext cx="1828800" cy="320040"/>
           </a:xfrm>
           <a:prstGeom prst="rect">
@@ -31284,8 +31725,8 @@
         </p:nvSpPr>
         <p:spPr>
           <a:xfrm>
-            <a:off x="2423160" y="4279392"/>
-            <a:ext cx="9281160" cy="850392"/>
+            <a:off x="2423160" y="4005072"/>
+            <a:ext cx="9281160" cy="713232"/>
           </a:xfrm>
           <a:prstGeom prst="rect">
             <a:avLst/>
@@ -31320,7 +31761,70 @@
       </p:sp>
       <p:sp>
         <p:nvSpPr>
-          <p:cNvPr id="17" name="Shape 15"/>
+          <p:cNvPr id="17" name="Text 15"/>
+          <p:cNvSpPr txBox="1"/>
+          <p:nvPr/>
+        </p:nvSpPr>
+        <p:spPr>
+          <a:xfrm>
+            <a:off x="502920" y="4846320"/>
+            <a:ext cx="11201400" cy="640080"/>
+          </a:xfrm>
+          <a:prstGeom prst="rect">
+            <a:avLst/>
+          </a:prstGeom>
+          <a:noFill/>
+          <a:ln/>
+        </p:spPr>
+        <p:txBody>
+          <a:bodyPr wrap="square" lIns="0" tIns="0" rIns="0" bIns="0" rtlCol="0" anchor="ctr"/>
+          <a:lstStyle/>
+          <a:p>
+            <a:pPr indent="0" marL="0">
+              <a:lnSpc>
+                <a:spcPct val="120000"/>
+              </a:lnSpc>
+              <a:buNone/>
+            </a:pPr>
+            <a:r>
+              <a:rPr lang="en-US" sz="850" b="1" dirty="0">
+                <a:solidFill>
+                  <a:srgbClr val="8A8A8A"/>
+                </a:solidFill>
+                <a:latin typeface="Consolas" pitchFamily="34" charset="0"/>
+                <a:ea typeface="Consolas" pitchFamily="34" charset="-122"/>
+                <a:cs typeface="Consolas" pitchFamily="34" charset="-120"/>
+              </a:rPr>
+              <a:t>具体例
+</a:t>
+            </a:r>
+            <a:endParaRPr lang="en-US" sz="850" dirty="0"/>
+          </a:p>
+          <a:p>
+            <a:pPr indent="0" marL="0">
+              <a:lnSpc>
+                <a:spcPct val="120000"/>
+              </a:lnSpc>
+              <a:buNone/>
+            </a:pPr>
+            <a:r>
+              <a:rPr lang="en-US" sz="950" dirty="0">
+                <a:solidFill>
+                  <a:srgbClr val="171717"/>
+                </a:solidFill>
+                <a:latin typeface="Yu Gothic" pitchFamily="34" charset="0"/>
+                <a:ea typeface="Yu Gothic" pitchFamily="34" charset="-122"/>
+                <a:cs typeface="Yu Gothic" pitchFamily="34" charset="-120"/>
+              </a:rPr>
+              <a:t>個人で飲食店を開業する場合、税務署に開業届を提出すればその日から営業できるが、経営が悪化し借金を返せなくなれば、事業主は自宅等の個人財産を売ってでも返済する義務を負う（無限責任）。同じ事業を株式会社として始めていれば、原則として出資した金額を失うだけで済む（有限責任）。</a:t>
+            </a:r>
+            <a:endParaRPr lang="en-US" sz="850" dirty="0"/>
+          </a:p>
+        </p:txBody>
+      </p:sp>
+      <p:sp>
+        <p:nvSpPr>
+          <p:cNvPr id="18" name="Shape 16"/>
           <p:cNvSpPr/>
           <p:nvPr/>
         </p:nvSpPr>
@@ -31343,7 +31847,7 @@
       </p:sp>
       <p:sp>
         <p:nvSpPr>
-          <p:cNvPr id="18" name="Shape 16"/>
+          <p:cNvPr id="19" name="Shape 17"/>
           <p:cNvSpPr/>
           <p:nvPr/>
         </p:nvSpPr>
@@ -31363,7 +31867,7 @@
       </p:sp>
       <p:sp>
         <p:nvSpPr>
-          <p:cNvPr id="19" name="Text 17"/>
+          <p:cNvPr id="20" name="Text 18"/>
           <p:cNvSpPr txBox="1"/>
           <p:nvPr/>
         </p:nvSpPr>
@@ -31402,7 +31906,7 @@
       </p:sp>
       <p:sp>
         <p:nvSpPr>
-          <p:cNvPr id="20" name="Text 18"/>
+          <p:cNvPr id="21" name="Text 19"/>
           <p:cNvSpPr txBox="1"/>
           <p:nvPr/>
         </p:nvSpPr>
@@ -31441,7 +31945,7 @@
       </p:sp>
       <p:sp>
         <p:nvSpPr>
-          <p:cNvPr id="21" name="Shape 19"/>
+          <p:cNvPr id="22" name="Shape 20"/>
           <p:cNvSpPr/>
           <p:nvPr/>
         </p:nvSpPr>
@@ -31464,7 +31968,7 @@
       </p:sp>
       <p:sp>
         <p:nvSpPr>
-          <p:cNvPr id="22" name="Text 20"/>
+          <p:cNvPr id="23" name="Text 21"/>
           <p:cNvSpPr txBox="1"/>
           <p:nvPr/>
         </p:nvSpPr>
@@ -31503,7 +32007,7 @@
       </p:sp>
       <p:sp>
         <p:nvSpPr>
-          <p:cNvPr id="23" name="Text 21"/>
+          <p:cNvPr id="24" name="Text 22"/>
           <p:cNvSpPr txBox="1"/>
           <p:nvPr/>
         </p:nvSpPr>
@@ -31542,7 +32046,7 @@
       </p:sp>
       <p:sp>
         <p:nvSpPr>
-          <p:cNvPr id="24" name="Shape 22"/>
+          <p:cNvPr id="25" name="Shape 23"/>
           <p:cNvSpPr/>
           <p:nvPr/>
         </p:nvSpPr>
@@ -31567,7 +32071,7 @@
       </p:sp>
       <p:sp>
         <p:nvSpPr>
-          <p:cNvPr id="25" name="Text 23"/>
+          <p:cNvPr id="26" name="Text 24"/>
           <p:cNvSpPr txBox="1"/>
           <p:nvPr/>
         </p:nvSpPr>
@@ -31606,7 +32110,7 @@
       </p:sp>
       <p:sp>
         <p:nvSpPr>
-          <p:cNvPr id="26" name="Shape 24"/>
+          <p:cNvPr id="27" name="Shape 25"/>
           <p:cNvSpPr/>
           <p:nvPr/>
         </p:nvSpPr>
@@ -31631,7 +32135,7 @@
       </p:sp>
       <p:sp>
         <p:nvSpPr>
-          <p:cNvPr id="27" name="Text 25"/>
+          <p:cNvPr id="28" name="Text 26"/>
           <p:cNvSpPr txBox="1"/>
           <p:nvPr/>
         </p:nvSpPr>
@@ -31670,7 +32174,7 @@
       </p:sp>
       <p:sp>
         <p:nvSpPr>
-          <p:cNvPr id="28" name="Shape 26"/>
+          <p:cNvPr id="29" name="Shape 27"/>
           <p:cNvSpPr/>
           <p:nvPr/>
         </p:nvSpPr>
@@ -31695,7 +32199,7 @@
       </p:sp>
       <p:sp>
         <p:nvSpPr>
-          <p:cNvPr id="29" name="Text 27"/>
+          <p:cNvPr id="30" name="Text 28"/>
           <p:cNvSpPr txBox="1"/>
           <p:nvPr/>
         </p:nvSpPr>
@@ -31734,7 +32238,7 @@
       </p:sp>
       <p:sp>
         <p:nvSpPr>
-          <p:cNvPr id="30" name="Shape 28"/>
+          <p:cNvPr id="31" name="Shape 29"/>
           <p:cNvSpPr/>
           <p:nvPr/>
         </p:nvSpPr>
@@ -31759,7 +32263,7 @@
       </p:sp>
       <p:sp>
         <p:nvSpPr>
-          <p:cNvPr id="31" name="Text 29"/>
+          <p:cNvPr id="32" name="Text 30"/>
           <p:cNvSpPr txBox="1"/>
           <p:nvPr/>
         </p:nvSpPr>
@@ -31798,7 +32302,7 @@
       </p:sp>
       <p:sp>
         <p:nvSpPr>
-          <p:cNvPr id="32" name="Shape 30"/>
+          <p:cNvPr id="33" name="Shape 31"/>
           <p:cNvSpPr/>
           <p:nvPr/>
         </p:nvSpPr>
@@ -31823,7 +32327,7 @@
       </p:sp>
       <p:sp>
         <p:nvSpPr>
-          <p:cNvPr id="33" name="Text 31"/>
+          <p:cNvPr id="34" name="Text 32"/>
           <p:cNvSpPr txBox="1"/>
           <p:nvPr/>
         </p:nvSpPr>
@@ -31862,7 +32366,7 @@
       </p:sp>
       <p:sp>
         <p:nvSpPr>
-          <p:cNvPr id="34" name="Shape 32"/>
+          <p:cNvPr id="35" name="Shape 33"/>
           <p:cNvSpPr/>
           <p:nvPr/>
         </p:nvSpPr>
@@ -31887,7 +32391,7 @@
       </p:sp>
       <p:sp>
         <p:nvSpPr>
-          <p:cNvPr id="35" name="Text 33"/>
+          <p:cNvPr id="36" name="Text 34"/>
           <p:cNvSpPr txBox="1"/>
           <p:nvPr/>
         </p:nvSpPr>
@@ -31926,7 +32430,7 @@
       </p:sp>
       <p:sp>
         <p:nvSpPr>
-          <p:cNvPr id="36" name="Shape 34"/>
+          <p:cNvPr id="37" name="Shape 35"/>
           <p:cNvSpPr/>
           <p:nvPr/>
         </p:nvSpPr>
@@ -31951,7 +32455,7 @@
       </p:sp>
       <p:sp>
         <p:nvSpPr>
-          <p:cNvPr id="37" name="Text 35"/>
+          <p:cNvPr id="38" name="Text 36"/>
           <p:cNvSpPr txBox="1"/>
           <p:nvPr/>
         </p:nvSpPr>
@@ -31990,7 +32494,7 @@
       </p:sp>
       <p:sp>
         <p:nvSpPr>
-          <p:cNvPr id="38" name="Shape 36"/>
+          <p:cNvPr id="39" name="Shape 37"/>
           <p:cNvSpPr/>
           <p:nvPr/>
         </p:nvSpPr>
@@ -32015,7 +32519,7 @@
       </p:sp>
       <p:sp>
         <p:nvSpPr>
-          <p:cNvPr id="39" name="Text 37"/>
+          <p:cNvPr id="40" name="Text 38"/>
           <p:cNvSpPr txBox="1"/>
           <p:nvPr/>
         </p:nvSpPr>
@@ -32054,7 +32558,7 @@
       </p:sp>
       <p:sp>
         <p:nvSpPr>
-          <p:cNvPr id="40" name="Shape 38"/>
+          <p:cNvPr id="41" name="Shape 39"/>
           <p:cNvSpPr/>
           <p:nvPr/>
         </p:nvSpPr>
@@ -32079,7 +32583,7 @@
       </p:sp>
       <p:sp>
         <p:nvSpPr>
-          <p:cNvPr id="41" name="Text 39"/>
+          <p:cNvPr id="42" name="Text 40"/>
           <p:cNvSpPr txBox="1"/>
           <p:nvPr/>
         </p:nvSpPr>
@@ -32118,7 +32622,7 @@
       </p:sp>
       <p:sp>
         <p:nvSpPr>
-          <p:cNvPr id="42" name="Shape 40"/>
+          <p:cNvPr id="43" name="Shape 41"/>
           <p:cNvSpPr/>
           <p:nvPr/>
         </p:nvSpPr>
@@ -32143,7 +32647,7 @@
       </p:sp>
       <p:sp>
         <p:nvSpPr>
-          <p:cNvPr id="43" name="Text 41"/>
+          <p:cNvPr id="44" name="Text 42"/>
           <p:cNvSpPr txBox="1"/>
           <p:nvPr/>
         </p:nvSpPr>
@@ -34242,13 +34746,76 @@
       </p:sp>
       <p:sp>
         <p:nvSpPr>
-          <p:cNvPr id="21" name="Shape 19"/>
+          <p:cNvPr id="21" name="Text 19"/>
+          <p:cNvSpPr txBox="1"/>
+          <p:nvPr/>
+        </p:nvSpPr>
+        <p:spPr>
+          <a:xfrm>
+            <a:off x="502920" y="3383280"/>
+            <a:ext cx="11201400" cy="594360"/>
+          </a:xfrm>
+          <a:prstGeom prst="rect">
+            <a:avLst/>
+          </a:prstGeom>
+          <a:noFill/>
+          <a:ln/>
+        </p:spPr>
+        <p:txBody>
+          <a:bodyPr wrap="square" lIns="0" tIns="0" rIns="0" bIns="0" rtlCol="0" anchor="ctr"/>
+          <a:lstStyle/>
+          <a:p>
+            <a:pPr indent="0" marL="0">
+              <a:lnSpc>
+                <a:spcPct val="110000"/>
+              </a:lnSpc>
+              <a:buNone/>
+            </a:pPr>
+            <a:r>
+              <a:rPr lang="en-US" sz="850" b="1" dirty="0">
+                <a:solidFill>
+                  <a:srgbClr val="8A8A8A"/>
+                </a:solidFill>
+                <a:latin typeface="Consolas" pitchFamily="34" charset="0"/>
+                <a:ea typeface="Consolas" pitchFamily="34" charset="-122"/>
+                <a:cs typeface="Consolas" pitchFamily="34" charset="-120"/>
+              </a:rPr>
+              <a:t>具体例
+</a:t>
+            </a:r>
+            <a:endParaRPr lang="en-US" sz="850" dirty="0"/>
+          </a:p>
+          <a:p>
+            <a:pPr indent="0" marL="0">
+              <a:lnSpc>
+                <a:spcPct val="110000"/>
+              </a:lnSpc>
+              <a:buNone/>
+            </a:pPr>
+            <a:r>
+              <a:rPr lang="en-US" sz="900" dirty="0">
+                <a:solidFill>
+                  <a:srgbClr val="171717"/>
+                </a:solidFill>
+                <a:latin typeface="Yu Gothic" pitchFamily="34" charset="0"/>
+                <a:ea typeface="Yu Gothic" pitchFamily="34" charset="-122"/>
+                <a:cs typeface="Yu Gothic" pitchFamily="34" charset="-120"/>
+              </a:rPr>
+              <a:t>ある取締役が、自分が個人的に経営する別会社に対し、勤務先のA社の商品を優先的に有利な条件で卸すよう手配した場合、これは会社との利益相反行為（間接取引）にあたりうる。取締役会の承認を得ていなければ、A社に対する善管注意義務・忠実義務違反として損害賠償責任を問われる可能性がある。</a:t>
+            </a:r>
+            <a:endParaRPr lang="en-US" sz="850" dirty="0"/>
+          </a:p>
+        </p:txBody>
+      </p:sp>
+      <p:sp>
+        <p:nvSpPr>
+          <p:cNvPr id="22" name="Shape 20"/>
           <p:cNvSpPr/>
           <p:nvPr/>
         </p:nvSpPr>
         <p:spPr>
           <a:xfrm>
-            <a:off x="502920" y="3401568"/>
+            <a:off x="502920" y="4023360"/>
             <a:ext cx="11201400" cy="0"/>
           </a:xfrm>
           <a:prstGeom prst="line">
@@ -34265,13 +34832,13 @@
       </p:sp>
       <p:sp>
         <p:nvSpPr>
-          <p:cNvPr id="22" name="Text 20"/>
-          <p:cNvSpPr txBox="1"/>
-          <p:nvPr/>
-        </p:nvSpPr>
-        <p:spPr>
-          <a:xfrm>
-            <a:off x="502920" y="3474720"/>
+          <p:cNvPr id="23" name="Text 21"/>
+          <p:cNvSpPr txBox="1"/>
+          <p:nvPr/>
+        </p:nvSpPr>
+        <p:spPr>
+          <a:xfrm>
+            <a:off x="502920" y="4096512"/>
             <a:ext cx="11201400" cy="457200"/>
           </a:xfrm>
           <a:prstGeom prst="rect">
@@ -34324,7 +34891,7 @@
       </p:sp>
       <p:sp>
         <p:nvSpPr>
-          <p:cNvPr id="23" name="Shape 21"/>
+          <p:cNvPr id="24" name="Shape 22"/>
           <p:cNvSpPr/>
           <p:nvPr/>
         </p:nvSpPr>
@@ -34347,7 +34914,7 @@
       </p:sp>
       <p:sp>
         <p:nvSpPr>
-          <p:cNvPr id="24" name="Shape 22"/>
+          <p:cNvPr id="25" name="Shape 23"/>
           <p:cNvSpPr/>
           <p:nvPr/>
         </p:nvSpPr>
@@ -34367,7 +34934,7 @@
       </p:sp>
       <p:sp>
         <p:nvSpPr>
-          <p:cNvPr id="25" name="Text 23"/>
+          <p:cNvPr id="26" name="Text 24"/>
           <p:cNvSpPr txBox="1"/>
           <p:nvPr/>
         </p:nvSpPr>
@@ -34406,7 +34973,7 @@
       </p:sp>
       <p:sp>
         <p:nvSpPr>
-          <p:cNvPr id="26" name="Text 24"/>
+          <p:cNvPr id="27" name="Text 25"/>
           <p:cNvSpPr txBox="1"/>
           <p:nvPr/>
         </p:nvSpPr>
@@ -34445,7 +35012,7 @@
       </p:sp>
       <p:sp>
         <p:nvSpPr>
-          <p:cNvPr id="27" name="Shape 25"/>
+          <p:cNvPr id="28" name="Shape 26"/>
           <p:cNvSpPr/>
           <p:nvPr/>
         </p:nvSpPr>
@@ -34468,7 +35035,7 @@
       </p:sp>
       <p:sp>
         <p:nvSpPr>
-          <p:cNvPr id="28" name="Text 26"/>
+          <p:cNvPr id="29" name="Text 27"/>
           <p:cNvSpPr txBox="1"/>
           <p:nvPr/>
         </p:nvSpPr>
@@ -34507,7 +35074,7 @@
       </p:sp>
       <p:sp>
         <p:nvSpPr>
-          <p:cNvPr id="29" name="Text 27"/>
+          <p:cNvPr id="30" name="Text 28"/>
           <p:cNvSpPr txBox="1"/>
           <p:nvPr/>
         </p:nvSpPr>
@@ -34546,7 +35113,7 @@
       </p:sp>
       <p:sp>
         <p:nvSpPr>
-          <p:cNvPr id="30" name="Shape 28"/>
+          <p:cNvPr id="31" name="Shape 29"/>
           <p:cNvSpPr/>
           <p:nvPr/>
         </p:nvSpPr>
@@ -34571,7 +35138,7 @@
       </p:sp>
       <p:sp>
         <p:nvSpPr>
-          <p:cNvPr id="31" name="Text 29"/>
+          <p:cNvPr id="32" name="Text 30"/>
           <p:cNvSpPr txBox="1"/>
           <p:nvPr/>
         </p:nvSpPr>
@@ -34610,7 +35177,7 @@
       </p:sp>
       <p:sp>
         <p:nvSpPr>
-          <p:cNvPr id="32" name="Shape 30"/>
+          <p:cNvPr id="33" name="Shape 31"/>
           <p:cNvSpPr/>
           <p:nvPr/>
         </p:nvSpPr>
@@ -34635,7 +35202,7 @@
       </p:sp>
       <p:sp>
         <p:nvSpPr>
-          <p:cNvPr id="33" name="Text 31"/>
+          <p:cNvPr id="34" name="Text 32"/>
           <p:cNvSpPr txBox="1"/>
           <p:nvPr/>
         </p:nvSpPr>
@@ -34674,7 +35241,7 @@
       </p:sp>
       <p:sp>
         <p:nvSpPr>
-          <p:cNvPr id="34" name="Shape 32"/>
+          <p:cNvPr id="35" name="Shape 33"/>
           <p:cNvSpPr/>
           <p:nvPr/>
         </p:nvSpPr>
@@ -34699,7 +35266,7 @@
       </p:sp>
       <p:sp>
         <p:nvSpPr>
-          <p:cNvPr id="35" name="Text 33"/>
+          <p:cNvPr id="36" name="Text 34"/>
           <p:cNvSpPr txBox="1"/>
           <p:nvPr/>
         </p:nvSpPr>
@@ -34738,7 +35305,7 @@
       </p:sp>
       <p:sp>
         <p:nvSpPr>
-          <p:cNvPr id="36" name="Shape 34"/>
+          <p:cNvPr id="37" name="Shape 35"/>
           <p:cNvSpPr/>
           <p:nvPr/>
         </p:nvSpPr>
@@ -34763,7 +35330,7 @@
       </p:sp>
       <p:sp>
         <p:nvSpPr>
-          <p:cNvPr id="37" name="Text 35"/>
+          <p:cNvPr id="38" name="Text 36"/>
           <p:cNvSpPr txBox="1"/>
           <p:nvPr/>
         </p:nvSpPr>
@@ -34802,7 +35369,7 @@
       </p:sp>
       <p:sp>
         <p:nvSpPr>
-          <p:cNvPr id="38" name="Shape 36"/>
+          <p:cNvPr id="39" name="Shape 37"/>
           <p:cNvSpPr/>
           <p:nvPr/>
         </p:nvSpPr>
@@ -34827,7 +35394,7 @@
       </p:sp>
       <p:sp>
         <p:nvSpPr>
-          <p:cNvPr id="39" name="Text 37"/>
+          <p:cNvPr id="40" name="Text 38"/>
           <p:cNvSpPr txBox="1"/>
           <p:nvPr/>
         </p:nvSpPr>
@@ -34866,7 +35433,7 @@
       </p:sp>
       <p:sp>
         <p:nvSpPr>
-          <p:cNvPr id="40" name="Shape 38"/>
+          <p:cNvPr id="41" name="Shape 39"/>
           <p:cNvSpPr/>
           <p:nvPr/>
         </p:nvSpPr>
@@ -34891,7 +35458,7 @@
       </p:sp>
       <p:sp>
         <p:nvSpPr>
-          <p:cNvPr id="41" name="Text 39"/>
+          <p:cNvPr id="42" name="Text 40"/>
           <p:cNvSpPr txBox="1"/>
           <p:nvPr/>
         </p:nvSpPr>
@@ -34930,7 +35497,7 @@
       </p:sp>
       <p:sp>
         <p:nvSpPr>
-          <p:cNvPr id="42" name="Shape 40"/>
+          <p:cNvPr id="43" name="Shape 41"/>
           <p:cNvSpPr/>
           <p:nvPr/>
         </p:nvSpPr>
@@ -34955,7 +35522,7 @@
       </p:sp>
       <p:sp>
         <p:nvSpPr>
-          <p:cNvPr id="43" name="Text 41"/>
+          <p:cNvPr id="44" name="Text 42"/>
           <p:cNvSpPr txBox="1"/>
           <p:nvPr/>
         </p:nvSpPr>
@@ -34994,7 +35561,7 @@
       </p:sp>
       <p:sp>
         <p:nvSpPr>
-          <p:cNvPr id="44" name="Shape 42"/>
+          <p:cNvPr id="45" name="Shape 43"/>
           <p:cNvSpPr/>
           <p:nvPr/>
         </p:nvSpPr>
@@ -35019,7 +35586,7 @@
       </p:sp>
       <p:sp>
         <p:nvSpPr>
-          <p:cNvPr id="45" name="Text 43"/>
+          <p:cNvPr id="46" name="Text 44"/>
           <p:cNvSpPr txBox="1"/>
           <p:nvPr/>
         </p:nvSpPr>
@@ -35058,7 +35625,7 @@
       </p:sp>
       <p:sp>
         <p:nvSpPr>
-          <p:cNvPr id="46" name="Shape 44"/>
+          <p:cNvPr id="47" name="Shape 45"/>
           <p:cNvSpPr/>
           <p:nvPr/>
         </p:nvSpPr>
@@ -35083,7 +35650,7 @@
       </p:sp>
       <p:sp>
         <p:nvSpPr>
-          <p:cNvPr id="47" name="Text 45"/>
+          <p:cNvPr id="48" name="Text 46"/>
           <p:cNvSpPr txBox="1"/>
           <p:nvPr/>
         </p:nvSpPr>
@@ -35122,7 +35689,7 @@
       </p:sp>
       <p:sp>
         <p:nvSpPr>
-          <p:cNvPr id="48" name="Shape 46"/>
+          <p:cNvPr id="49" name="Shape 47"/>
           <p:cNvSpPr/>
           <p:nvPr/>
         </p:nvSpPr>
@@ -35147,7 +35714,7 @@
       </p:sp>
       <p:sp>
         <p:nvSpPr>
-          <p:cNvPr id="49" name="Text 47"/>
+          <p:cNvPr id="50" name="Text 48"/>
           <p:cNvSpPr txBox="1"/>
           <p:nvPr/>
         </p:nvSpPr>
@@ -36150,13 +36717,76 @@
       </p:sp>
       <p:sp>
         <p:nvSpPr>
-          <p:cNvPr id="18" name="Shape 16"/>
+          <p:cNvPr id="18" name="Text 16"/>
+          <p:cNvSpPr txBox="1"/>
+          <p:nvPr/>
+        </p:nvSpPr>
+        <p:spPr>
+          <a:xfrm>
+            <a:off x="502920" y="3200400"/>
+            <a:ext cx="11201400" cy="640080"/>
+          </a:xfrm>
+          <a:prstGeom prst="rect">
+            <a:avLst/>
+          </a:prstGeom>
+          <a:noFill/>
+          <a:ln/>
+        </p:spPr>
+        <p:txBody>
+          <a:bodyPr wrap="square" lIns="0" tIns="0" rIns="0" bIns="0" rtlCol="0" anchor="ctr"/>
+          <a:lstStyle/>
+          <a:p>
+            <a:pPr indent="0" marL="0">
+              <a:lnSpc>
+                <a:spcPct val="120000"/>
+              </a:lnSpc>
+              <a:buNone/>
+            </a:pPr>
+            <a:r>
+              <a:rPr lang="en-US" sz="850" b="1" dirty="0">
+                <a:solidFill>
+                  <a:srgbClr val="8A8A8A"/>
+                </a:solidFill>
+                <a:latin typeface="Consolas" pitchFamily="34" charset="0"/>
+                <a:ea typeface="Consolas" pitchFamily="34" charset="-122"/>
+                <a:cs typeface="Consolas" pitchFamily="34" charset="-120"/>
+              </a:rPr>
+              <a:t>具体例
+</a:t>
+            </a:r>
+            <a:endParaRPr lang="en-US" sz="850" dirty="0"/>
+          </a:p>
+          <a:p>
+            <a:pPr indent="0" marL="0">
+              <a:lnSpc>
+                <a:spcPct val="120000"/>
+              </a:lnSpc>
+              <a:buNone/>
+            </a:pPr>
+            <a:r>
+              <a:rPr lang="en-US" sz="950" dirty="0">
+                <a:solidFill>
+                  <a:srgbClr val="171717"/>
+                </a:solidFill>
+                <a:latin typeface="Yu Gothic" pitchFamily="34" charset="0"/>
+                <a:ea typeface="Yu Gothic" pitchFamily="34" charset="-122"/>
+                <a:cs typeface="Yu Gothic" pitchFamily="34" charset="-120"/>
+              </a:rPr>
+              <a:t>上場企業A社の役員が、公表前の業績の大幅下方修正という重要事実を知った上で、公表前に自社株を売り抜けた場合、インサイダー取引規制に違反する可能性がある。発行開示・継続開示のいずれも、こうした投資家保護の土台として機能している。</a:t>
+            </a:r>
+            <a:endParaRPr lang="en-US" sz="850" dirty="0"/>
+          </a:p>
+        </p:txBody>
+      </p:sp>
+      <p:sp>
+        <p:nvSpPr>
+          <p:cNvPr id="19" name="Shape 17"/>
           <p:cNvSpPr/>
           <p:nvPr/>
         </p:nvSpPr>
         <p:spPr>
           <a:xfrm>
-            <a:off x="502920" y="3218688"/>
+            <a:off x="502920" y="3886200"/>
             <a:ext cx="11201400" cy="0"/>
           </a:xfrm>
           <a:prstGeom prst="line">
@@ -36173,13 +36803,13 @@
       </p:sp>
       <p:sp>
         <p:nvSpPr>
-          <p:cNvPr id="19" name="Text 17"/>
-          <p:cNvSpPr txBox="1"/>
-          <p:nvPr/>
-        </p:nvSpPr>
-        <p:spPr>
-          <a:xfrm>
-            <a:off x="502920" y="3291840"/>
+          <p:cNvPr id="20" name="Text 18"/>
+          <p:cNvSpPr txBox="1"/>
+          <p:nvPr/>
+        </p:nvSpPr>
+        <p:spPr>
+          <a:xfrm>
+            <a:off x="502920" y="3959352"/>
             <a:ext cx="11201400" cy="457200"/>
           </a:xfrm>
           <a:prstGeom prst="rect">
@@ -36232,7 +36862,7 @@
       </p:sp>
       <p:sp>
         <p:nvSpPr>
-          <p:cNvPr id="20" name="Shape 18"/>
+          <p:cNvPr id="21" name="Shape 19"/>
           <p:cNvSpPr/>
           <p:nvPr/>
         </p:nvSpPr>
@@ -36255,7 +36885,7 @@
       </p:sp>
       <p:sp>
         <p:nvSpPr>
-          <p:cNvPr id="21" name="Shape 19"/>
+          <p:cNvPr id="22" name="Shape 20"/>
           <p:cNvSpPr/>
           <p:nvPr/>
         </p:nvSpPr>
@@ -36275,7 +36905,7 @@
       </p:sp>
       <p:sp>
         <p:nvSpPr>
-          <p:cNvPr id="22" name="Text 20"/>
+          <p:cNvPr id="23" name="Text 21"/>
           <p:cNvSpPr txBox="1"/>
           <p:nvPr/>
         </p:nvSpPr>
@@ -36314,7 +36944,7 @@
       </p:sp>
       <p:sp>
         <p:nvSpPr>
-          <p:cNvPr id="23" name="Text 21"/>
+          <p:cNvPr id="24" name="Text 22"/>
           <p:cNvSpPr txBox="1"/>
           <p:nvPr/>
         </p:nvSpPr>
@@ -36353,7 +36983,7 @@
       </p:sp>
       <p:sp>
         <p:nvSpPr>
-          <p:cNvPr id="24" name="Shape 22"/>
+          <p:cNvPr id="25" name="Shape 23"/>
           <p:cNvSpPr/>
           <p:nvPr/>
         </p:nvSpPr>
@@ -36376,7 +37006,7 @@
       </p:sp>
       <p:sp>
         <p:nvSpPr>
-          <p:cNvPr id="25" name="Text 23"/>
+          <p:cNvPr id="26" name="Text 24"/>
           <p:cNvSpPr txBox="1"/>
           <p:nvPr/>
         </p:nvSpPr>
@@ -36415,7 +37045,7 @@
       </p:sp>
       <p:sp>
         <p:nvSpPr>
-          <p:cNvPr id="26" name="Text 24"/>
+          <p:cNvPr id="27" name="Text 25"/>
           <p:cNvSpPr txBox="1"/>
           <p:nvPr/>
         </p:nvSpPr>
@@ -36454,7 +37084,7 @@
       </p:sp>
       <p:sp>
         <p:nvSpPr>
-          <p:cNvPr id="27" name="Shape 25"/>
+          <p:cNvPr id="28" name="Shape 26"/>
           <p:cNvSpPr/>
           <p:nvPr/>
         </p:nvSpPr>
@@ -36479,7 +37109,7 @@
       </p:sp>
       <p:sp>
         <p:nvSpPr>
-          <p:cNvPr id="28" name="Text 26"/>
+          <p:cNvPr id="29" name="Text 27"/>
           <p:cNvSpPr txBox="1"/>
           <p:nvPr/>
         </p:nvSpPr>
@@ -36518,7 +37148,7 @@
       </p:sp>
       <p:sp>
         <p:nvSpPr>
-          <p:cNvPr id="29" name="Shape 27"/>
+          <p:cNvPr id="30" name="Shape 28"/>
           <p:cNvSpPr/>
           <p:nvPr/>
         </p:nvSpPr>
@@ -36543,7 +37173,7 @@
       </p:sp>
       <p:sp>
         <p:nvSpPr>
-          <p:cNvPr id="30" name="Text 28"/>
+          <p:cNvPr id="31" name="Text 29"/>
           <p:cNvSpPr txBox="1"/>
           <p:nvPr/>
         </p:nvSpPr>
@@ -36582,7 +37212,7 @@
       </p:sp>
       <p:sp>
         <p:nvSpPr>
-          <p:cNvPr id="31" name="Shape 29"/>
+          <p:cNvPr id="32" name="Shape 30"/>
           <p:cNvSpPr/>
           <p:nvPr/>
         </p:nvSpPr>
@@ -36607,7 +37237,7 @@
       </p:sp>
       <p:sp>
         <p:nvSpPr>
-          <p:cNvPr id="32" name="Text 30"/>
+          <p:cNvPr id="33" name="Text 31"/>
           <p:cNvSpPr txBox="1"/>
           <p:nvPr/>
         </p:nvSpPr>
@@ -36646,7 +37276,7 @@
       </p:sp>
       <p:sp>
         <p:nvSpPr>
-          <p:cNvPr id="33" name="Shape 31"/>
+          <p:cNvPr id="34" name="Shape 32"/>
           <p:cNvSpPr/>
           <p:nvPr/>
         </p:nvSpPr>
@@ -36671,7 +37301,7 @@
       </p:sp>
       <p:sp>
         <p:nvSpPr>
-          <p:cNvPr id="34" name="Text 32"/>
+          <p:cNvPr id="35" name="Text 33"/>
           <p:cNvSpPr txBox="1"/>
           <p:nvPr/>
         </p:nvSpPr>
@@ -36710,7 +37340,7 @@
       </p:sp>
       <p:sp>
         <p:nvSpPr>
-          <p:cNvPr id="35" name="Shape 33"/>
+          <p:cNvPr id="36" name="Shape 34"/>
           <p:cNvSpPr/>
           <p:nvPr/>
         </p:nvSpPr>
@@ -36735,7 +37365,7 @@
       </p:sp>
       <p:sp>
         <p:nvSpPr>
-          <p:cNvPr id="36" name="Text 34"/>
+          <p:cNvPr id="37" name="Text 35"/>
           <p:cNvSpPr txBox="1"/>
           <p:nvPr/>
         </p:nvSpPr>
@@ -36774,7 +37404,7 @@
       </p:sp>
       <p:sp>
         <p:nvSpPr>
-          <p:cNvPr id="37" name="Shape 35"/>
+          <p:cNvPr id="38" name="Shape 36"/>
           <p:cNvSpPr/>
           <p:nvPr/>
         </p:nvSpPr>
@@ -36799,7 +37429,7 @@
       </p:sp>
       <p:sp>
         <p:nvSpPr>
-          <p:cNvPr id="38" name="Text 36"/>
+          <p:cNvPr id="39" name="Text 37"/>
           <p:cNvSpPr txBox="1"/>
           <p:nvPr/>
         </p:nvSpPr>
@@ -36838,7 +37468,7 @@
       </p:sp>
       <p:sp>
         <p:nvSpPr>
-          <p:cNvPr id="39" name="Shape 37"/>
+          <p:cNvPr id="40" name="Shape 38"/>
           <p:cNvSpPr/>
           <p:nvPr/>
         </p:nvSpPr>
@@ -36863,7 +37493,7 @@
       </p:sp>
       <p:sp>
         <p:nvSpPr>
-          <p:cNvPr id="40" name="Text 38"/>
+          <p:cNvPr id="41" name="Text 39"/>
           <p:cNvSpPr txBox="1"/>
           <p:nvPr/>
         </p:nvSpPr>
@@ -36902,7 +37532,7 @@
       </p:sp>
       <p:sp>
         <p:nvSpPr>
-          <p:cNvPr id="41" name="Shape 39"/>
+          <p:cNvPr id="42" name="Shape 40"/>
           <p:cNvSpPr/>
           <p:nvPr/>
         </p:nvSpPr>
@@ -36927,7 +37557,7 @@
       </p:sp>
       <p:sp>
         <p:nvSpPr>
-          <p:cNvPr id="42" name="Text 40"/>
+          <p:cNvPr id="43" name="Text 41"/>
           <p:cNvSpPr txBox="1"/>
           <p:nvPr/>
         </p:nvSpPr>
@@ -36966,7 +37596,7 @@
       </p:sp>
       <p:sp>
         <p:nvSpPr>
-          <p:cNvPr id="43" name="Shape 41"/>
+          <p:cNvPr id="44" name="Shape 42"/>
           <p:cNvSpPr/>
           <p:nvPr/>
         </p:nvSpPr>
@@ -36991,7 +37621,7 @@
       </p:sp>
       <p:sp>
         <p:nvSpPr>
-          <p:cNvPr id="44" name="Text 42"/>
+          <p:cNvPr id="45" name="Text 43"/>
           <p:cNvSpPr txBox="1"/>
           <p:nvPr/>
         </p:nvSpPr>
@@ -37030,7 +37660,7 @@
       </p:sp>
       <p:sp>
         <p:nvSpPr>
-          <p:cNvPr id="45" name="Shape 43"/>
+          <p:cNvPr id="46" name="Shape 44"/>
           <p:cNvSpPr/>
           <p:nvPr/>
         </p:nvSpPr>
@@ -37055,7 +37685,7 @@
       </p:sp>
       <p:sp>
         <p:nvSpPr>
-          <p:cNvPr id="46" name="Text 44"/>
+          <p:cNvPr id="47" name="Text 45"/>
           <p:cNvSpPr txBox="1"/>
           <p:nvPr/>
         </p:nvSpPr>
@@ -40841,13 +41471,76 @@
       </p:sp>
       <p:sp>
         <p:nvSpPr>
-          <p:cNvPr id="21" name="Shape 19"/>
+          <p:cNvPr id="21" name="Text 19"/>
+          <p:cNvSpPr txBox="1"/>
+          <p:nvPr/>
+        </p:nvSpPr>
+        <p:spPr>
+          <a:xfrm>
+            <a:off x="502920" y="3383280"/>
+            <a:ext cx="11201400" cy="594360"/>
+          </a:xfrm>
+          <a:prstGeom prst="rect">
+            <a:avLst/>
+          </a:prstGeom>
+          <a:noFill/>
+          <a:ln/>
+        </p:spPr>
+        <p:txBody>
+          <a:bodyPr wrap="square" lIns="0" tIns="0" rIns="0" bIns="0" rtlCol="0" anchor="ctr"/>
+          <a:lstStyle/>
+          <a:p>
+            <a:pPr indent="0" marL="0">
+              <a:lnSpc>
+                <a:spcPct val="110000"/>
+              </a:lnSpc>
+              <a:buNone/>
+            </a:pPr>
+            <a:r>
+              <a:rPr lang="en-US" sz="850" b="1" dirty="0">
+                <a:solidFill>
+                  <a:srgbClr val="8A8A8A"/>
+                </a:solidFill>
+                <a:latin typeface="Consolas" pitchFamily="34" charset="0"/>
+                <a:ea typeface="Consolas" pitchFamily="34" charset="-122"/>
+                <a:cs typeface="Consolas" pitchFamily="34" charset="-120"/>
+              </a:rPr>
+              <a:t>具体例
+</a:t>
+            </a:r>
+            <a:endParaRPr lang="en-US" sz="850" dirty="0"/>
+          </a:p>
+          <a:p>
+            <a:pPr indent="0" marL="0">
+              <a:lnSpc>
+                <a:spcPct val="110000"/>
+              </a:lnSpc>
+              <a:buNone/>
+            </a:pPr>
+            <a:r>
+              <a:rPr lang="en-US" sz="900" dirty="0">
+                <a:solidFill>
+                  <a:srgbClr val="171717"/>
+                </a:solidFill>
+                <a:latin typeface="Yu Gothic" pitchFamily="34" charset="0"/>
+                <a:ea typeface="Yu Gothic" pitchFamily="34" charset="-122"/>
+                <a:cs typeface="Yu Gothic" pitchFamily="34" charset="-120"/>
+              </a:rPr>
+              <a:t>家電メーカーA社が製造した電気ケトルの製造工程での不具合（製造上の欠陥）が原因で発火し、利用者が火傷を負った場合、利用者はPL法に基づきA社の過失を証明しなくても損害賠償を請求できる。生命・身体への損害なので、損害と賠償義務者を知った時から5年間、この請求権は存続する。</a:t>
+            </a:r>
+            <a:endParaRPr lang="en-US" sz="850" dirty="0"/>
+          </a:p>
+        </p:txBody>
+      </p:sp>
+      <p:sp>
+        <p:nvSpPr>
+          <p:cNvPr id="22" name="Shape 20"/>
           <p:cNvSpPr/>
           <p:nvPr/>
         </p:nvSpPr>
         <p:spPr>
           <a:xfrm>
-            <a:off x="502920" y="3401568"/>
+            <a:off x="502920" y="4023360"/>
             <a:ext cx="11201400" cy="0"/>
           </a:xfrm>
           <a:prstGeom prst="line">
@@ -40864,13 +41557,13 @@
       </p:sp>
       <p:sp>
         <p:nvSpPr>
-          <p:cNvPr id="22" name="Text 20"/>
-          <p:cNvSpPr txBox="1"/>
-          <p:nvPr/>
-        </p:nvSpPr>
-        <p:spPr>
-          <a:xfrm>
-            <a:off x="502920" y="3474720"/>
+          <p:cNvPr id="23" name="Text 21"/>
+          <p:cNvSpPr txBox="1"/>
+          <p:nvPr/>
+        </p:nvSpPr>
+        <p:spPr>
+          <a:xfrm>
+            <a:off x="502920" y="4096512"/>
             <a:ext cx="11201400" cy="457200"/>
           </a:xfrm>
           <a:prstGeom prst="rect">
@@ -40923,7 +41616,7 @@
       </p:sp>
       <p:sp>
         <p:nvSpPr>
-          <p:cNvPr id="23" name="Shape 21"/>
+          <p:cNvPr id="24" name="Shape 22"/>
           <p:cNvSpPr/>
           <p:nvPr/>
         </p:nvSpPr>
@@ -40946,7 +41639,7 @@
       </p:sp>
       <p:sp>
         <p:nvSpPr>
-          <p:cNvPr id="24" name="Shape 22"/>
+          <p:cNvPr id="25" name="Shape 23"/>
           <p:cNvSpPr/>
           <p:nvPr/>
         </p:nvSpPr>
@@ -40966,7 +41659,7 @@
       </p:sp>
       <p:sp>
         <p:nvSpPr>
-          <p:cNvPr id="25" name="Text 23"/>
+          <p:cNvPr id="26" name="Text 24"/>
           <p:cNvSpPr txBox="1"/>
           <p:nvPr/>
         </p:nvSpPr>
@@ -41005,7 +41698,7 @@
       </p:sp>
       <p:sp>
         <p:nvSpPr>
-          <p:cNvPr id="26" name="Text 24"/>
+          <p:cNvPr id="27" name="Text 25"/>
           <p:cNvSpPr txBox="1"/>
           <p:nvPr/>
         </p:nvSpPr>
@@ -41044,7 +41737,7 @@
       </p:sp>
       <p:sp>
         <p:nvSpPr>
-          <p:cNvPr id="27" name="Shape 25"/>
+          <p:cNvPr id="28" name="Shape 26"/>
           <p:cNvSpPr/>
           <p:nvPr/>
         </p:nvSpPr>
@@ -41067,7 +41760,7 @@
       </p:sp>
       <p:sp>
         <p:nvSpPr>
-          <p:cNvPr id="28" name="Text 26"/>
+          <p:cNvPr id="29" name="Text 27"/>
           <p:cNvSpPr txBox="1"/>
           <p:nvPr/>
         </p:nvSpPr>
@@ -41106,7 +41799,7 @@
       </p:sp>
       <p:sp>
         <p:nvSpPr>
-          <p:cNvPr id="29" name="Text 27"/>
+          <p:cNvPr id="30" name="Text 28"/>
           <p:cNvSpPr txBox="1"/>
           <p:nvPr/>
         </p:nvSpPr>
@@ -41145,7 +41838,7 @@
       </p:sp>
       <p:sp>
         <p:nvSpPr>
-          <p:cNvPr id="30" name="Shape 28"/>
+          <p:cNvPr id="31" name="Shape 29"/>
           <p:cNvSpPr/>
           <p:nvPr/>
         </p:nvSpPr>
@@ -41170,7 +41863,7 @@
       </p:sp>
       <p:sp>
         <p:nvSpPr>
-          <p:cNvPr id="31" name="Text 29"/>
+          <p:cNvPr id="32" name="Text 30"/>
           <p:cNvSpPr txBox="1"/>
           <p:nvPr/>
         </p:nvSpPr>
@@ -41209,7 +41902,7 @@
       </p:sp>
       <p:sp>
         <p:nvSpPr>
-          <p:cNvPr id="32" name="Shape 30"/>
+          <p:cNvPr id="33" name="Shape 31"/>
           <p:cNvSpPr/>
           <p:nvPr/>
         </p:nvSpPr>
@@ -41234,7 +41927,7 @@
       </p:sp>
       <p:sp>
         <p:nvSpPr>
-          <p:cNvPr id="33" name="Text 31"/>
+          <p:cNvPr id="34" name="Text 32"/>
           <p:cNvSpPr txBox="1"/>
           <p:nvPr/>
         </p:nvSpPr>
@@ -41273,7 +41966,7 @@
       </p:sp>
       <p:sp>
         <p:nvSpPr>
-          <p:cNvPr id="34" name="Shape 32"/>
+          <p:cNvPr id="35" name="Shape 33"/>
           <p:cNvSpPr/>
           <p:nvPr/>
         </p:nvSpPr>
@@ -41298,7 +41991,7 @@
       </p:sp>
       <p:sp>
         <p:nvSpPr>
-          <p:cNvPr id="35" name="Text 33"/>
+          <p:cNvPr id="36" name="Text 34"/>
           <p:cNvSpPr txBox="1"/>
           <p:nvPr/>
         </p:nvSpPr>
@@ -41337,7 +42030,7 @@
       </p:sp>
       <p:sp>
         <p:nvSpPr>
-          <p:cNvPr id="36" name="Shape 34"/>
+          <p:cNvPr id="37" name="Shape 35"/>
           <p:cNvSpPr/>
           <p:nvPr/>
         </p:nvSpPr>
@@ -41362,7 +42055,7 @@
       </p:sp>
       <p:sp>
         <p:nvSpPr>
-          <p:cNvPr id="37" name="Text 35"/>
+          <p:cNvPr id="38" name="Text 36"/>
           <p:cNvSpPr txBox="1"/>
           <p:nvPr/>
         </p:nvSpPr>
@@ -41401,7 +42094,7 @@
       </p:sp>
       <p:sp>
         <p:nvSpPr>
-          <p:cNvPr id="38" name="Shape 36"/>
+          <p:cNvPr id="39" name="Shape 37"/>
           <p:cNvSpPr/>
           <p:nvPr/>
         </p:nvSpPr>
@@ -41426,7 +42119,7 @@
       </p:sp>
       <p:sp>
         <p:nvSpPr>
-          <p:cNvPr id="39" name="Text 37"/>
+          <p:cNvPr id="40" name="Text 38"/>
           <p:cNvSpPr txBox="1"/>
           <p:nvPr/>
         </p:nvSpPr>
@@ -41465,7 +42158,7 @@
       </p:sp>
       <p:sp>
         <p:nvSpPr>
-          <p:cNvPr id="40" name="Shape 38"/>
+          <p:cNvPr id="41" name="Shape 39"/>
           <p:cNvSpPr/>
           <p:nvPr/>
         </p:nvSpPr>
@@ -41490,7 +42183,7 @@
       </p:sp>
       <p:sp>
         <p:nvSpPr>
-          <p:cNvPr id="41" name="Text 39"/>
+          <p:cNvPr id="42" name="Text 40"/>
           <p:cNvSpPr txBox="1"/>
           <p:nvPr/>
         </p:nvSpPr>
@@ -41529,7 +42222,7 @@
       </p:sp>
       <p:sp>
         <p:nvSpPr>
-          <p:cNvPr id="42" name="Shape 40"/>
+          <p:cNvPr id="43" name="Shape 41"/>
           <p:cNvSpPr/>
           <p:nvPr/>
         </p:nvSpPr>
@@ -41554,7 +42247,7 @@
       </p:sp>
       <p:sp>
         <p:nvSpPr>
-          <p:cNvPr id="43" name="Text 41"/>
+          <p:cNvPr id="44" name="Text 42"/>
           <p:cNvSpPr txBox="1"/>
           <p:nvPr/>
         </p:nvSpPr>
@@ -41593,7 +42286,7 @@
       </p:sp>
       <p:sp>
         <p:nvSpPr>
-          <p:cNvPr id="44" name="Shape 42"/>
+          <p:cNvPr id="45" name="Shape 43"/>
           <p:cNvSpPr/>
           <p:nvPr/>
         </p:nvSpPr>
@@ -41618,7 +42311,7 @@
       </p:sp>
       <p:sp>
         <p:nvSpPr>
-          <p:cNvPr id="45" name="Text 43"/>
+          <p:cNvPr id="46" name="Text 44"/>
           <p:cNvSpPr txBox="1"/>
           <p:nvPr/>
         </p:nvSpPr>
@@ -41657,7 +42350,7 @@
       </p:sp>
       <p:sp>
         <p:nvSpPr>
-          <p:cNvPr id="46" name="Shape 44"/>
+          <p:cNvPr id="47" name="Shape 45"/>
           <p:cNvSpPr/>
           <p:nvPr/>
         </p:nvSpPr>
@@ -41682,7 +42375,7 @@
       </p:sp>
       <p:sp>
         <p:nvSpPr>
-          <p:cNvPr id="47" name="Text 45"/>
+          <p:cNvPr id="48" name="Text 46"/>
           <p:cNvSpPr txBox="1"/>
           <p:nvPr/>
         </p:nvSpPr>
@@ -41721,7 +42414,7 @@
       </p:sp>
       <p:sp>
         <p:nvSpPr>
-          <p:cNvPr id="48" name="Shape 46"/>
+          <p:cNvPr id="49" name="Shape 47"/>
           <p:cNvSpPr/>
           <p:nvPr/>
         </p:nvSpPr>
@@ -41746,7 +42439,7 @@
       </p:sp>
       <p:sp>
         <p:nvSpPr>
-          <p:cNvPr id="49" name="Text 47"/>
+          <p:cNvPr id="50" name="Text 48"/>
           <p:cNvSpPr txBox="1"/>
           <p:nvPr/>
         </p:nvSpPr>
@@ -44293,13 +44986,76 @@
       </p:sp>
       <p:sp>
         <p:nvSpPr>
-          <p:cNvPr id="18" name="Shape 16"/>
+          <p:cNvPr id="18" name="Text 16"/>
+          <p:cNvSpPr txBox="1"/>
+          <p:nvPr/>
+        </p:nvSpPr>
+        <p:spPr>
+          <a:xfrm>
+            <a:off x="502920" y="3392424"/>
+            <a:ext cx="11201400" cy="640080"/>
+          </a:xfrm>
+          <a:prstGeom prst="rect">
+            <a:avLst/>
+          </a:prstGeom>
+          <a:noFill/>
+          <a:ln/>
+        </p:spPr>
+        <p:txBody>
+          <a:bodyPr wrap="square" lIns="0" tIns="0" rIns="0" bIns="0" rtlCol="0" anchor="ctr"/>
+          <a:lstStyle/>
+          <a:p>
+            <a:pPr indent="0" marL="0">
+              <a:lnSpc>
+                <a:spcPct val="120000"/>
+              </a:lnSpc>
+              <a:buNone/>
+            </a:pPr>
+            <a:r>
+              <a:rPr lang="en-US" sz="850" b="1" dirty="0">
+                <a:solidFill>
+                  <a:srgbClr val="8A8A8A"/>
+                </a:solidFill>
+                <a:latin typeface="Consolas" pitchFamily="34" charset="0"/>
+                <a:ea typeface="Consolas" pitchFamily="34" charset="-122"/>
+                <a:cs typeface="Consolas" pitchFamily="34" charset="-120"/>
+              </a:rPr>
+              <a:t>具体例
+</a:t>
+            </a:r>
+            <a:endParaRPr lang="en-US" sz="850" dirty="0"/>
+          </a:p>
+          <a:p>
+            <a:pPr indent="0" marL="0">
+              <a:lnSpc>
+                <a:spcPct val="120000"/>
+              </a:lnSpc>
+              <a:buNone/>
+            </a:pPr>
+            <a:r>
+              <a:rPr lang="en-US" sz="950" dirty="0">
+                <a:solidFill>
+                  <a:srgbClr val="171717"/>
+                </a:solidFill>
+                <a:latin typeface="Yu Gothic" pitchFamily="34" charset="0"/>
+                <a:ea typeface="Yu Gothic" pitchFamily="34" charset="-122"/>
+                <a:cs typeface="Yu Gothic" pitchFamily="34" charset="-120"/>
+              </a:rPr>
+              <a:t>IT系の受託開発を手がけるベンチャー企業を3名の発起人で設立する場合、定款に「目的：ソフトウェアの企画・開発及び販売」「商号」等の絶対的記載事項を記載し公証人の認証を受けた後、出資金の払込み・設立時取締役の選任を経て法務局で設立登記を行えば会社が成立する。</a:t>
+            </a:r>
+            <a:endParaRPr lang="en-US" sz="850" dirty="0"/>
+          </a:p>
+        </p:txBody>
+      </p:sp>
+      <p:sp>
+        <p:nvSpPr>
+          <p:cNvPr id="19" name="Shape 17"/>
           <p:cNvSpPr/>
           <p:nvPr/>
         </p:nvSpPr>
         <p:spPr>
           <a:xfrm>
-            <a:off x="502920" y="3410712"/>
+            <a:off x="502920" y="4078224"/>
             <a:ext cx="11201400" cy="0"/>
           </a:xfrm>
           <a:prstGeom prst="line">
@@ -44316,13 +45072,13 @@
       </p:sp>
       <p:sp>
         <p:nvSpPr>
-          <p:cNvPr id="19" name="Text 17"/>
-          <p:cNvSpPr txBox="1"/>
-          <p:nvPr/>
-        </p:nvSpPr>
-        <p:spPr>
-          <a:xfrm>
-            <a:off x="502920" y="3483864"/>
+          <p:cNvPr id="20" name="Text 18"/>
+          <p:cNvSpPr txBox="1"/>
+          <p:nvPr/>
+        </p:nvSpPr>
+        <p:spPr>
+          <a:xfrm>
+            <a:off x="502920" y="4151376"/>
             <a:ext cx="11201400" cy="457200"/>
           </a:xfrm>
           <a:prstGeom prst="rect">
@@ -44375,7 +45131,7 @@
       </p:sp>
       <p:sp>
         <p:nvSpPr>
-          <p:cNvPr id="20" name="Shape 18"/>
+          <p:cNvPr id="21" name="Shape 19"/>
           <p:cNvSpPr/>
           <p:nvPr/>
         </p:nvSpPr>
@@ -44398,7 +45154,7 @@
       </p:sp>
       <p:sp>
         <p:nvSpPr>
-          <p:cNvPr id="21" name="Shape 19"/>
+          <p:cNvPr id="22" name="Shape 20"/>
           <p:cNvSpPr/>
           <p:nvPr/>
         </p:nvSpPr>
@@ -44418,7 +45174,7 @@
       </p:sp>
       <p:sp>
         <p:nvSpPr>
-          <p:cNvPr id="22" name="Text 20"/>
+          <p:cNvPr id="23" name="Text 21"/>
           <p:cNvSpPr txBox="1"/>
           <p:nvPr/>
         </p:nvSpPr>
@@ -44457,7 +45213,7 @@
       </p:sp>
       <p:sp>
         <p:nvSpPr>
-          <p:cNvPr id="23" name="Text 21"/>
+          <p:cNvPr id="24" name="Text 22"/>
           <p:cNvSpPr txBox="1"/>
           <p:nvPr/>
         </p:nvSpPr>
@@ -44496,7 +45252,7 @@
       </p:sp>
       <p:sp>
         <p:nvSpPr>
-          <p:cNvPr id="24" name="Shape 22"/>
+          <p:cNvPr id="25" name="Shape 23"/>
           <p:cNvSpPr/>
           <p:nvPr/>
         </p:nvSpPr>
@@ -44519,7 +45275,7 @@
       </p:sp>
       <p:sp>
         <p:nvSpPr>
-          <p:cNvPr id="25" name="Text 23"/>
+          <p:cNvPr id="26" name="Text 24"/>
           <p:cNvSpPr txBox="1"/>
           <p:nvPr/>
         </p:nvSpPr>
@@ -44558,7 +45314,7 @@
       </p:sp>
       <p:sp>
         <p:nvSpPr>
-          <p:cNvPr id="26" name="Text 24"/>
+          <p:cNvPr id="27" name="Text 25"/>
           <p:cNvSpPr txBox="1"/>
           <p:nvPr/>
         </p:nvSpPr>
@@ -44597,7 +45353,7 @@
       </p:sp>
       <p:sp>
         <p:nvSpPr>
-          <p:cNvPr id="27" name="Shape 25"/>
+          <p:cNvPr id="28" name="Shape 26"/>
           <p:cNvSpPr/>
           <p:nvPr/>
         </p:nvSpPr>
@@ -44622,7 +45378,7 @@
       </p:sp>
       <p:sp>
         <p:nvSpPr>
-          <p:cNvPr id="28" name="Text 26"/>
+          <p:cNvPr id="29" name="Text 27"/>
           <p:cNvSpPr txBox="1"/>
           <p:nvPr/>
         </p:nvSpPr>
@@ -44661,7 +45417,7 @@
       </p:sp>
       <p:sp>
         <p:nvSpPr>
-          <p:cNvPr id="29" name="Shape 27"/>
+          <p:cNvPr id="30" name="Shape 28"/>
           <p:cNvSpPr/>
           <p:nvPr/>
         </p:nvSpPr>
@@ -44686,7 +45442,7 @@
       </p:sp>
       <p:sp>
         <p:nvSpPr>
-          <p:cNvPr id="30" name="Text 28"/>
+          <p:cNvPr id="31" name="Text 29"/>
           <p:cNvSpPr txBox="1"/>
           <p:nvPr/>
         </p:nvSpPr>
@@ -44725,7 +45481,7 @@
       </p:sp>
       <p:sp>
         <p:nvSpPr>
-          <p:cNvPr id="31" name="Shape 29"/>
+          <p:cNvPr id="32" name="Shape 30"/>
           <p:cNvSpPr/>
           <p:nvPr/>
         </p:nvSpPr>
@@ -44750,7 +45506,7 @@
       </p:sp>
       <p:sp>
         <p:nvSpPr>
-          <p:cNvPr id="32" name="Text 30"/>
+          <p:cNvPr id="33" name="Text 31"/>
           <p:cNvSpPr txBox="1"/>
           <p:nvPr/>
         </p:nvSpPr>
@@ -44789,7 +45545,7 @@
       </p:sp>
       <p:sp>
         <p:nvSpPr>
-          <p:cNvPr id="33" name="Shape 31"/>
+          <p:cNvPr id="34" name="Shape 32"/>
           <p:cNvSpPr/>
           <p:nvPr/>
         </p:nvSpPr>
@@ -44814,7 +45570,7 @@
       </p:sp>
       <p:sp>
         <p:nvSpPr>
-          <p:cNvPr id="34" name="Text 32"/>
+          <p:cNvPr id="35" name="Text 33"/>
           <p:cNvSpPr txBox="1"/>
           <p:nvPr/>
         </p:nvSpPr>
@@ -44853,7 +45609,7 @@
       </p:sp>
       <p:sp>
         <p:nvSpPr>
-          <p:cNvPr id="35" name="Shape 33"/>
+          <p:cNvPr id="36" name="Shape 34"/>
           <p:cNvSpPr/>
           <p:nvPr/>
         </p:nvSpPr>
@@ -44878,7 +45634,7 @@
       </p:sp>
       <p:sp>
         <p:nvSpPr>
-          <p:cNvPr id="36" name="Text 34"/>
+          <p:cNvPr id="37" name="Text 35"/>
           <p:cNvSpPr txBox="1"/>
           <p:nvPr/>
         </p:nvSpPr>
@@ -44917,7 +45673,7 @@
       </p:sp>
       <p:sp>
         <p:nvSpPr>
-          <p:cNvPr id="37" name="Shape 35"/>
+          <p:cNvPr id="38" name="Shape 36"/>
           <p:cNvSpPr/>
           <p:nvPr/>
         </p:nvSpPr>
@@ -44942,7 +45698,7 @@
       </p:sp>
       <p:sp>
         <p:nvSpPr>
-          <p:cNvPr id="38" name="Text 36"/>
+          <p:cNvPr id="39" name="Text 37"/>
           <p:cNvSpPr txBox="1"/>
           <p:nvPr/>
         </p:nvSpPr>
@@ -44981,7 +45737,7 @@
       </p:sp>
       <p:sp>
         <p:nvSpPr>
-          <p:cNvPr id="39" name="Shape 37"/>
+          <p:cNvPr id="40" name="Shape 38"/>
           <p:cNvSpPr/>
           <p:nvPr/>
         </p:nvSpPr>
@@ -45006,7 +45762,7 @@
       </p:sp>
       <p:sp>
         <p:nvSpPr>
-          <p:cNvPr id="40" name="Text 38"/>
+          <p:cNvPr id="41" name="Text 39"/>
           <p:cNvSpPr txBox="1"/>
           <p:nvPr/>
         </p:nvSpPr>
@@ -45045,7 +45801,7 @@
       </p:sp>
       <p:sp>
         <p:nvSpPr>
-          <p:cNvPr id="41" name="Shape 39"/>
+          <p:cNvPr id="42" name="Shape 40"/>
           <p:cNvSpPr/>
           <p:nvPr/>
         </p:nvSpPr>
@@ -45070,7 +45826,7 @@
       </p:sp>
       <p:sp>
         <p:nvSpPr>
-          <p:cNvPr id="42" name="Text 40"/>
+          <p:cNvPr id="43" name="Text 41"/>
           <p:cNvSpPr txBox="1"/>
           <p:nvPr/>
         </p:nvSpPr>
@@ -45109,7 +45865,7 @@
       </p:sp>
       <p:sp>
         <p:nvSpPr>
-          <p:cNvPr id="43" name="Shape 41"/>
+          <p:cNvPr id="44" name="Shape 42"/>
           <p:cNvSpPr/>
           <p:nvPr/>
         </p:nvSpPr>
@@ -45134,7 +45890,7 @@
       </p:sp>
       <p:sp>
         <p:nvSpPr>
-          <p:cNvPr id="44" name="Text 42"/>
+          <p:cNvPr id="45" name="Text 43"/>
           <p:cNvSpPr txBox="1"/>
           <p:nvPr/>
         </p:nvSpPr>
@@ -45173,7 +45929,7 @@
       </p:sp>
       <p:sp>
         <p:nvSpPr>
-          <p:cNvPr id="45" name="Shape 43"/>
+          <p:cNvPr id="46" name="Shape 44"/>
           <p:cNvSpPr/>
           <p:nvPr/>
         </p:nvSpPr>
@@ -45198,7 +45954,7 @@
       </p:sp>
       <p:sp>
         <p:nvSpPr>
-          <p:cNvPr id="46" name="Text 44"/>
+          <p:cNvPr id="47" name="Text 45"/>
           <p:cNvSpPr txBox="1"/>
           <p:nvPr/>
         </p:nvSpPr>
@@ -45712,13 +46468,76 @@
       </p:sp>
       <p:sp>
         <p:nvSpPr>
-          <p:cNvPr id="15" name="Shape 13"/>
+          <p:cNvPr id="15" name="Text 13"/>
+          <p:cNvSpPr txBox="1"/>
+          <p:nvPr/>
+        </p:nvSpPr>
+        <p:spPr>
+          <a:xfrm>
+            <a:off x="502920" y="3118104"/>
+            <a:ext cx="11201400" cy="640080"/>
+          </a:xfrm>
+          <a:prstGeom prst="rect">
+            <a:avLst/>
+          </a:prstGeom>
+          <a:noFill/>
+          <a:ln/>
+        </p:spPr>
+        <p:txBody>
+          <a:bodyPr wrap="square" lIns="0" tIns="0" rIns="0" bIns="0" rtlCol="0" anchor="ctr"/>
+          <a:lstStyle/>
+          <a:p>
+            <a:pPr indent="0" marL="0">
+              <a:lnSpc>
+                <a:spcPct val="120000"/>
+              </a:lnSpc>
+              <a:buNone/>
+            </a:pPr>
+            <a:r>
+              <a:rPr lang="en-US" sz="850" b="1" dirty="0">
+                <a:solidFill>
+                  <a:srgbClr val="8A8A8A"/>
+                </a:solidFill>
+                <a:latin typeface="Consolas" pitchFamily="34" charset="0"/>
+                <a:ea typeface="Consolas" pitchFamily="34" charset="-122"/>
+                <a:cs typeface="Consolas" pitchFamily="34" charset="-120"/>
+              </a:rPr>
+              <a:t>具体例
+</a:t>
+            </a:r>
+            <a:endParaRPr lang="en-US" sz="850" dirty="0"/>
+          </a:p>
+          <a:p>
+            <a:pPr indent="0" marL="0">
+              <a:lnSpc>
+                <a:spcPct val="120000"/>
+              </a:lnSpc>
+              <a:buNone/>
+            </a:pPr>
+            <a:r>
+              <a:rPr lang="en-US" sz="950" dirty="0">
+                <a:solidFill>
+                  <a:srgbClr val="171717"/>
+                </a:solidFill>
+                <a:latin typeface="Yu Gothic" pitchFamily="34" charset="0"/>
+                <a:ea typeface="Yu Gothic" pitchFamily="34" charset="-122"/>
+                <a:cs typeface="Yu Gothic" pitchFamily="34" charset="-120"/>
+              </a:rPr>
+              <a:t>日本企業A社がアメリカ企業と国際物品売買契約を結ぶ際、契約書に準拠法条項を明記していないと、両国がともにウィーン売買条約の加盟国であれば同条約が適用される可能性がある。実務上はこうした不確実性を避けるため、契約書で準拠法や条約の適用排除を明記することが一般的。</a:t>
+            </a:r>
+            <a:endParaRPr lang="en-US" sz="850" dirty="0"/>
+          </a:p>
+        </p:txBody>
+      </p:sp>
+      <p:sp>
+        <p:nvSpPr>
+          <p:cNvPr id="16" name="Shape 14"/>
           <p:cNvSpPr/>
           <p:nvPr/>
         </p:nvSpPr>
         <p:spPr>
           <a:xfrm>
-            <a:off x="502920" y="3136392"/>
+            <a:off x="502920" y="3803904"/>
             <a:ext cx="11201400" cy="0"/>
           </a:xfrm>
           <a:prstGeom prst="line">
@@ -45735,13 +46554,13 @@
       </p:sp>
       <p:sp>
         <p:nvSpPr>
-          <p:cNvPr id="16" name="Text 14"/>
-          <p:cNvSpPr txBox="1"/>
-          <p:nvPr/>
-        </p:nvSpPr>
-        <p:spPr>
-          <a:xfrm>
-            <a:off x="502920" y="3209544"/>
+          <p:cNvPr id="17" name="Text 15"/>
+          <p:cNvSpPr txBox="1"/>
+          <p:nvPr/>
+        </p:nvSpPr>
+        <p:spPr>
+          <a:xfrm>
+            <a:off x="502920" y="3877056"/>
             <a:ext cx="11201400" cy="457200"/>
           </a:xfrm>
           <a:prstGeom prst="rect">
@@ -45794,7 +46613,7 @@
       </p:sp>
       <p:sp>
         <p:nvSpPr>
-          <p:cNvPr id="17" name="Shape 15"/>
+          <p:cNvPr id="18" name="Shape 16"/>
           <p:cNvSpPr/>
           <p:nvPr/>
         </p:nvSpPr>
@@ -45817,7 +46636,7 @@
       </p:sp>
       <p:sp>
         <p:nvSpPr>
-          <p:cNvPr id="18" name="Shape 16"/>
+          <p:cNvPr id="19" name="Shape 17"/>
           <p:cNvSpPr/>
           <p:nvPr/>
         </p:nvSpPr>
@@ -45837,7 +46656,7 @@
       </p:sp>
       <p:sp>
         <p:nvSpPr>
-          <p:cNvPr id="19" name="Text 17"/>
+          <p:cNvPr id="20" name="Text 18"/>
           <p:cNvSpPr txBox="1"/>
           <p:nvPr/>
         </p:nvSpPr>
@@ -45876,7 +46695,7 @@
       </p:sp>
       <p:sp>
         <p:nvSpPr>
-          <p:cNvPr id="20" name="Text 18"/>
+          <p:cNvPr id="21" name="Text 19"/>
           <p:cNvSpPr txBox="1"/>
           <p:nvPr/>
         </p:nvSpPr>
@@ -45915,7 +46734,7 @@
       </p:sp>
       <p:sp>
         <p:nvSpPr>
-          <p:cNvPr id="21" name="Shape 19"/>
+          <p:cNvPr id="22" name="Shape 20"/>
           <p:cNvSpPr/>
           <p:nvPr/>
         </p:nvSpPr>
@@ -45938,7 +46757,7 @@
       </p:sp>
       <p:sp>
         <p:nvSpPr>
-          <p:cNvPr id="22" name="Text 20"/>
+          <p:cNvPr id="23" name="Text 21"/>
           <p:cNvSpPr txBox="1"/>
           <p:nvPr/>
         </p:nvSpPr>
@@ -45977,7 +46796,7 @@
       </p:sp>
       <p:sp>
         <p:nvSpPr>
-          <p:cNvPr id="23" name="Text 21"/>
+          <p:cNvPr id="24" name="Text 22"/>
           <p:cNvSpPr txBox="1"/>
           <p:nvPr/>
         </p:nvSpPr>
@@ -46016,7 +46835,7 @@
       </p:sp>
       <p:sp>
         <p:nvSpPr>
-          <p:cNvPr id="24" name="Shape 22"/>
+          <p:cNvPr id="25" name="Shape 23"/>
           <p:cNvSpPr/>
           <p:nvPr/>
         </p:nvSpPr>
@@ -46041,7 +46860,7 @@
       </p:sp>
       <p:sp>
         <p:nvSpPr>
-          <p:cNvPr id="25" name="Text 23"/>
+          <p:cNvPr id="26" name="Text 24"/>
           <p:cNvSpPr txBox="1"/>
           <p:nvPr/>
         </p:nvSpPr>
@@ -46080,7 +46899,7 @@
       </p:sp>
       <p:sp>
         <p:nvSpPr>
-          <p:cNvPr id="26" name="Shape 24"/>
+          <p:cNvPr id="27" name="Shape 25"/>
           <p:cNvSpPr/>
           <p:nvPr/>
         </p:nvSpPr>
@@ -46105,7 +46924,7 @@
       </p:sp>
       <p:sp>
         <p:nvSpPr>
-          <p:cNvPr id="27" name="Text 25"/>
+          <p:cNvPr id="28" name="Text 26"/>
           <p:cNvSpPr txBox="1"/>
           <p:nvPr/>
         </p:nvSpPr>
@@ -46144,7 +46963,7 @@
       </p:sp>
       <p:sp>
         <p:nvSpPr>
-          <p:cNvPr id="28" name="Shape 26"/>
+          <p:cNvPr id="29" name="Shape 27"/>
           <p:cNvSpPr/>
           <p:nvPr/>
         </p:nvSpPr>
@@ -46169,7 +46988,7 @@
       </p:sp>
       <p:sp>
         <p:nvSpPr>
-          <p:cNvPr id="29" name="Text 27"/>
+          <p:cNvPr id="30" name="Text 28"/>
           <p:cNvSpPr txBox="1"/>
           <p:nvPr/>
         </p:nvSpPr>
@@ -46208,7 +47027,7 @@
       </p:sp>
       <p:sp>
         <p:nvSpPr>
-          <p:cNvPr id="30" name="Shape 28"/>
+          <p:cNvPr id="31" name="Shape 29"/>
           <p:cNvSpPr/>
           <p:nvPr/>
         </p:nvSpPr>
@@ -46233,7 +47052,7 @@
       </p:sp>
       <p:sp>
         <p:nvSpPr>
-          <p:cNvPr id="31" name="Text 29"/>
+          <p:cNvPr id="32" name="Text 30"/>
           <p:cNvSpPr txBox="1"/>
           <p:nvPr/>
         </p:nvSpPr>
@@ -46272,7 +47091,7 @@
       </p:sp>
       <p:sp>
         <p:nvSpPr>
-          <p:cNvPr id="32" name="Shape 30"/>
+          <p:cNvPr id="33" name="Shape 31"/>
           <p:cNvSpPr/>
           <p:nvPr/>
         </p:nvSpPr>
@@ -46297,7 +47116,7 @@
       </p:sp>
       <p:sp>
         <p:nvSpPr>
-          <p:cNvPr id="33" name="Text 31"/>
+          <p:cNvPr id="34" name="Text 32"/>
           <p:cNvSpPr txBox="1"/>
           <p:nvPr/>
         </p:nvSpPr>
@@ -46336,7 +47155,7 @@
       </p:sp>
       <p:sp>
         <p:nvSpPr>
-          <p:cNvPr id="34" name="Shape 32"/>
+          <p:cNvPr id="35" name="Shape 33"/>
           <p:cNvSpPr/>
           <p:nvPr/>
         </p:nvSpPr>
@@ -46361,7 +47180,7 @@
       </p:sp>
       <p:sp>
         <p:nvSpPr>
-          <p:cNvPr id="35" name="Text 33"/>
+          <p:cNvPr id="36" name="Text 34"/>
           <p:cNvSpPr txBox="1"/>
           <p:nvPr/>
         </p:nvSpPr>
@@ -46400,7 +47219,7 @@
       </p:sp>
       <p:sp>
         <p:nvSpPr>
-          <p:cNvPr id="36" name="Shape 34"/>
+          <p:cNvPr id="37" name="Shape 35"/>
           <p:cNvSpPr/>
           <p:nvPr/>
         </p:nvSpPr>
@@ -46425,7 +47244,7 @@
       </p:sp>
       <p:sp>
         <p:nvSpPr>
-          <p:cNvPr id="37" name="Text 35"/>
+          <p:cNvPr id="38" name="Text 36"/>
           <p:cNvSpPr txBox="1"/>
           <p:nvPr/>
         </p:nvSpPr>
@@ -46464,7 +47283,7 @@
       </p:sp>
       <p:sp>
         <p:nvSpPr>
-          <p:cNvPr id="38" name="Shape 36"/>
+          <p:cNvPr id="39" name="Shape 37"/>
           <p:cNvSpPr/>
           <p:nvPr/>
         </p:nvSpPr>
@@ -46489,7 +47308,7 @@
       </p:sp>
       <p:sp>
         <p:nvSpPr>
-          <p:cNvPr id="39" name="Text 37"/>
+          <p:cNvPr id="40" name="Text 38"/>
           <p:cNvSpPr txBox="1"/>
           <p:nvPr/>
         </p:nvSpPr>
@@ -46528,7 +47347,7 @@
       </p:sp>
       <p:sp>
         <p:nvSpPr>
-          <p:cNvPr id="40" name="Shape 38"/>
+          <p:cNvPr id="41" name="Shape 39"/>
           <p:cNvSpPr/>
           <p:nvPr/>
         </p:nvSpPr>
@@ -46553,7 +47372,7 @@
       </p:sp>
       <p:sp>
         <p:nvSpPr>
-          <p:cNvPr id="41" name="Text 39"/>
+          <p:cNvPr id="42" name="Text 40"/>
           <p:cNvSpPr txBox="1"/>
           <p:nvPr/>
         </p:nvSpPr>
@@ -46592,7 +47411,7 @@
       </p:sp>
       <p:sp>
         <p:nvSpPr>
-          <p:cNvPr id="42" name="Shape 40"/>
+          <p:cNvPr id="43" name="Shape 41"/>
           <p:cNvSpPr/>
           <p:nvPr/>
         </p:nvSpPr>
@@ -46617,7 +47436,7 @@
       </p:sp>
       <p:sp>
         <p:nvSpPr>
-          <p:cNvPr id="43" name="Text 41"/>
+          <p:cNvPr id="44" name="Text 42"/>
           <p:cNvSpPr txBox="1"/>
           <p:nvPr/>
         </p:nvSpPr>
@@ -47232,13 +48051,76 @@
       </p:sp>
       <p:sp>
         <p:nvSpPr>
-          <p:cNvPr id="18" name="Shape 16"/>
+          <p:cNvPr id="18" name="Text 16"/>
+          <p:cNvSpPr txBox="1"/>
+          <p:nvPr/>
+        </p:nvSpPr>
+        <p:spPr>
+          <a:xfrm>
+            <a:off x="502920" y="3392424"/>
+            <a:ext cx="11201400" cy="640080"/>
+          </a:xfrm>
+          <a:prstGeom prst="rect">
+            <a:avLst/>
+          </a:prstGeom>
+          <a:noFill/>
+          <a:ln/>
+        </p:spPr>
+        <p:txBody>
+          <a:bodyPr wrap="square" lIns="0" tIns="0" rIns="0" bIns="0" rtlCol="0" anchor="ctr"/>
+          <a:lstStyle/>
+          <a:p>
+            <a:pPr indent="0" marL="0">
+              <a:lnSpc>
+                <a:spcPct val="115000"/>
+              </a:lnSpc>
+              <a:buNone/>
+            </a:pPr>
+            <a:r>
+              <a:rPr lang="en-US" sz="850" b="1" dirty="0">
+                <a:solidFill>
+                  <a:srgbClr val="8A8A8A"/>
+                </a:solidFill>
+                <a:latin typeface="Consolas" pitchFamily="34" charset="0"/>
+                <a:ea typeface="Consolas" pitchFamily="34" charset="-122"/>
+                <a:cs typeface="Consolas" pitchFamily="34" charset="-120"/>
+              </a:rPr>
+              <a:t>具体例
+</a:t>
+            </a:r>
+            <a:endParaRPr lang="en-US" sz="850" dirty="0"/>
+          </a:p>
+          <a:p>
+            <a:pPr indent="0" marL="0">
+              <a:lnSpc>
+                <a:spcPct val="115000"/>
+              </a:lnSpc>
+              <a:buNone/>
+            </a:pPr>
+            <a:r>
+              <a:rPr lang="en-US" sz="950" dirty="0">
+                <a:solidFill>
+                  <a:srgbClr val="171717"/>
+                </a:solidFill>
+                <a:latin typeface="Yu Gothic" pitchFamily="34" charset="0"/>
+                <a:ea typeface="Yu Gothic" pitchFamily="34" charset="-122"/>
+                <a:cs typeface="Yu Gothic" pitchFamily="34" charset="-120"/>
+              </a:rPr>
+              <a:t>創業間もない企業A社が、銀行融資（間接金融）だけでなくベンチャーキャピタルからの出資（直接金融）を受け入れることで、返済義務のない資金を調達しつつ経営のアドバイスも得られるというメリットがある。</a:t>
+            </a:r>
+            <a:endParaRPr lang="en-US" sz="850" dirty="0"/>
+          </a:p>
+        </p:txBody>
+      </p:sp>
+      <p:sp>
+        <p:nvSpPr>
+          <p:cNvPr id="19" name="Shape 17"/>
           <p:cNvSpPr/>
           <p:nvPr/>
         </p:nvSpPr>
         <p:spPr>
           <a:xfrm>
-            <a:off x="502920" y="3410712"/>
+            <a:off x="502920" y="4078224"/>
             <a:ext cx="11201400" cy="0"/>
           </a:xfrm>
           <a:prstGeom prst="line">
@@ -47255,13 +48137,13 @@
       </p:sp>
       <p:sp>
         <p:nvSpPr>
-          <p:cNvPr id="19" name="Text 17"/>
-          <p:cNvSpPr txBox="1"/>
-          <p:nvPr/>
-        </p:nvSpPr>
-        <p:spPr>
-          <a:xfrm>
-            <a:off x="502920" y="3483864"/>
+          <p:cNvPr id="20" name="Text 18"/>
+          <p:cNvSpPr txBox="1"/>
+          <p:nvPr/>
+        </p:nvSpPr>
+        <p:spPr>
+          <a:xfrm>
+            <a:off x="502920" y="4151376"/>
             <a:ext cx="11201400" cy="457200"/>
           </a:xfrm>
           <a:prstGeom prst="rect">
@@ -47314,7 +48196,7 @@
       </p:sp>
       <p:sp>
         <p:nvSpPr>
-          <p:cNvPr id="20" name="Shape 18"/>
+          <p:cNvPr id="21" name="Shape 19"/>
           <p:cNvSpPr/>
           <p:nvPr/>
         </p:nvSpPr>
@@ -47337,7 +48219,7 @@
       </p:sp>
       <p:sp>
         <p:nvSpPr>
-          <p:cNvPr id="21" name="Shape 19"/>
+          <p:cNvPr id="22" name="Shape 20"/>
           <p:cNvSpPr/>
           <p:nvPr/>
         </p:nvSpPr>
@@ -47357,7 +48239,7 @@
       </p:sp>
       <p:sp>
         <p:nvSpPr>
-          <p:cNvPr id="22" name="Text 20"/>
+          <p:cNvPr id="23" name="Text 21"/>
           <p:cNvSpPr txBox="1"/>
           <p:nvPr/>
         </p:nvSpPr>
@@ -47396,7 +48278,7 @@
       </p:sp>
       <p:sp>
         <p:nvSpPr>
-          <p:cNvPr id="23" name="Text 21"/>
+          <p:cNvPr id="24" name="Text 22"/>
           <p:cNvSpPr txBox="1"/>
           <p:nvPr/>
         </p:nvSpPr>
@@ -47435,7 +48317,7 @@
       </p:sp>
       <p:sp>
         <p:nvSpPr>
-          <p:cNvPr id="24" name="Shape 22"/>
+          <p:cNvPr id="25" name="Shape 23"/>
           <p:cNvSpPr/>
           <p:nvPr/>
         </p:nvSpPr>
@@ -47458,7 +48340,7 @@
       </p:sp>
       <p:sp>
         <p:nvSpPr>
-          <p:cNvPr id="25" name="Text 23"/>
+          <p:cNvPr id="26" name="Text 24"/>
           <p:cNvSpPr txBox="1"/>
           <p:nvPr/>
         </p:nvSpPr>
@@ -47497,7 +48379,7 @@
       </p:sp>
       <p:sp>
         <p:nvSpPr>
-          <p:cNvPr id="26" name="Text 24"/>
+          <p:cNvPr id="27" name="Text 25"/>
           <p:cNvSpPr txBox="1"/>
           <p:nvPr/>
         </p:nvSpPr>
@@ -47536,7 +48418,7 @@
       </p:sp>
       <p:sp>
         <p:nvSpPr>
-          <p:cNvPr id="27" name="Shape 25"/>
+          <p:cNvPr id="28" name="Shape 26"/>
           <p:cNvSpPr/>
           <p:nvPr/>
         </p:nvSpPr>
@@ -47561,7 +48443,7 @@
       </p:sp>
       <p:sp>
         <p:nvSpPr>
-          <p:cNvPr id="28" name="Text 26"/>
+          <p:cNvPr id="29" name="Text 27"/>
           <p:cNvSpPr txBox="1"/>
           <p:nvPr/>
         </p:nvSpPr>
@@ -47600,7 +48482,7 @@
       </p:sp>
       <p:sp>
         <p:nvSpPr>
-          <p:cNvPr id="29" name="Shape 27"/>
+          <p:cNvPr id="30" name="Shape 28"/>
           <p:cNvSpPr/>
           <p:nvPr/>
         </p:nvSpPr>
@@ -47625,7 +48507,7 @@
       </p:sp>
       <p:sp>
         <p:nvSpPr>
-          <p:cNvPr id="30" name="Text 28"/>
+          <p:cNvPr id="31" name="Text 29"/>
           <p:cNvSpPr txBox="1"/>
           <p:nvPr/>
         </p:nvSpPr>
@@ -47664,7 +48546,7 @@
       </p:sp>
       <p:sp>
         <p:nvSpPr>
-          <p:cNvPr id="31" name="Shape 29"/>
+          <p:cNvPr id="32" name="Shape 30"/>
           <p:cNvSpPr/>
           <p:nvPr/>
         </p:nvSpPr>
@@ -47689,7 +48571,7 @@
       </p:sp>
       <p:sp>
         <p:nvSpPr>
-          <p:cNvPr id="32" name="Text 30"/>
+          <p:cNvPr id="33" name="Text 31"/>
           <p:cNvSpPr txBox="1"/>
           <p:nvPr/>
         </p:nvSpPr>
@@ -47728,7 +48610,7 @@
       </p:sp>
       <p:sp>
         <p:nvSpPr>
-          <p:cNvPr id="33" name="Shape 31"/>
+          <p:cNvPr id="34" name="Shape 32"/>
           <p:cNvSpPr/>
           <p:nvPr/>
         </p:nvSpPr>
@@ -47753,7 +48635,7 @@
       </p:sp>
       <p:sp>
         <p:nvSpPr>
-          <p:cNvPr id="34" name="Text 32"/>
+          <p:cNvPr id="35" name="Text 33"/>
           <p:cNvSpPr txBox="1"/>
           <p:nvPr/>
         </p:nvSpPr>
@@ -47792,7 +48674,7 @@
       </p:sp>
       <p:sp>
         <p:nvSpPr>
-          <p:cNvPr id="35" name="Shape 33"/>
+          <p:cNvPr id="36" name="Shape 34"/>
           <p:cNvSpPr/>
           <p:nvPr/>
         </p:nvSpPr>
@@ -47817,7 +48699,7 @@
       </p:sp>
       <p:sp>
         <p:nvSpPr>
-          <p:cNvPr id="36" name="Text 34"/>
+          <p:cNvPr id="37" name="Text 35"/>
           <p:cNvSpPr txBox="1"/>
           <p:nvPr/>
         </p:nvSpPr>
@@ -47856,7 +48738,7 @@
       </p:sp>
       <p:sp>
         <p:nvSpPr>
-          <p:cNvPr id="37" name="Shape 35"/>
+          <p:cNvPr id="38" name="Shape 36"/>
           <p:cNvSpPr/>
           <p:nvPr/>
         </p:nvSpPr>
@@ -47881,7 +48763,7 @@
       </p:sp>
       <p:sp>
         <p:nvSpPr>
-          <p:cNvPr id="38" name="Text 36"/>
+          <p:cNvPr id="39" name="Text 37"/>
           <p:cNvSpPr txBox="1"/>
           <p:nvPr/>
         </p:nvSpPr>
@@ -47920,7 +48802,7 @@
       </p:sp>
       <p:sp>
         <p:nvSpPr>
-          <p:cNvPr id="39" name="Shape 37"/>
+          <p:cNvPr id="40" name="Shape 38"/>
           <p:cNvSpPr/>
           <p:nvPr/>
         </p:nvSpPr>
@@ -47945,7 +48827,7 @@
       </p:sp>
       <p:sp>
         <p:nvSpPr>
-          <p:cNvPr id="40" name="Text 38"/>
+          <p:cNvPr id="41" name="Text 39"/>
           <p:cNvSpPr txBox="1"/>
           <p:nvPr/>
         </p:nvSpPr>
@@ -47984,7 +48866,7 @@
       </p:sp>
       <p:sp>
         <p:nvSpPr>
-          <p:cNvPr id="41" name="Shape 39"/>
+          <p:cNvPr id="42" name="Shape 40"/>
           <p:cNvSpPr/>
           <p:nvPr/>
         </p:nvSpPr>
@@ -48009,7 +48891,7 @@
       </p:sp>
       <p:sp>
         <p:nvSpPr>
-          <p:cNvPr id="42" name="Text 40"/>
+          <p:cNvPr id="43" name="Text 41"/>
           <p:cNvSpPr txBox="1"/>
           <p:nvPr/>
         </p:nvSpPr>
@@ -48048,7 +48930,7 @@
       </p:sp>
       <p:sp>
         <p:nvSpPr>
-          <p:cNvPr id="43" name="Shape 41"/>
+          <p:cNvPr id="44" name="Shape 42"/>
           <p:cNvSpPr/>
           <p:nvPr/>
         </p:nvSpPr>
@@ -48073,7 +48955,7 @@
       </p:sp>
       <p:sp>
         <p:nvSpPr>
-          <p:cNvPr id="44" name="Text 42"/>
+          <p:cNvPr id="45" name="Text 43"/>
           <p:cNvSpPr txBox="1"/>
           <p:nvPr/>
         </p:nvSpPr>
@@ -48112,7 +48994,7 @@
       </p:sp>
       <p:sp>
         <p:nvSpPr>
-          <p:cNvPr id="45" name="Shape 43"/>
+          <p:cNvPr id="46" name="Shape 44"/>
           <p:cNvSpPr/>
           <p:nvPr/>
         </p:nvSpPr>
@@ -48137,7 +49019,7 @@
       </p:sp>
       <p:sp>
         <p:nvSpPr>
-          <p:cNvPr id="46" name="Text 44"/>
+          <p:cNvPr id="47" name="Text 45"/>
           <p:cNvSpPr txBox="1"/>
           <p:nvPr/>
         </p:nvSpPr>
@@ -48752,13 +49634,76 @@
       </p:sp>
       <p:sp>
         <p:nvSpPr>
-          <p:cNvPr id="18" name="Shape 16"/>
+          <p:cNvPr id="18" name="Text 16"/>
+          <p:cNvSpPr txBox="1"/>
+          <p:nvPr/>
+        </p:nvSpPr>
+        <p:spPr>
+          <a:xfrm>
+            <a:off x="502920" y="3236976"/>
+            <a:ext cx="11201400" cy="365760"/>
+          </a:xfrm>
+          <a:prstGeom prst="rect">
+            <a:avLst/>
+          </a:prstGeom>
+          <a:noFill/>
+          <a:ln/>
+        </p:spPr>
+        <p:txBody>
+          <a:bodyPr wrap="square" lIns="0" tIns="0" rIns="0" bIns="0" rtlCol="0" anchor="ctr"/>
+          <a:lstStyle/>
+          <a:p>
+            <a:pPr indent="0" marL="0">
+              <a:lnSpc>
+                <a:spcPct val="110000"/>
+              </a:lnSpc>
+              <a:buNone/>
+            </a:pPr>
+            <a:r>
+              <a:rPr lang="en-US" sz="850" b="1" dirty="0">
+                <a:solidFill>
+                  <a:srgbClr val="8A8A8A"/>
+                </a:solidFill>
+                <a:latin typeface="Consolas" pitchFamily="34" charset="0"/>
+                <a:ea typeface="Consolas" pitchFamily="34" charset="-122"/>
+                <a:cs typeface="Consolas" pitchFamily="34" charset="-120"/>
+              </a:rPr>
+              <a:t>具体例
+</a:t>
+            </a:r>
+            <a:endParaRPr lang="en-US" sz="850" dirty="0"/>
+          </a:p>
+          <a:p>
+            <a:pPr indent="0" marL="0">
+              <a:lnSpc>
+                <a:spcPct val="110000"/>
+              </a:lnSpc>
+              <a:buNone/>
+            </a:pPr>
+            <a:r>
+              <a:rPr lang="en-US" sz="900" dirty="0">
+                <a:solidFill>
+                  <a:srgbClr val="171717"/>
+                </a:solidFill>
+                <a:latin typeface="Yu Gothic" pitchFamily="34" charset="0"/>
+                <a:ea typeface="Yu Gothic" pitchFamily="34" charset="-122"/>
+                <a:cs typeface="Yu Gothic" pitchFamily="34" charset="-120"/>
+              </a:rPr>
+              <a:t>上場企業A社が決算を発表する際、まず速報性の高い決算短信を公表し、その後、より詳細な内容を記載した有価証券報告書を事業年度終了後3か月以内に提出する、という2段階の開示を行うのが一般的。</a:t>
+            </a:r>
+            <a:endParaRPr lang="en-US" sz="850" dirty="0"/>
+          </a:p>
+        </p:txBody>
+      </p:sp>
+      <p:sp>
+        <p:nvSpPr>
+          <p:cNvPr id="19" name="Shape 17"/>
           <p:cNvSpPr/>
           <p:nvPr/>
         </p:nvSpPr>
         <p:spPr>
           <a:xfrm>
-            <a:off x="502920" y="3255264"/>
+            <a:off x="502920" y="3648456"/>
             <a:ext cx="11201400" cy="0"/>
           </a:xfrm>
           <a:prstGeom prst="line">
@@ -48775,13 +49720,13 @@
       </p:sp>
       <p:sp>
         <p:nvSpPr>
-          <p:cNvPr id="19" name="Text 17"/>
-          <p:cNvSpPr txBox="1"/>
-          <p:nvPr/>
-        </p:nvSpPr>
-        <p:spPr>
-          <a:xfrm>
-            <a:off x="502920" y="3328416"/>
+          <p:cNvPr id="20" name="Text 18"/>
+          <p:cNvSpPr txBox="1"/>
+          <p:nvPr/>
+        </p:nvSpPr>
+        <p:spPr>
+          <a:xfrm>
+            <a:off x="502920" y="3721608"/>
             <a:ext cx="11201400" cy="457200"/>
           </a:xfrm>
           <a:prstGeom prst="rect">
@@ -48834,7 +49779,7 @@
       </p:sp>
       <p:sp>
         <p:nvSpPr>
-          <p:cNvPr id="20" name="Shape 18"/>
+          <p:cNvPr id="21" name="Shape 19"/>
           <p:cNvSpPr/>
           <p:nvPr/>
         </p:nvSpPr>
@@ -48857,7 +49802,7 @@
       </p:sp>
       <p:sp>
         <p:nvSpPr>
-          <p:cNvPr id="21" name="Shape 19"/>
+          <p:cNvPr id="22" name="Shape 20"/>
           <p:cNvSpPr/>
           <p:nvPr/>
         </p:nvSpPr>
@@ -48877,7 +49822,7 @@
       </p:sp>
       <p:sp>
         <p:nvSpPr>
-          <p:cNvPr id="22" name="Text 20"/>
+          <p:cNvPr id="23" name="Text 21"/>
           <p:cNvSpPr txBox="1"/>
           <p:nvPr/>
         </p:nvSpPr>
@@ -48916,7 +49861,7 @@
       </p:sp>
       <p:sp>
         <p:nvSpPr>
-          <p:cNvPr id="23" name="Text 21"/>
+          <p:cNvPr id="24" name="Text 22"/>
           <p:cNvSpPr txBox="1"/>
           <p:nvPr/>
         </p:nvSpPr>
@@ -48955,7 +49900,7 @@
       </p:sp>
       <p:sp>
         <p:nvSpPr>
-          <p:cNvPr id="24" name="Shape 22"/>
+          <p:cNvPr id="25" name="Shape 23"/>
           <p:cNvSpPr/>
           <p:nvPr/>
         </p:nvSpPr>
@@ -48978,7 +49923,7 @@
       </p:sp>
       <p:sp>
         <p:nvSpPr>
-          <p:cNvPr id="25" name="Text 23"/>
+          <p:cNvPr id="26" name="Text 24"/>
           <p:cNvSpPr txBox="1"/>
           <p:nvPr/>
         </p:nvSpPr>
@@ -49017,7 +49962,7 @@
       </p:sp>
       <p:sp>
         <p:nvSpPr>
-          <p:cNvPr id="26" name="Text 24"/>
+          <p:cNvPr id="27" name="Text 25"/>
           <p:cNvSpPr txBox="1"/>
           <p:nvPr/>
         </p:nvSpPr>
@@ -49056,7 +50001,7 @@
       </p:sp>
       <p:sp>
         <p:nvSpPr>
-          <p:cNvPr id="27" name="Shape 25"/>
+          <p:cNvPr id="28" name="Shape 26"/>
           <p:cNvSpPr/>
           <p:nvPr/>
         </p:nvSpPr>
@@ -49081,7 +50026,7 @@
       </p:sp>
       <p:sp>
         <p:nvSpPr>
-          <p:cNvPr id="28" name="Text 26"/>
+          <p:cNvPr id="29" name="Text 27"/>
           <p:cNvSpPr txBox="1"/>
           <p:nvPr/>
         </p:nvSpPr>
@@ -49120,7 +50065,7 @@
       </p:sp>
       <p:sp>
         <p:nvSpPr>
-          <p:cNvPr id="29" name="Shape 27"/>
+          <p:cNvPr id="30" name="Shape 28"/>
           <p:cNvSpPr/>
           <p:nvPr/>
         </p:nvSpPr>
@@ -49145,7 +50090,7 @@
       </p:sp>
       <p:sp>
         <p:nvSpPr>
-          <p:cNvPr id="30" name="Text 28"/>
+          <p:cNvPr id="31" name="Text 29"/>
           <p:cNvSpPr txBox="1"/>
           <p:nvPr/>
         </p:nvSpPr>
@@ -49184,7 +50129,7 @@
       </p:sp>
       <p:sp>
         <p:nvSpPr>
-          <p:cNvPr id="31" name="Shape 29"/>
+          <p:cNvPr id="32" name="Shape 30"/>
           <p:cNvSpPr/>
           <p:nvPr/>
         </p:nvSpPr>
@@ -49209,7 +50154,7 @@
       </p:sp>
       <p:sp>
         <p:nvSpPr>
-          <p:cNvPr id="32" name="Text 30"/>
+          <p:cNvPr id="33" name="Text 31"/>
           <p:cNvSpPr txBox="1"/>
           <p:nvPr/>
         </p:nvSpPr>
@@ -49248,7 +50193,7 @@
       </p:sp>
       <p:sp>
         <p:nvSpPr>
-          <p:cNvPr id="33" name="Shape 31"/>
+          <p:cNvPr id="34" name="Shape 32"/>
           <p:cNvSpPr/>
           <p:nvPr/>
         </p:nvSpPr>
@@ -49273,7 +50218,7 @@
       </p:sp>
       <p:sp>
         <p:nvSpPr>
-          <p:cNvPr id="34" name="Text 32"/>
+          <p:cNvPr id="35" name="Text 33"/>
           <p:cNvSpPr txBox="1"/>
           <p:nvPr/>
         </p:nvSpPr>
@@ -49312,7 +50257,7 @@
       </p:sp>
       <p:sp>
         <p:nvSpPr>
-          <p:cNvPr id="35" name="Shape 33"/>
+          <p:cNvPr id="36" name="Shape 34"/>
           <p:cNvSpPr/>
           <p:nvPr/>
         </p:nvSpPr>
@@ -49337,7 +50282,7 @@
       </p:sp>
       <p:sp>
         <p:nvSpPr>
-          <p:cNvPr id="36" name="Text 34"/>
+          <p:cNvPr id="37" name="Text 35"/>
           <p:cNvSpPr txBox="1"/>
           <p:nvPr/>
         </p:nvSpPr>
@@ -49376,7 +50321,7 @@
       </p:sp>
       <p:sp>
         <p:nvSpPr>
-          <p:cNvPr id="37" name="Shape 35"/>
+          <p:cNvPr id="38" name="Shape 36"/>
           <p:cNvSpPr/>
           <p:nvPr/>
         </p:nvSpPr>
@@ -49401,7 +50346,7 @@
       </p:sp>
       <p:sp>
         <p:nvSpPr>
-          <p:cNvPr id="38" name="Text 36"/>
+          <p:cNvPr id="39" name="Text 37"/>
           <p:cNvSpPr txBox="1"/>
           <p:nvPr/>
         </p:nvSpPr>
@@ -49440,7 +50385,7 @@
       </p:sp>
       <p:sp>
         <p:nvSpPr>
-          <p:cNvPr id="39" name="Shape 37"/>
+          <p:cNvPr id="40" name="Shape 38"/>
           <p:cNvSpPr/>
           <p:nvPr/>
         </p:nvSpPr>
@@ -49465,7 +50410,7 @@
       </p:sp>
       <p:sp>
         <p:nvSpPr>
-          <p:cNvPr id="40" name="Text 38"/>
+          <p:cNvPr id="41" name="Text 39"/>
           <p:cNvSpPr txBox="1"/>
           <p:nvPr/>
         </p:nvSpPr>
@@ -49504,7 +50449,7 @@
       </p:sp>
       <p:sp>
         <p:nvSpPr>
-          <p:cNvPr id="41" name="Shape 39"/>
+          <p:cNvPr id="42" name="Shape 40"/>
           <p:cNvSpPr/>
           <p:nvPr/>
         </p:nvSpPr>
@@ -49529,7 +50474,7 @@
       </p:sp>
       <p:sp>
         <p:nvSpPr>
-          <p:cNvPr id="42" name="Text 40"/>
+          <p:cNvPr id="43" name="Text 41"/>
           <p:cNvSpPr txBox="1"/>
           <p:nvPr/>
         </p:nvSpPr>
@@ -49568,7 +50513,7 @@
       </p:sp>
       <p:sp>
         <p:nvSpPr>
-          <p:cNvPr id="43" name="Shape 41"/>
+          <p:cNvPr id="44" name="Shape 42"/>
           <p:cNvSpPr/>
           <p:nvPr/>
         </p:nvSpPr>
@@ -49593,7 +50538,7 @@
       </p:sp>
       <p:sp>
         <p:nvSpPr>
-          <p:cNvPr id="44" name="Text 42"/>
+          <p:cNvPr id="45" name="Text 43"/>
           <p:cNvSpPr txBox="1"/>
           <p:nvPr/>
         </p:nvSpPr>
@@ -49632,7 +50577,7 @@
       </p:sp>
       <p:sp>
         <p:nvSpPr>
-          <p:cNvPr id="45" name="Shape 43"/>
+          <p:cNvPr id="46" name="Shape 44"/>
           <p:cNvSpPr/>
           <p:nvPr/>
         </p:nvSpPr>
@@ -49657,7 +50602,7 @@
       </p:sp>
       <p:sp>
         <p:nvSpPr>
-          <p:cNvPr id="46" name="Text 44"/>
+          <p:cNvPr id="47" name="Text 45"/>
           <p:cNvSpPr txBox="1"/>
           <p:nvPr/>
         </p:nvSpPr>
@@ -50272,13 +51217,76 @@
       </p:sp>
       <p:sp>
         <p:nvSpPr>
-          <p:cNvPr id="18" name="Shape 16"/>
+          <p:cNvPr id="18" name="Text 16"/>
+          <p:cNvSpPr txBox="1"/>
+          <p:nvPr/>
+        </p:nvSpPr>
+        <p:spPr>
+          <a:xfrm>
+            <a:off x="502920" y="3236976"/>
+            <a:ext cx="11201400" cy="594360"/>
+          </a:xfrm>
+          <a:prstGeom prst="rect">
+            <a:avLst/>
+          </a:prstGeom>
+          <a:noFill/>
+          <a:ln/>
+        </p:spPr>
+        <p:txBody>
+          <a:bodyPr wrap="square" lIns="0" tIns="0" rIns="0" bIns="0" rtlCol="0" anchor="ctr"/>
+          <a:lstStyle/>
+          <a:p>
+            <a:pPr indent="0" marL="0">
+              <a:lnSpc>
+                <a:spcPct val="110000"/>
+              </a:lnSpc>
+              <a:buNone/>
+            </a:pPr>
+            <a:r>
+              <a:rPr lang="en-US" sz="850" b="1" dirty="0">
+                <a:solidFill>
+                  <a:srgbClr val="8A8A8A"/>
+                </a:solidFill>
+                <a:latin typeface="Consolas" pitchFamily="34" charset="0"/>
+                <a:ea typeface="Consolas" pitchFamily="34" charset="-122"/>
+                <a:cs typeface="Consolas" pitchFamily="34" charset="-120"/>
+              </a:rPr>
+              <a:t>具体例
+</a:t>
+            </a:r>
+            <a:endParaRPr lang="en-US" sz="850" dirty="0"/>
+          </a:p>
+          <a:p>
+            <a:pPr indent="0" marL="0">
+              <a:lnSpc>
+                <a:spcPct val="110000"/>
+              </a:lnSpc>
+              <a:buNone/>
+            </a:pPr>
+            <a:r>
+              <a:rPr lang="en-US" sz="900" dirty="0">
+                <a:solidFill>
+                  <a:srgbClr val="171717"/>
+                </a:solidFill>
+                <a:latin typeface="Yu Gothic" pitchFamily="34" charset="0"/>
+                <a:ea typeface="Yu Gothic" pitchFamily="34" charset="-122"/>
+                <a:cs typeface="Yu Gothic" pitchFamily="34" charset="-120"/>
+              </a:rPr>
+              <a:t>急成長中のITベンチャーA社が証券取引所のグロース市場への上場を目指す場合、株主数や流通株式時価総額等の形式基準を満たすことに加え、実質基準として「企業経営の健全性」「コーポレート・ガバナンス及び内部管理体制の有効性」等が審査される。</a:t>
+            </a:r>
+            <a:endParaRPr lang="en-US" sz="850" dirty="0"/>
+          </a:p>
+        </p:txBody>
+      </p:sp>
+      <p:sp>
+        <p:nvSpPr>
+          <p:cNvPr id="19" name="Shape 17"/>
           <p:cNvSpPr/>
           <p:nvPr/>
         </p:nvSpPr>
         <p:spPr>
           <a:xfrm>
-            <a:off x="502920" y="3255264"/>
+            <a:off x="502920" y="3877056"/>
             <a:ext cx="11201400" cy="0"/>
           </a:xfrm>
           <a:prstGeom prst="line">
@@ -50295,13 +51303,13 @@
       </p:sp>
       <p:sp>
         <p:nvSpPr>
-          <p:cNvPr id="19" name="Text 17"/>
-          <p:cNvSpPr txBox="1"/>
-          <p:nvPr/>
-        </p:nvSpPr>
-        <p:spPr>
-          <a:xfrm>
-            <a:off x="502920" y="3328416"/>
+          <p:cNvPr id="20" name="Text 18"/>
+          <p:cNvSpPr txBox="1"/>
+          <p:nvPr/>
+        </p:nvSpPr>
+        <p:spPr>
+          <a:xfrm>
+            <a:off x="502920" y="3950208"/>
             <a:ext cx="11201400" cy="457200"/>
           </a:xfrm>
           <a:prstGeom prst="rect">
@@ -50354,7 +51362,7 @@
       </p:sp>
       <p:sp>
         <p:nvSpPr>
-          <p:cNvPr id="20" name="Shape 18"/>
+          <p:cNvPr id="21" name="Shape 19"/>
           <p:cNvSpPr/>
           <p:nvPr/>
         </p:nvSpPr>
@@ -50377,7 +51385,7 @@
       </p:sp>
       <p:sp>
         <p:nvSpPr>
-          <p:cNvPr id="21" name="Shape 19"/>
+          <p:cNvPr id="22" name="Shape 20"/>
           <p:cNvSpPr/>
           <p:nvPr/>
         </p:nvSpPr>
@@ -50397,7 +51405,7 @@
       </p:sp>
       <p:sp>
         <p:nvSpPr>
-          <p:cNvPr id="22" name="Text 20"/>
+          <p:cNvPr id="23" name="Text 21"/>
           <p:cNvSpPr txBox="1"/>
           <p:nvPr/>
         </p:nvSpPr>
@@ -50436,7 +51444,7 @@
       </p:sp>
       <p:sp>
         <p:nvSpPr>
-          <p:cNvPr id="23" name="Text 21"/>
+          <p:cNvPr id="24" name="Text 22"/>
           <p:cNvSpPr txBox="1"/>
           <p:nvPr/>
         </p:nvSpPr>
@@ -50475,7 +51483,7 @@
       </p:sp>
       <p:sp>
         <p:nvSpPr>
-          <p:cNvPr id="24" name="Shape 22"/>
+          <p:cNvPr id="25" name="Shape 23"/>
           <p:cNvSpPr/>
           <p:nvPr/>
         </p:nvSpPr>
@@ -50498,7 +51506,7 @@
       </p:sp>
       <p:sp>
         <p:nvSpPr>
-          <p:cNvPr id="25" name="Text 23"/>
+          <p:cNvPr id="26" name="Text 24"/>
           <p:cNvSpPr txBox="1"/>
           <p:nvPr/>
         </p:nvSpPr>
@@ -50537,7 +51545,7 @@
       </p:sp>
       <p:sp>
         <p:nvSpPr>
-          <p:cNvPr id="26" name="Text 24"/>
+          <p:cNvPr id="27" name="Text 25"/>
           <p:cNvSpPr txBox="1"/>
           <p:nvPr/>
         </p:nvSpPr>
@@ -50576,7 +51584,7 @@
       </p:sp>
       <p:sp>
         <p:nvSpPr>
-          <p:cNvPr id="27" name="Shape 25"/>
+          <p:cNvPr id="28" name="Shape 26"/>
           <p:cNvSpPr/>
           <p:nvPr/>
         </p:nvSpPr>
@@ -50601,7 +51609,7 @@
       </p:sp>
       <p:sp>
         <p:nvSpPr>
-          <p:cNvPr id="28" name="Text 26"/>
+          <p:cNvPr id="29" name="Text 27"/>
           <p:cNvSpPr txBox="1"/>
           <p:nvPr/>
         </p:nvSpPr>
@@ -50640,7 +51648,7 @@
       </p:sp>
       <p:sp>
         <p:nvSpPr>
-          <p:cNvPr id="29" name="Shape 27"/>
+          <p:cNvPr id="30" name="Shape 28"/>
           <p:cNvSpPr/>
           <p:nvPr/>
         </p:nvSpPr>
@@ -50665,7 +51673,7 @@
       </p:sp>
       <p:sp>
         <p:nvSpPr>
-          <p:cNvPr id="30" name="Text 28"/>
+          <p:cNvPr id="31" name="Text 29"/>
           <p:cNvSpPr txBox="1"/>
           <p:nvPr/>
         </p:nvSpPr>
@@ -50704,7 +51712,7 @@
       </p:sp>
       <p:sp>
         <p:nvSpPr>
-          <p:cNvPr id="31" name="Shape 29"/>
+          <p:cNvPr id="32" name="Shape 30"/>
           <p:cNvSpPr/>
           <p:nvPr/>
         </p:nvSpPr>
@@ -50729,7 +51737,7 @@
       </p:sp>
       <p:sp>
         <p:nvSpPr>
-          <p:cNvPr id="32" name="Text 30"/>
+          <p:cNvPr id="33" name="Text 31"/>
           <p:cNvSpPr txBox="1"/>
           <p:nvPr/>
         </p:nvSpPr>
@@ -50768,7 +51776,7 @@
       </p:sp>
       <p:sp>
         <p:nvSpPr>
-          <p:cNvPr id="33" name="Shape 31"/>
+          <p:cNvPr id="34" name="Shape 32"/>
           <p:cNvSpPr/>
           <p:nvPr/>
         </p:nvSpPr>
@@ -50793,7 +51801,7 @@
       </p:sp>
       <p:sp>
         <p:nvSpPr>
-          <p:cNvPr id="34" name="Text 32"/>
+          <p:cNvPr id="35" name="Text 33"/>
           <p:cNvSpPr txBox="1"/>
           <p:nvPr/>
         </p:nvSpPr>
@@ -50832,7 +51840,7 @@
       </p:sp>
       <p:sp>
         <p:nvSpPr>
-          <p:cNvPr id="35" name="Shape 33"/>
+          <p:cNvPr id="36" name="Shape 34"/>
           <p:cNvSpPr/>
           <p:nvPr/>
         </p:nvSpPr>
@@ -50857,7 +51865,7 @@
       </p:sp>
       <p:sp>
         <p:nvSpPr>
-          <p:cNvPr id="36" name="Text 34"/>
+          <p:cNvPr id="37" name="Text 35"/>
           <p:cNvSpPr txBox="1"/>
           <p:nvPr/>
         </p:nvSpPr>
@@ -50896,7 +51904,7 @@
       </p:sp>
       <p:sp>
         <p:nvSpPr>
-          <p:cNvPr id="37" name="Shape 35"/>
+          <p:cNvPr id="38" name="Shape 36"/>
           <p:cNvSpPr/>
           <p:nvPr/>
         </p:nvSpPr>
@@ -50921,7 +51929,7 @@
       </p:sp>
       <p:sp>
         <p:nvSpPr>
-          <p:cNvPr id="38" name="Text 36"/>
+          <p:cNvPr id="39" name="Text 37"/>
           <p:cNvSpPr txBox="1"/>
           <p:nvPr/>
         </p:nvSpPr>
@@ -50960,7 +51968,7 @@
       </p:sp>
       <p:sp>
         <p:nvSpPr>
-          <p:cNvPr id="39" name="Shape 37"/>
+          <p:cNvPr id="40" name="Shape 38"/>
           <p:cNvSpPr/>
           <p:nvPr/>
         </p:nvSpPr>
@@ -50985,7 +51993,7 @@
       </p:sp>
       <p:sp>
         <p:nvSpPr>
-          <p:cNvPr id="40" name="Text 38"/>
+          <p:cNvPr id="41" name="Text 39"/>
           <p:cNvSpPr txBox="1"/>
           <p:nvPr/>
         </p:nvSpPr>
@@ -51024,7 +52032,7 @@
       </p:sp>
       <p:sp>
         <p:nvSpPr>
-          <p:cNvPr id="41" name="Shape 39"/>
+          <p:cNvPr id="42" name="Shape 40"/>
           <p:cNvSpPr/>
           <p:nvPr/>
         </p:nvSpPr>
@@ -51049,7 +52057,7 @@
       </p:sp>
       <p:sp>
         <p:nvSpPr>
-          <p:cNvPr id="42" name="Text 40"/>
+          <p:cNvPr id="43" name="Text 41"/>
           <p:cNvSpPr txBox="1"/>
           <p:nvPr/>
         </p:nvSpPr>
@@ -51088,7 +52096,7 @@
       </p:sp>
       <p:sp>
         <p:nvSpPr>
-          <p:cNvPr id="43" name="Shape 41"/>
+          <p:cNvPr id="44" name="Shape 42"/>
           <p:cNvSpPr/>
           <p:nvPr/>
         </p:nvSpPr>
@@ -51113,7 +52121,7 @@
       </p:sp>
       <p:sp>
         <p:nvSpPr>
-          <p:cNvPr id="44" name="Text 42"/>
+          <p:cNvPr id="45" name="Text 43"/>
           <p:cNvSpPr txBox="1"/>
           <p:nvPr/>
         </p:nvSpPr>
@@ -51152,7 +52160,7 @@
       </p:sp>
       <p:sp>
         <p:nvSpPr>
-          <p:cNvPr id="45" name="Shape 43"/>
+          <p:cNvPr id="46" name="Shape 44"/>
           <p:cNvSpPr/>
           <p:nvPr/>
         </p:nvSpPr>
@@ -51177,7 +52185,7 @@
       </p:sp>
       <p:sp>
         <p:nvSpPr>
-          <p:cNvPr id="46" name="Text 44"/>
+          <p:cNvPr id="47" name="Text 45"/>
           <p:cNvSpPr txBox="1"/>
           <p:nvPr/>
         </p:nvSpPr>
@@ -51691,13 +52699,76 @@
       </p:sp>
       <p:sp>
         <p:nvSpPr>
-          <p:cNvPr id="15" name="Shape 13"/>
+          <p:cNvPr id="15" name="Text 13"/>
+          <p:cNvSpPr txBox="1"/>
+          <p:nvPr/>
+        </p:nvSpPr>
+        <p:spPr>
+          <a:xfrm>
+            <a:off x="502920" y="3118104"/>
+            <a:ext cx="11201400" cy="548640"/>
+          </a:xfrm>
+          <a:prstGeom prst="rect">
+            <a:avLst/>
+          </a:prstGeom>
+          <a:noFill/>
+          <a:ln/>
+        </p:spPr>
+        <p:txBody>
+          <a:bodyPr wrap="square" lIns="0" tIns="0" rIns="0" bIns="0" rtlCol="0" anchor="ctr"/>
+          <a:lstStyle/>
+          <a:p>
+            <a:pPr indent="0" marL="0">
+              <a:lnSpc>
+                <a:spcPct val="120000"/>
+              </a:lnSpc>
+              <a:buNone/>
+            </a:pPr>
+            <a:r>
+              <a:rPr lang="en-US" sz="850" b="1" dirty="0">
+                <a:solidFill>
+                  <a:srgbClr val="8A8A8A"/>
+                </a:solidFill>
+                <a:latin typeface="Consolas" pitchFamily="34" charset="0"/>
+                <a:ea typeface="Consolas" pitchFamily="34" charset="-122"/>
+                <a:cs typeface="Consolas" pitchFamily="34" charset="-120"/>
+              </a:rPr>
+              <a:t>具体例
+</a:t>
+            </a:r>
+            <a:endParaRPr lang="en-US" sz="850" dirty="0"/>
+          </a:p>
+          <a:p>
+            <a:pPr indent="0" marL="0">
+              <a:lnSpc>
+                <a:spcPct val="120000"/>
+              </a:lnSpc>
+              <a:buNone/>
+            </a:pPr>
+            <a:r>
+              <a:rPr lang="en-US" sz="950" dirty="0">
+                <a:solidFill>
+                  <a:srgbClr val="171717"/>
+                </a:solidFill>
+                <a:latin typeface="Yu Gothic" pitchFamily="34" charset="0"/>
+                <a:ea typeface="Yu Gothic" pitchFamily="34" charset="-122"/>
+                <a:cs typeface="Yu Gothic" pitchFamily="34" charset="-120"/>
+              </a:rPr>
+              <a:t>飲食店を新規開業するA社は、会社の設立登記を終えていても、保健所への営業許可を受けなければ店舗を開けない。無許可営業は食品衛生法違反となる。従業員を新たに雇用する際は、労働基準監督署・公共職業安定所での労働保険加入手続もあわせて必要になる。</a:t>
+            </a:r>
+            <a:endParaRPr lang="en-US" sz="850" dirty="0"/>
+          </a:p>
+        </p:txBody>
+      </p:sp>
+      <p:sp>
+        <p:nvSpPr>
+          <p:cNvPr id="16" name="Shape 14"/>
           <p:cNvSpPr/>
           <p:nvPr/>
         </p:nvSpPr>
         <p:spPr>
           <a:xfrm>
-            <a:off x="502920" y="3136392"/>
+            <a:off x="502920" y="3712464"/>
             <a:ext cx="11201400" cy="0"/>
           </a:xfrm>
           <a:prstGeom prst="line">
@@ -51714,13 +52785,13 @@
       </p:sp>
       <p:sp>
         <p:nvSpPr>
-          <p:cNvPr id="16" name="Text 14"/>
-          <p:cNvSpPr txBox="1"/>
-          <p:nvPr/>
-        </p:nvSpPr>
-        <p:spPr>
-          <a:xfrm>
-            <a:off x="502920" y="3209544"/>
+          <p:cNvPr id="17" name="Text 15"/>
+          <p:cNvSpPr txBox="1"/>
+          <p:nvPr/>
+        </p:nvSpPr>
+        <p:spPr>
+          <a:xfrm>
+            <a:off x="502920" y="3785616"/>
             <a:ext cx="11201400" cy="548640"/>
           </a:xfrm>
           <a:prstGeom prst="rect">
@@ -51773,7 +52844,7 @@
       </p:sp>
       <p:sp>
         <p:nvSpPr>
-          <p:cNvPr id="17" name="Shape 15"/>
+          <p:cNvPr id="18" name="Shape 16"/>
           <p:cNvSpPr/>
           <p:nvPr/>
         </p:nvSpPr>
@@ -51796,7 +52867,7 @@
       </p:sp>
       <p:sp>
         <p:nvSpPr>
-          <p:cNvPr id="18" name="Shape 16"/>
+          <p:cNvPr id="19" name="Shape 17"/>
           <p:cNvSpPr/>
           <p:nvPr/>
         </p:nvSpPr>
@@ -51816,7 +52887,7 @@
       </p:sp>
       <p:sp>
         <p:nvSpPr>
-          <p:cNvPr id="19" name="Text 17"/>
+          <p:cNvPr id="20" name="Text 18"/>
           <p:cNvSpPr txBox="1"/>
           <p:nvPr/>
         </p:nvSpPr>
@@ -51855,7 +52926,7 @@
       </p:sp>
       <p:sp>
         <p:nvSpPr>
-          <p:cNvPr id="20" name="Text 18"/>
+          <p:cNvPr id="21" name="Text 19"/>
           <p:cNvSpPr txBox="1"/>
           <p:nvPr/>
         </p:nvSpPr>
@@ -51894,7 +52965,7 @@
       </p:sp>
       <p:sp>
         <p:nvSpPr>
-          <p:cNvPr id="21" name="Shape 19"/>
+          <p:cNvPr id="22" name="Shape 20"/>
           <p:cNvSpPr/>
           <p:nvPr/>
         </p:nvSpPr>
@@ -51917,7 +52988,7 @@
       </p:sp>
       <p:sp>
         <p:nvSpPr>
-          <p:cNvPr id="22" name="Text 20"/>
+          <p:cNvPr id="23" name="Text 21"/>
           <p:cNvSpPr txBox="1"/>
           <p:nvPr/>
         </p:nvSpPr>
@@ -51956,7 +53027,7 @@
       </p:sp>
       <p:sp>
         <p:nvSpPr>
-          <p:cNvPr id="23" name="Text 21"/>
+          <p:cNvPr id="24" name="Text 22"/>
           <p:cNvSpPr txBox="1"/>
           <p:nvPr/>
         </p:nvSpPr>
@@ -51995,7 +53066,7 @@
       </p:sp>
       <p:sp>
         <p:nvSpPr>
-          <p:cNvPr id="24" name="Shape 22"/>
+          <p:cNvPr id="25" name="Shape 23"/>
           <p:cNvSpPr/>
           <p:nvPr/>
         </p:nvSpPr>
@@ -52020,7 +53091,7 @@
       </p:sp>
       <p:sp>
         <p:nvSpPr>
-          <p:cNvPr id="25" name="Text 23"/>
+          <p:cNvPr id="26" name="Text 24"/>
           <p:cNvSpPr txBox="1"/>
           <p:nvPr/>
         </p:nvSpPr>
@@ -52059,7 +53130,7 @@
       </p:sp>
       <p:sp>
         <p:nvSpPr>
-          <p:cNvPr id="26" name="Shape 24"/>
+          <p:cNvPr id="27" name="Shape 25"/>
           <p:cNvSpPr/>
           <p:nvPr/>
         </p:nvSpPr>
@@ -52084,7 +53155,7 @@
       </p:sp>
       <p:sp>
         <p:nvSpPr>
-          <p:cNvPr id="27" name="Text 25"/>
+          <p:cNvPr id="28" name="Text 26"/>
           <p:cNvSpPr txBox="1"/>
           <p:nvPr/>
         </p:nvSpPr>
@@ -52123,7 +53194,7 @@
       </p:sp>
       <p:sp>
         <p:nvSpPr>
-          <p:cNvPr id="28" name="Shape 26"/>
+          <p:cNvPr id="29" name="Shape 27"/>
           <p:cNvSpPr/>
           <p:nvPr/>
         </p:nvSpPr>
@@ -52148,7 +53219,7 @@
       </p:sp>
       <p:sp>
         <p:nvSpPr>
-          <p:cNvPr id="29" name="Text 27"/>
+          <p:cNvPr id="30" name="Text 28"/>
           <p:cNvSpPr txBox="1"/>
           <p:nvPr/>
         </p:nvSpPr>
@@ -52187,7 +53258,7 @@
       </p:sp>
       <p:sp>
         <p:nvSpPr>
-          <p:cNvPr id="30" name="Shape 28"/>
+          <p:cNvPr id="31" name="Shape 29"/>
           <p:cNvSpPr/>
           <p:nvPr/>
         </p:nvSpPr>
@@ -52212,7 +53283,7 @@
       </p:sp>
       <p:sp>
         <p:nvSpPr>
-          <p:cNvPr id="31" name="Text 29"/>
+          <p:cNvPr id="32" name="Text 30"/>
           <p:cNvSpPr txBox="1"/>
           <p:nvPr/>
         </p:nvSpPr>
@@ -52251,7 +53322,7 @@
       </p:sp>
       <p:sp>
         <p:nvSpPr>
-          <p:cNvPr id="32" name="Shape 30"/>
+          <p:cNvPr id="33" name="Shape 31"/>
           <p:cNvSpPr/>
           <p:nvPr/>
         </p:nvSpPr>
@@ -52276,7 +53347,7 @@
       </p:sp>
       <p:sp>
         <p:nvSpPr>
-          <p:cNvPr id="33" name="Text 31"/>
+          <p:cNvPr id="34" name="Text 32"/>
           <p:cNvSpPr txBox="1"/>
           <p:nvPr/>
         </p:nvSpPr>
@@ -52315,7 +53386,7 @@
       </p:sp>
       <p:sp>
         <p:nvSpPr>
-          <p:cNvPr id="34" name="Shape 32"/>
+          <p:cNvPr id="35" name="Shape 33"/>
           <p:cNvSpPr/>
           <p:nvPr/>
         </p:nvSpPr>
@@ -52340,7 +53411,7 @@
       </p:sp>
       <p:sp>
         <p:nvSpPr>
-          <p:cNvPr id="35" name="Text 33"/>
+          <p:cNvPr id="36" name="Text 34"/>
           <p:cNvSpPr txBox="1"/>
           <p:nvPr/>
         </p:nvSpPr>
@@ -52379,7 +53450,7 @@
       </p:sp>
       <p:sp>
         <p:nvSpPr>
-          <p:cNvPr id="36" name="Shape 34"/>
+          <p:cNvPr id="37" name="Shape 35"/>
           <p:cNvSpPr/>
           <p:nvPr/>
         </p:nvSpPr>
@@ -52404,7 +53475,7 @@
       </p:sp>
       <p:sp>
         <p:nvSpPr>
-          <p:cNvPr id="37" name="Text 35"/>
+          <p:cNvPr id="38" name="Text 36"/>
           <p:cNvSpPr txBox="1"/>
           <p:nvPr/>
         </p:nvSpPr>
@@ -52443,7 +53514,7 @@
       </p:sp>
       <p:sp>
         <p:nvSpPr>
-          <p:cNvPr id="38" name="Shape 36"/>
+          <p:cNvPr id="39" name="Shape 37"/>
           <p:cNvSpPr/>
           <p:nvPr/>
         </p:nvSpPr>
@@ -52468,7 +53539,7 @@
       </p:sp>
       <p:sp>
         <p:nvSpPr>
-          <p:cNvPr id="39" name="Text 37"/>
+          <p:cNvPr id="40" name="Text 38"/>
           <p:cNvSpPr txBox="1"/>
           <p:nvPr/>
         </p:nvSpPr>
@@ -52507,7 +53578,7 @@
       </p:sp>
       <p:sp>
         <p:nvSpPr>
-          <p:cNvPr id="40" name="Shape 38"/>
+          <p:cNvPr id="41" name="Shape 39"/>
           <p:cNvSpPr/>
           <p:nvPr/>
         </p:nvSpPr>
@@ -52532,7 +53603,7 @@
       </p:sp>
       <p:sp>
         <p:nvSpPr>
-          <p:cNvPr id="41" name="Text 39"/>
+          <p:cNvPr id="42" name="Text 40"/>
           <p:cNvSpPr txBox="1"/>
           <p:nvPr/>
         </p:nvSpPr>
@@ -52571,7 +53642,7 @@
       </p:sp>
       <p:sp>
         <p:nvSpPr>
-          <p:cNvPr id="42" name="Shape 40"/>
+          <p:cNvPr id="43" name="Shape 41"/>
           <p:cNvSpPr/>
           <p:nvPr/>
         </p:nvSpPr>
@@ -52596,7 +53667,7 @@
       </p:sp>
       <p:sp>
         <p:nvSpPr>
-          <p:cNvPr id="43" name="Text 41"/>
+          <p:cNvPr id="44" name="Text 42"/>
           <p:cNvSpPr txBox="1"/>
           <p:nvPr/>
         </p:nvSpPr>
@@ -56067,7 +57138,7 @@
         <p:spPr>
           <a:xfrm>
             <a:off x="4434840" y="2267712"/>
-            <a:ext cx="7269480" cy="941832"/>
+            <a:ext cx="7269480" cy="758952"/>
           </a:xfrm>
           <a:prstGeom prst="rect">
             <a:avLst/>
@@ -56108,7 +57179,7 @@
         </p:nvSpPr>
         <p:spPr>
           <a:xfrm>
-            <a:off x="502920" y="3291840"/>
+            <a:off x="502920" y="3108960"/>
             <a:ext cx="11201400" cy="0"/>
           </a:xfrm>
           <a:prstGeom prst="line">
@@ -56131,7 +57202,7 @@
         </p:nvSpPr>
         <p:spPr>
           <a:xfrm>
-            <a:off x="502920" y="3401568"/>
+            <a:off x="502920" y="3218688"/>
             <a:ext cx="1645920" cy="320040"/>
           </a:xfrm>
           <a:prstGeom prst="rect">
@@ -56170,7 +57241,7 @@
         </p:nvSpPr>
         <p:spPr>
           <a:xfrm>
-            <a:off x="2240280" y="3419856"/>
+            <a:off x="2240280" y="3236976"/>
             <a:ext cx="2103120" cy="274320"/>
           </a:xfrm>
           <a:prstGeom prst="rect">
@@ -56209,8 +57280,8 @@
         </p:nvSpPr>
         <p:spPr>
           <a:xfrm>
-            <a:off x="4434840" y="3364992"/>
-            <a:ext cx="7269480" cy="941832"/>
+            <a:off x="4434840" y="3182112"/>
+            <a:ext cx="7269480" cy="758952"/>
           </a:xfrm>
           <a:prstGeom prst="rect">
             <a:avLst/>
@@ -56251,7 +57322,7 @@
         </p:nvSpPr>
         <p:spPr>
           <a:xfrm>
-            <a:off x="502920" y="4389120"/>
+            <a:off x="502920" y="4023360"/>
             <a:ext cx="11201400" cy="0"/>
           </a:xfrm>
           <a:prstGeom prst="line">
@@ -56274,7 +57345,7 @@
         </p:nvSpPr>
         <p:spPr>
           <a:xfrm>
-            <a:off x="502920" y="4498848"/>
+            <a:off x="502920" y="4133088"/>
             <a:ext cx="1645920" cy="320040"/>
           </a:xfrm>
           <a:prstGeom prst="rect">
@@ -56313,7 +57384,7 @@
         </p:nvSpPr>
         <p:spPr>
           <a:xfrm>
-            <a:off x="2240280" y="4517136"/>
+            <a:off x="2240280" y="4151376"/>
             <a:ext cx="2103120" cy="274320"/>
           </a:xfrm>
           <a:prstGeom prst="rect">
@@ -56352,8 +57423,8 @@
         </p:nvSpPr>
         <p:spPr>
           <a:xfrm>
-            <a:off x="4434840" y="4462272"/>
-            <a:ext cx="7269480" cy="941832"/>
+            <a:off x="4434840" y="4096512"/>
+            <a:ext cx="7269480" cy="758952"/>
           </a:xfrm>
           <a:prstGeom prst="rect">
             <a:avLst/>
@@ -56388,7 +57459,70 @@
       </p:sp>
       <p:sp>
         <p:nvSpPr>
-          <p:cNvPr id="20" name="Shape 18"/>
+          <p:cNvPr id="20" name="Text 18"/>
+          <p:cNvSpPr txBox="1"/>
+          <p:nvPr/>
+        </p:nvSpPr>
+        <p:spPr>
+          <a:xfrm>
+            <a:off x="502920" y="4983480"/>
+            <a:ext cx="11201400" cy="640080"/>
+          </a:xfrm>
+          <a:prstGeom prst="rect">
+            <a:avLst/>
+          </a:prstGeom>
+          <a:noFill/>
+          <a:ln/>
+        </p:spPr>
+        <p:txBody>
+          <a:bodyPr wrap="square" lIns="0" tIns="0" rIns="0" bIns="0" rtlCol="0" anchor="ctr"/>
+          <a:lstStyle/>
+          <a:p>
+            <a:pPr indent="0" marL="0">
+              <a:lnSpc>
+                <a:spcPct val="120000"/>
+              </a:lnSpc>
+              <a:buNone/>
+            </a:pPr>
+            <a:r>
+              <a:rPr lang="en-US" sz="850" b="1" dirty="0">
+                <a:solidFill>
+                  <a:srgbClr val="8A8A8A"/>
+                </a:solidFill>
+                <a:latin typeface="Consolas" pitchFamily="34" charset="0"/>
+                <a:ea typeface="Consolas" pitchFamily="34" charset="-122"/>
+                <a:cs typeface="Consolas" pitchFamily="34" charset="-120"/>
+              </a:rPr>
+              <a:t>具体例
+</a:t>
+            </a:r>
+            <a:endParaRPr lang="en-US" sz="850" dirty="0"/>
+          </a:p>
+          <a:p>
+            <a:pPr indent="0" marL="0">
+              <a:lnSpc>
+                <a:spcPct val="120000"/>
+              </a:lnSpc>
+              <a:buNone/>
+            </a:pPr>
+            <a:r>
+              <a:rPr lang="en-US" sz="950" dirty="0">
+                <a:solidFill>
+                  <a:srgbClr val="171717"/>
+                </a:solidFill>
+                <a:latin typeface="Yu Gothic" pitchFamily="34" charset="0"/>
+                <a:ea typeface="Yu Gothic" pitchFamily="34" charset="-122"/>
+                <a:cs typeface="Yu Gothic" pitchFamily="34" charset="-120"/>
+              </a:rPr>
+              <a:t>地方で旅館業を営むA社が経営難に陥った場合、事業に将来性があると判断されれば、現経営陣が引き続き経営しながら再建を目指す民事再生を申し立てることが多い。逆に規模が大きく利害関係者の多い大企業では、裁判所の管理下でより強力に再建を進める会社更生が選ばれることがある（会社更生は株式会社しか利用できない）。</a:t>
+            </a:r>
+            <a:endParaRPr lang="en-US" sz="850" dirty="0"/>
+          </a:p>
+        </p:txBody>
+      </p:sp>
+      <p:sp>
+        <p:nvSpPr>
+          <p:cNvPr id="21" name="Shape 19"/>
           <p:cNvSpPr/>
           <p:nvPr/>
         </p:nvSpPr>
@@ -56411,7 +57545,7 @@
       </p:sp>
       <p:sp>
         <p:nvSpPr>
-          <p:cNvPr id="21" name="Shape 19"/>
+          <p:cNvPr id="22" name="Shape 20"/>
           <p:cNvSpPr/>
           <p:nvPr/>
         </p:nvSpPr>
@@ -56431,7 +57565,7 @@
       </p:sp>
       <p:sp>
         <p:nvSpPr>
-          <p:cNvPr id="22" name="Text 20"/>
+          <p:cNvPr id="23" name="Text 21"/>
           <p:cNvSpPr txBox="1"/>
           <p:nvPr/>
         </p:nvSpPr>
@@ -56470,7 +57604,7 @@
       </p:sp>
       <p:sp>
         <p:nvSpPr>
-          <p:cNvPr id="23" name="Text 21"/>
+          <p:cNvPr id="24" name="Text 22"/>
           <p:cNvSpPr txBox="1"/>
           <p:nvPr/>
         </p:nvSpPr>
@@ -56509,7 +57643,7 @@
       </p:sp>
       <p:sp>
         <p:nvSpPr>
-          <p:cNvPr id="24" name="Shape 22"/>
+          <p:cNvPr id="25" name="Shape 23"/>
           <p:cNvSpPr/>
           <p:nvPr/>
         </p:nvSpPr>
@@ -56532,7 +57666,7 @@
       </p:sp>
       <p:sp>
         <p:nvSpPr>
-          <p:cNvPr id="25" name="Text 23"/>
+          <p:cNvPr id="26" name="Text 24"/>
           <p:cNvSpPr txBox="1"/>
           <p:nvPr/>
         </p:nvSpPr>
@@ -56571,7 +57705,7 @@
       </p:sp>
       <p:sp>
         <p:nvSpPr>
-          <p:cNvPr id="26" name="Text 24"/>
+          <p:cNvPr id="27" name="Text 25"/>
           <p:cNvSpPr txBox="1"/>
           <p:nvPr/>
         </p:nvSpPr>
@@ -56610,7 +57744,7 @@
       </p:sp>
       <p:sp>
         <p:nvSpPr>
-          <p:cNvPr id="27" name="Shape 25"/>
+          <p:cNvPr id="28" name="Shape 26"/>
           <p:cNvSpPr/>
           <p:nvPr/>
         </p:nvSpPr>
@@ -56635,7 +57769,7 @@
       </p:sp>
       <p:sp>
         <p:nvSpPr>
-          <p:cNvPr id="28" name="Text 26"/>
+          <p:cNvPr id="29" name="Text 27"/>
           <p:cNvSpPr txBox="1"/>
           <p:nvPr/>
         </p:nvSpPr>
@@ -56674,7 +57808,7 @@
       </p:sp>
       <p:sp>
         <p:nvSpPr>
-          <p:cNvPr id="29" name="Shape 27"/>
+          <p:cNvPr id="30" name="Shape 28"/>
           <p:cNvSpPr/>
           <p:nvPr/>
         </p:nvSpPr>
@@ -56699,7 +57833,7 @@
       </p:sp>
       <p:sp>
         <p:nvSpPr>
-          <p:cNvPr id="30" name="Text 28"/>
+          <p:cNvPr id="31" name="Text 29"/>
           <p:cNvSpPr txBox="1"/>
           <p:nvPr/>
         </p:nvSpPr>
@@ -56738,7 +57872,7 @@
       </p:sp>
       <p:sp>
         <p:nvSpPr>
-          <p:cNvPr id="31" name="Shape 29"/>
+          <p:cNvPr id="32" name="Shape 30"/>
           <p:cNvSpPr/>
           <p:nvPr/>
         </p:nvSpPr>
@@ -56763,7 +57897,7 @@
       </p:sp>
       <p:sp>
         <p:nvSpPr>
-          <p:cNvPr id="32" name="Text 30"/>
+          <p:cNvPr id="33" name="Text 31"/>
           <p:cNvSpPr txBox="1"/>
           <p:nvPr/>
         </p:nvSpPr>
@@ -56802,7 +57936,7 @@
       </p:sp>
       <p:sp>
         <p:nvSpPr>
-          <p:cNvPr id="33" name="Shape 31"/>
+          <p:cNvPr id="34" name="Shape 32"/>
           <p:cNvSpPr/>
           <p:nvPr/>
         </p:nvSpPr>
@@ -56827,7 +57961,7 @@
       </p:sp>
       <p:sp>
         <p:nvSpPr>
-          <p:cNvPr id="34" name="Text 32"/>
+          <p:cNvPr id="35" name="Text 33"/>
           <p:cNvSpPr txBox="1"/>
           <p:nvPr/>
         </p:nvSpPr>
@@ -56866,7 +58000,7 @@
       </p:sp>
       <p:sp>
         <p:nvSpPr>
-          <p:cNvPr id="35" name="Shape 33"/>
+          <p:cNvPr id="36" name="Shape 34"/>
           <p:cNvSpPr/>
           <p:nvPr/>
         </p:nvSpPr>
@@ -56891,7 +58025,7 @@
       </p:sp>
       <p:sp>
         <p:nvSpPr>
-          <p:cNvPr id="36" name="Text 34"/>
+          <p:cNvPr id="37" name="Text 35"/>
           <p:cNvSpPr txBox="1"/>
           <p:nvPr/>
         </p:nvSpPr>
@@ -56930,7 +58064,7 @@
       </p:sp>
       <p:sp>
         <p:nvSpPr>
-          <p:cNvPr id="37" name="Shape 35"/>
+          <p:cNvPr id="38" name="Shape 36"/>
           <p:cNvSpPr/>
           <p:nvPr/>
         </p:nvSpPr>
@@ -56955,7 +58089,7 @@
       </p:sp>
       <p:sp>
         <p:nvSpPr>
-          <p:cNvPr id="38" name="Text 36"/>
+          <p:cNvPr id="39" name="Text 37"/>
           <p:cNvSpPr txBox="1"/>
           <p:nvPr/>
         </p:nvSpPr>
@@ -56994,7 +58128,7 @@
       </p:sp>
       <p:sp>
         <p:nvSpPr>
-          <p:cNvPr id="39" name="Shape 37"/>
+          <p:cNvPr id="40" name="Shape 38"/>
           <p:cNvSpPr/>
           <p:nvPr/>
         </p:nvSpPr>
@@ -57019,7 +58153,7 @@
       </p:sp>
       <p:sp>
         <p:nvSpPr>
-          <p:cNvPr id="40" name="Text 38"/>
+          <p:cNvPr id="41" name="Text 39"/>
           <p:cNvSpPr txBox="1"/>
           <p:nvPr/>
         </p:nvSpPr>
@@ -57058,7 +58192,7 @@
       </p:sp>
       <p:sp>
         <p:nvSpPr>
-          <p:cNvPr id="41" name="Shape 39"/>
+          <p:cNvPr id="42" name="Shape 40"/>
           <p:cNvSpPr/>
           <p:nvPr/>
         </p:nvSpPr>
@@ -57083,7 +58217,7 @@
       </p:sp>
       <p:sp>
         <p:nvSpPr>
-          <p:cNvPr id="42" name="Text 40"/>
+          <p:cNvPr id="43" name="Text 41"/>
           <p:cNvSpPr txBox="1"/>
           <p:nvPr/>
         </p:nvSpPr>
@@ -57122,7 +58256,7 @@
       </p:sp>
       <p:sp>
         <p:nvSpPr>
-          <p:cNvPr id="43" name="Shape 41"/>
+          <p:cNvPr id="44" name="Shape 42"/>
           <p:cNvSpPr/>
           <p:nvPr/>
         </p:nvSpPr>
@@ -57147,7 +58281,7 @@
       </p:sp>
       <p:sp>
         <p:nvSpPr>
-          <p:cNvPr id="44" name="Text 42"/>
+          <p:cNvPr id="45" name="Text 43"/>
           <p:cNvSpPr txBox="1"/>
           <p:nvPr/>
         </p:nvSpPr>
@@ -57186,7 +58320,7 @@
       </p:sp>
       <p:sp>
         <p:nvSpPr>
-          <p:cNvPr id="45" name="Shape 43"/>
+          <p:cNvPr id="46" name="Shape 44"/>
           <p:cNvSpPr/>
           <p:nvPr/>
         </p:nvSpPr>
@@ -57211,7 +58345,7 @@
       </p:sp>
       <p:sp>
         <p:nvSpPr>
-          <p:cNvPr id="46" name="Text 44"/>
+          <p:cNvPr id="47" name="Text 45"/>
           <p:cNvSpPr txBox="1"/>
           <p:nvPr/>
         </p:nvSpPr>
